--- a/resources/presentations/GRADs_poster.pptx
+++ b/resources/presentations/GRADs_poster.pptx
@@ -18,7 +18,7 @@
     <p:sldId id="256" r:id="rId13"/>
   </p:sldIdLst>
   <p:sldSz cx="43891200" cy="32918400"/>
-  <p:notesSz cx="7559675" cy="10691813"/>
+  <p:notesSz cx="7772400" cy="10058400"/>
 </p:presentation>
 </file>
 
@@ -52,7 +52,7 @@
         <p:spPr>
           <a:xfrm>
             <a:off x="3291480" y="11003760"/>
-            <a:ext cx="37303560" cy="5495400"/>
+            <a:ext cx="37303200" cy="5495040"/>
           </a:xfrm>
           <a:prstGeom prst="rect">
             <a:avLst/>
@@ -70,10 +70,11 @@
             <a:pPr indent="0" algn="ctr">
               <a:buNone/>
             </a:pPr>
-            <a:endParaRPr b="0" lang="en-US" sz="4400" spc="-1" strike="noStrike">
-              <a:solidFill>
-                <a:srgbClr val="000000"/>
-              </a:solidFill>
+            <a:endParaRPr b="0" lang="en-US" sz="4400" strike="noStrike" u="none">
+              <a:solidFill>
+                <a:srgbClr val="000000"/>
+              </a:solidFill>
+              <a:uFillTx/>
               <a:latin typeface="Arial"/>
             </a:endParaRPr>
           </a:p>
@@ -110,10 +111,11 @@
             <a:pPr indent="0" algn="ctr">
               <a:buNone/>
             </a:pPr>
-            <a:endParaRPr b="0" lang="en-US" sz="3200" spc="-1" strike="noStrike">
-              <a:solidFill>
-                <a:srgbClr val="000000"/>
-              </a:solidFill>
+            <a:endParaRPr b="0" lang="en-US" sz="3200" strike="noStrike" u="none">
+              <a:solidFill>
+                <a:srgbClr val="000000"/>
+              </a:solidFill>
+              <a:uFillTx/>
               <a:latin typeface="Arial"/>
             </a:endParaRPr>
           </a:p>
@@ -153,7 +155,7 @@
         <p:txBody>
           <a:bodyPr/>
           <a:p>
-            <a:fld id="{58EBFF23-B8D0-47C4-9615-69C20DBC73DF}" type="slidenum">
+            <a:fld id="{FDC64D3B-0FDB-4795-A17D-6F5029BE65AA}" type="slidenum">
               <a:t>&lt;#&gt;</a:t>
             </a:fld>
           </a:p>
@@ -236,7 +238,7 @@
         <p:txBody>
           <a:bodyPr/>
           <a:p>
-            <a:fld id="{5A6FDB92-B932-4284-BA44-838AF63943FB}" type="slidenum">
+            <a:fld id="{68D86927-8D4A-4249-B26E-D6D525C7F80C}" type="slidenum">
               <a:t>&lt;#&gt;</a:t>
             </a:fld>
           </a:p>
@@ -319,7 +321,7 @@
         <p:txBody>
           <a:bodyPr/>
           <a:p>
-            <a:fld id="{222AC4E4-3DD2-45E1-B57A-981F166A0525}" type="slidenum">
+            <a:fld id="{97082345-0B82-490F-852B-F829297E945B}" type="slidenum">
               <a:t>&lt;#&gt;</a:t>
             </a:fld>
           </a:p>
@@ -402,7 +404,7 @@
         <p:txBody>
           <a:bodyPr/>
           <a:p>
-            <a:fld id="{1A1B96C6-7725-441A-AD09-0EDE6106846D}" type="slidenum">
+            <a:fld id="{E5248AE2-EAFD-48D0-B11C-98DC39DE70E5}" type="slidenum">
               <a:t>&lt;#&gt;</a:t>
             </a:fld>
           </a:p>
@@ -485,7 +487,7 @@
         <p:txBody>
           <a:bodyPr/>
           <a:p>
-            <a:fld id="{F7D8895E-CABD-40A9-BCBC-F3094493576B}" type="slidenum">
+            <a:fld id="{3CCD1D32-9EB2-415F-BF32-5C2411ABF80A}" type="slidenum">
               <a:t>&lt;#&gt;</a:t>
             </a:fld>
           </a:p>
@@ -547,7 +549,7 @@
         <p:spPr>
           <a:xfrm>
             <a:off x="3291480" y="11003760"/>
-            <a:ext cx="37303560" cy="5495400"/>
+            <a:ext cx="37303200" cy="5495040"/>
           </a:xfrm>
           <a:prstGeom prst="rect">
             <a:avLst/>
@@ -565,10 +567,11 @@
             <a:pPr indent="0" algn="ctr">
               <a:buNone/>
             </a:pPr>
-            <a:endParaRPr b="0" lang="en-US" sz="4400" spc="-1" strike="noStrike">
-              <a:solidFill>
-                <a:srgbClr val="000000"/>
-              </a:solidFill>
+            <a:endParaRPr b="0" lang="en-US" sz="4400" strike="noStrike" u="none">
+              <a:solidFill>
+                <a:srgbClr val="000000"/>
+              </a:solidFill>
+              <a:uFillTx/>
               <a:latin typeface="Arial"/>
             </a:endParaRPr>
           </a:p>
@@ -608,10 +611,11 @@
               </a:spcBef>
               <a:buNone/>
             </a:pPr>
-            <a:endParaRPr b="0" lang="en-US" sz="3200" spc="-1" strike="noStrike">
-              <a:solidFill>
-                <a:srgbClr val="000000"/>
-              </a:solidFill>
+            <a:endParaRPr b="0" lang="en-US" sz="3200" strike="noStrike" u="none">
+              <a:solidFill>
+                <a:srgbClr val="000000"/>
+              </a:solidFill>
+              <a:uFillTx/>
               <a:latin typeface="Arial"/>
             </a:endParaRPr>
           </a:p>
@@ -651,7 +655,7 @@
         <p:txBody>
           <a:bodyPr/>
           <a:p>
-            <a:fld id="{67B3E3DA-F637-40CD-82A3-F6BB41939643}" type="slidenum">
+            <a:fld id="{6F8BFF61-F88B-48C8-8E99-6944602EA0EF}" type="slidenum">
               <a:t>&lt;#&gt;</a:t>
             </a:fld>
           </a:p>
@@ -734,7 +738,7 @@
         <p:txBody>
           <a:bodyPr/>
           <a:p>
-            <a:fld id="{7C6F3F76-6CF4-4A3A-93D5-DB67A20C85E7}" type="slidenum">
+            <a:fld id="{973D023E-3D42-4ED2-BA39-84DE4BD49A0D}" type="slidenum">
               <a:t>&lt;#&gt;</a:t>
             </a:fld>
           </a:p>
@@ -796,7 +800,7 @@
         <p:spPr>
           <a:xfrm>
             <a:off x="3291480" y="11003760"/>
-            <a:ext cx="37303560" cy="5495400"/>
+            <a:ext cx="37303200" cy="5495040"/>
           </a:xfrm>
           <a:prstGeom prst="rect">
             <a:avLst/>
@@ -814,10 +818,11 @@
             <a:pPr indent="0" algn="ctr">
               <a:buNone/>
             </a:pPr>
-            <a:endParaRPr b="0" lang="en-US" sz="4400" spc="-1" strike="noStrike">
-              <a:solidFill>
-                <a:srgbClr val="000000"/>
-              </a:solidFill>
+            <a:endParaRPr b="0" lang="en-US" sz="4400" strike="noStrike" u="none">
+              <a:solidFill>
+                <a:srgbClr val="000000"/>
+              </a:solidFill>
+              <a:uFillTx/>
               <a:latin typeface="Arial"/>
             </a:endParaRPr>
           </a:p>
@@ -857,10 +862,11 @@
               </a:spcBef>
               <a:buNone/>
             </a:pPr>
-            <a:endParaRPr b="0" lang="en-US" sz="3200" spc="-1" strike="noStrike">
-              <a:solidFill>
-                <a:srgbClr val="000000"/>
-              </a:solidFill>
+            <a:endParaRPr b="0" lang="en-US" sz="3200" strike="noStrike" u="none">
+              <a:solidFill>
+                <a:srgbClr val="000000"/>
+              </a:solidFill>
+              <a:uFillTx/>
               <a:latin typeface="Arial"/>
             </a:endParaRPr>
           </a:p>
@@ -900,10 +906,11 @@
               </a:spcBef>
               <a:buNone/>
             </a:pPr>
-            <a:endParaRPr b="0" lang="en-US" sz="3200" spc="-1" strike="noStrike">
-              <a:solidFill>
-                <a:srgbClr val="000000"/>
-              </a:solidFill>
+            <a:endParaRPr b="0" lang="en-US" sz="3200" strike="noStrike" u="none">
+              <a:solidFill>
+                <a:srgbClr val="000000"/>
+              </a:solidFill>
+              <a:uFillTx/>
               <a:latin typeface="Arial"/>
             </a:endParaRPr>
           </a:p>
@@ -943,7 +950,7 @@
         <p:txBody>
           <a:bodyPr/>
           <a:p>
-            <a:fld id="{C24A249C-82DF-4554-8EB6-AD852ACABCBC}" type="slidenum">
+            <a:fld id="{0E1409BA-3400-48C6-809A-E61851881FFD}" type="slidenum">
               <a:t>&lt;#&gt;</a:t>
             </a:fld>
           </a:p>
@@ -1026,7 +1033,7 @@
         <p:txBody>
           <a:bodyPr/>
           <a:p>
-            <a:fld id="{5BAE55E0-B5D3-4059-A89E-AFDA8A521F2D}" type="slidenum">
+            <a:fld id="{CDE992FB-204D-46F7-A71F-6EA7C1E6B6E8}" type="slidenum">
               <a:t>&lt;#&gt;</a:t>
             </a:fld>
           </a:p>
@@ -1088,7 +1095,7 @@
         <p:spPr>
           <a:xfrm>
             <a:off x="3291480" y="11003760"/>
-            <a:ext cx="37303560" cy="5495400"/>
+            <a:ext cx="37303200" cy="5495040"/>
           </a:xfrm>
           <a:prstGeom prst="rect">
             <a:avLst/>
@@ -1106,10 +1113,11 @@
             <a:pPr indent="0" algn="ctr">
               <a:buNone/>
             </a:pPr>
-            <a:endParaRPr b="0" lang="en-US" sz="4400" spc="-1" strike="noStrike">
-              <a:solidFill>
-                <a:srgbClr val="000000"/>
-              </a:solidFill>
+            <a:endParaRPr b="0" lang="en-US" sz="4400" strike="noStrike" u="none">
+              <a:solidFill>
+                <a:srgbClr val="000000"/>
+              </a:solidFill>
+              <a:uFillTx/>
               <a:latin typeface="Arial"/>
             </a:endParaRPr>
           </a:p>
@@ -1149,7 +1157,7 @@
         <p:txBody>
           <a:bodyPr/>
           <a:p>
-            <a:fld id="{A3962193-FBBB-426E-9E3D-634CC63B9461}" type="slidenum">
+            <a:fld id="{A35584FC-7373-42DA-BCC4-BC4AEE3B1779}" type="slidenum">
               <a:t>&lt;#&gt;</a:t>
             </a:fld>
           </a:p>
@@ -1232,7 +1240,7 @@
         <p:txBody>
           <a:bodyPr/>
           <a:p>
-            <a:fld id="{9FEFCDD8-7980-4DCF-8BBE-9755C12B5921}" type="slidenum">
+            <a:fld id="{CF8CCBC8-56CD-47A3-839F-126FF989B217}" type="slidenum">
               <a:t>&lt;#&gt;</a:t>
             </a:fld>
           </a:p>
@@ -1300,8 +1308,8 @@
         </p:blipFill>
         <p:spPr>
           <a:xfrm rot="16200000">
-            <a:off x="-11069640" y="16463880"/>
-            <a:ext cx="14270040" cy="3932280"/>
+            <a:off x="-11069280" y="16464240"/>
+            <a:ext cx="14269680" cy="3931920"/>
           </a:xfrm>
           <a:prstGeom prst="rect">
             <a:avLst/>
@@ -1323,8 +1331,8 @@
         </p:blipFill>
         <p:spPr>
           <a:xfrm rot="5400000">
-            <a:off x="40695480" y="16459200"/>
-            <a:ext cx="14270040" cy="3932280"/>
+            <a:off x="40695840" y="16459200"/>
+            <a:ext cx="14269680" cy="3931920"/>
           </a:xfrm>
           <a:prstGeom prst="rect">
             <a:avLst/>
@@ -1347,7 +1355,7 @@
         <p:spPr>
           <a:xfrm>
             <a:off x="6946920" y="33426360"/>
-            <a:ext cx="29992680" cy="1443240"/>
+            <a:ext cx="29992320" cy="1442880"/>
           </a:xfrm>
           <a:prstGeom prst="rect">
             <a:avLst/>
@@ -1366,7 +1374,7 @@
         <p:spPr>
           <a:xfrm>
             <a:off x="6946920" y="33998040"/>
-            <a:ext cx="21940920" cy="1265400"/>
+            <a:ext cx="21940560" cy="1265040"/>
           </a:xfrm>
           <a:prstGeom prst="rect">
             <a:avLst/>
@@ -1401,19 +1409,21 @@
               </a:lnSpc>
             </a:pPr>
             <a:r>
-              <a:rPr b="0" lang="en-US" sz="4560" spc="-1" strike="noStrike">
+              <a:rPr b="0" lang="en-US" sz="4560" strike="noStrike" u="none">
                 <a:solidFill>
                   <a:srgbClr val="808080"/>
                 </a:solidFill>
+                <a:uFillTx/>
                 <a:latin typeface="Arial"/>
                 <a:ea typeface="Arial"/>
               </a:rPr>
               <a:t>Template ID: pragmaticgraphite  Size: 48x36</a:t>
             </a:r>
-            <a:endParaRPr b="0" lang="en-US" sz="4560" spc="-1" strike="noStrike">
-              <a:solidFill>
-                <a:srgbClr val="000000"/>
-              </a:solidFill>
+            <a:endParaRPr b="0" lang="en-US" sz="4560" strike="noStrike" u="none">
+              <a:solidFill>
+                <a:srgbClr val="000000"/>
+              </a:solidFill>
+              <a:uFillTx/>
               <a:latin typeface="Arial"/>
             </a:endParaRPr>
           </a:p>
@@ -1432,7 +1442,7 @@
         <p:spPr>
           <a:xfrm>
             <a:off x="3291480" y="11003760"/>
-            <a:ext cx="37303560" cy="5495400"/>
+            <a:ext cx="37303200" cy="5495040"/>
           </a:xfrm>
           <a:prstGeom prst="rect">
             <a:avLst/>
@@ -1451,18 +1461,20 @@
               <a:buNone/>
             </a:pPr>
             <a:r>
-              <a:rPr b="0" lang="en-US" sz="1800" spc="-1" strike="noStrike">
+              <a:rPr b="0" lang="en-US" sz="1800" strike="noStrike" u="none">
                 <a:solidFill>
                   <a:srgbClr val="000000"/>
                 </a:solidFill>
+                <a:uFillTx/>
                 <a:latin typeface="Arial"/>
               </a:rPr>
               <a:t>Click to edit the title text format</a:t>
             </a:r>
-            <a:endParaRPr b="0" lang="en-US" sz="1800" spc="-1" strike="noStrike">
-              <a:solidFill>
-                <a:srgbClr val="000000"/>
-              </a:solidFill>
+            <a:endParaRPr b="0" lang="en-US" sz="1800" strike="noStrike" u="none">
+              <a:solidFill>
+                <a:srgbClr val="000000"/>
+              </a:solidFill>
+              <a:uFillTx/>
               <a:latin typeface="Arial"/>
             </a:endParaRPr>
           </a:p>
@@ -1481,7 +1493,7 @@
         <p:spPr>
           <a:xfrm>
             <a:off x="14994360" y="29977560"/>
-            <a:ext cx="13897440" cy="2281320"/>
+            <a:ext cx="13897080" cy="2280960"/>
           </a:xfrm>
           <a:prstGeom prst="rect">
             <a:avLst/>
@@ -1504,10 +1516,11 @@
               <a:tabLst>
                 <a:tab algn="l" pos="0"/>
               </a:tabLst>
-              <a:defRPr b="0" lang="en-US" sz="1400" spc="-1" strike="noStrike">
+              <a:defRPr b="0" lang="en-US" sz="1400" strike="noStrike" u="none">
                 <a:solidFill>
                   <a:srgbClr val="000000"/>
                 </a:solidFill>
+                <a:uFillTx/>
                 <a:latin typeface="Times New Roman"/>
               </a:defRPr>
             </a:lvl1pPr>
@@ -1523,18 +1536,20 @@
               </a:tabLst>
             </a:pPr>
             <a:r>
-              <a:rPr b="0" lang="en-US" sz="1400" spc="-1" strike="noStrike">
+              <a:rPr b="0" lang="en-US" sz="1400" strike="noStrike" u="none">
                 <a:solidFill>
                   <a:srgbClr val="000000"/>
                 </a:solidFill>
+                <a:uFillTx/>
                 <a:latin typeface="Times New Roman"/>
               </a:rPr>
               <a:t>&lt;footer&gt;</a:t>
             </a:r>
-            <a:endParaRPr b="0" lang="en-US" sz="1400" spc="-1" strike="noStrike">
-              <a:solidFill>
-                <a:srgbClr val="000000"/>
-              </a:solidFill>
+            <a:endParaRPr b="0" lang="en-US" sz="1400" strike="noStrike" u="none">
+              <a:solidFill>
+                <a:srgbClr val="000000"/>
+              </a:solidFill>
+              <a:uFillTx/>
               <a:latin typeface="Times New Roman"/>
             </a:endParaRPr>
           </a:p>
@@ -1553,7 +1568,7 @@
         <p:spPr>
           <a:xfrm>
             <a:off x="31453560" y="29977560"/>
-            <a:ext cx="10239840" cy="2281320"/>
+            <a:ext cx="10239480" cy="2280960"/>
           </a:xfrm>
           <a:prstGeom prst="rect">
             <a:avLst/>
@@ -1576,10 +1591,11 @@
               <a:tabLst>
                 <a:tab algn="l" pos="0"/>
               </a:tabLst>
-              <a:defRPr b="0" lang="en-US" sz="5030" spc="-1" strike="noStrike">
+              <a:defRPr b="0" lang="en-US" sz="5030" strike="noStrike" u="none">
                 <a:solidFill>
                   <a:schemeClr val="dk1"/>
                 </a:solidFill>
+                <a:uFillTx/>
                 <a:latin typeface="Arial"/>
                 <a:ea typeface="Arial"/>
               </a:defRPr>
@@ -1595,20 +1611,22 @@
                 <a:tab algn="l" pos="0"/>
               </a:tabLst>
             </a:pPr>
-            <a:fld id="{93133D15-F64A-4375-B70D-2A1BA18DFE05}" type="slidenum">
-              <a:rPr b="0" lang="en-US" sz="5030" spc="-1" strike="noStrike">
+            <a:fld id="{9E0F3480-2176-44AB-9C35-E83A6F38CA64}" type="slidenum">
+              <a:rPr b="0" lang="en-US" sz="5030" strike="noStrike" u="none">
                 <a:solidFill>
                   <a:schemeClr val="dk1"/>
                 </a:solidFill>
+                <a:uFillTx/>
                 <a:latin typeface="Arial"/>
                 <a:ea typeface="Arial"/>
               </a:rPr>
               <a:t>&lt;number&gt;</a:t>
             </a:fld>
-            <a:endParaRPr b="0" lang="en-US" sz="5030" spc="-1" strike="noStrike">
-              <a:solidFill>
-                <a:srgbClr val="000000"/>
-              </a:solidFill>
+            <a:endParaRPr b="0" lang="en-US" sz="5030" strike="noStrike" u="none">
+              <a:solidFill>
+                <a:srgbClr val="000000"/>
+              </a:solidFill>
+              <a:uFillTx/>
               <a:latin typeface="Times New Roman"/>
             </a:endParaRPr>
           </a:p>
@@ -1627,7 +1645,7 @@
         <p:spPr>
           <a:xfrm>
             <a:off x="2192760" y="29977560"/>
-            <a:ext cx="10239840" cy="2281320"/>
+            <a:ext cx="10239480" cy="2280960"/>
           </a:xfrm>
           <a:prstGeom prst="rect">
             <a:avLst/>
@@ -1644,10 +1662,11 @@
           <a:lstStyle>
             <a:lvl1pPr indent="0">
               <a:buNone/>
-              <a:defRPr b="0" lang="en-US" sz="1400" spc="-1" strike="noStrike">
+              <a:defRPr b="0" lang="en-US" sz="1400" strike="noStrike" u="none">
                 <a:solidFill>
                   <a:srgbClr val="000000"/>
                 </a:solidFill>
+                <a:uFillTx/>
                 <a:latin typeface="Times New Roman"/>
               </a:defRPr>
             </a:lvl1pPr>
@@ -1657,18 +1676,20 @@
               <a:buNone/>
             </a:pPr>
             <a:r>
-              <a:rPr b="0" lang="en-US" sz="1400" spc="-1" strike="noStrike">
+              <a:rPr b="0" lang="en-US" sz="1400" strike="noStrike" u="none">
                 <a:solidFill>
                   <a:srgbClr val="000000"/>
                 </a:solidFill>
+                <a:uFillTx/>
                 <a:latin typeface="Times New Roman"/>
               </a:rPr>
               <a:t>&lt;date/time&gt;</a:t>
             </a:r>
-            <a:endParaRPr b="0" lang="en-US" sz="1400" spc="-1" strike="noStrike">
-              <a:solidFill>
-                <a:srgbClr val="000000"/>
-              </a:solidFill>
+            <a:endParaRPr b="0" lang="en-US" sz="1400" strike="noStrike" u="none">
+              <a:solidFill>
+                <a:srgbClr val="000000"/>
+              </a:solidFill>
+              <a:uFillTx/>
               <a:latin typeface="Times New Roman"/>
             </a:endParaRPr>
           </a:p>
@@ -1676,7 +1697,7 @@
       </p:sp>
     </p:spTree>
   </p:cSld>
-  <p:clrMap bg1="lt1" bg2="lt2" tx1="dk1" tx2="dk2" accent1="accent1" accent2="accent2" accent3="accent3" accent4="accent4" accent5="accent5" accent6="accent6" hlink="hlink" folHlink="folHlink"/>
+  <p:clrMap bg1="lt1" tx1="dk1" bg2="lt2" tx2="dk2" accent1="accent1" accent2="accent2" accent3="accent3" accent4="accent4" accent5="accent5" accent6="accent6" hlink="hlink" folHlink="folHlink"/>
   <p:sldLayoutIdLst>
     <p:sldLayoutId id="2147483649" r:id="rId5"/>
   </p:sldLayoutIdLst>
@@ -1719,8 +1740,8 @@
         </p:blipFill>
         <p:spPr>
           <a:xfrm rot="16200000">
-            <a:off x="-11069640" y="16463880"/>
-            <a:ext cx="14270040" cy="3932280"/>
+            <a:off x="-11069280" y="16464240"/>
+            <a:ext cx="14269680" cy="3931920"/>
           </a:xfrm>
           <a:prstGeom prst="rect">
             <a:avLst/>
@@ -1742,8 +1763,8 @@
         </p:blipFill>
         <p:spPr>
           <a:xfrm rot="5400000">
-            <a:off x="40695480" y="16459200"/>
-            <a:ext cx="14270040" cy="3932280"/>
+            <a:off x="40695840" y="16459200"/>
+            <a:ext cx="14269680" cy="3931920"/>
           </a:xfrm>
           <a:prstGeom prst="rect">
             <a:avLst/>
@@ -1766,7 +1787,7 @@
         <p:spPr>
           <a:xfrm>
             <a:off x="6946920" y="33426360"/>
-            <a:ext cx="29992680" cy="1443240"/>
+            <a:ext cx="29992320" cy="1442880"/>
           </a:xfrm>
           <a:prstGeom prst="rect">
             <a:avLst/>
@@ -1785,7 +1806,7 @@
         <p:spPr>
           <a:xfrm>
             <a:off x="6946920" y="33998040"/>
-            <a:ext cx="21940920" cy="1265400"/>
+            <a:ext cx="21940560" cy="1265040"/>
           </a:xfrm>
           <a:prstGeom prst="rect">
             <a:avLst/>
@@ -1820,19 +1841,21 @@
               </a:lnSpc>
             </a:pPr>
             <a:r>
-              <a:rPr b="0" lang="en-US" sz="4560" spc="-1" strike="noStrike">
+              <a:rPr b="0" lang="en-US" sz="4560" strike="noStrike" u="none">
                 <a:solidFill>
                   <a:srgbClr val="808080"/>
                 </a:solidFill>
+                <a:uFillTx/>
                 <a:latin typeface="Arial"/>
                 <a:ea typeface="Arial"/>
               </a:rPr>
               <a:t>Template ID: pragmaticgraphite  Size: 48x36</a:t>
             </a:r>
-            <a:endParaRPr b="0" lang="en-US" sz="4560" spc="-1" strike="noStrike">
-              <a:solidFill>
-                <a:srgbClr val="000000"/>
-              </a:solidFill>
+            <a:endParaRPr b="0" lang="en-US" sz="4560" strike="noStrike" u="none">
+              <a:solidFill>
+                <a:srgbClr val="000000"/>
+              </a:solidFill>
+              <a:uFillTx/>
               <a:latin typeface="Arial"/>
             </a:endParaRPr>
           </a:p>
@@ -1851,7 +1874,7 @@
         <p:spPr>
           <a:xfrm>
             <a:off x="14994360" y="29977560"/>
-            <a:ext cx="13897440" cy="2281320"/>
+            <a:ext cx="13897080" cy="2280960"/>
           </a:xfrm>
           <a:prstGeom prst="rect">
             <a:avLst/>
@@ -1874,10 +1897,11 @@
               <a:tabLst>
                 <a:tab algn="l" pos="0"/>
               </a:tabLst>
-              <a:defRPr b="0" lang="en-US" sz="1400" spc="-1" strike="noStrike">
+              <a:defRPr b="0" lang="en-US" sz="1400" strike="noStrike" u="none">
                 <a:solidFill>
                   <a:srgbClr val="000000"/>
                 </a:solidFill>
+                <a:uFillTx/>
                 <a:latin typeface="Times New Roman"/>
               </a:defRPr>
             </a:lvl1pPr>
@@ -1893,18 +1917,20 @@
               </a:tabLst>
             </a:pPr>
             <a:r>
-              <a:rPr b="0" lang="en-US" sz="1400" spc="-1" strike="noStrike">
+              <a:rPr b="0" lang="en-US" sz="1400" strike="noStrike" u="none">
                 <a:solidFill>
                   <a:srgbClr val="000000"/>
                 </a:solidFill>
+                <a:uFillTx/>
                 <a:latin typeface="Times New Roman"/>
               </a:rPr>
               <a:t>&lt;footer&gt;</a:t>
             </a:r>
-            <a:endParaRPr b="0" lang="en-US" sz="1400" spc="-1" strike="noStrike">
-              <a:solidFill>
-                <a:srgbClr val="000000"/>
-              </a:solidFill>
+            <a:endParaRPr b="0" lang="en-US" sz="1400" strike="noStrike" u="none">
+              <a:solidFill>
+                <a:srgbClr val="000000"/>
+              </a:solidFill>
+              <a:uFillTx/>
               <a:latin typeface="Times New Roman"/>
             </a:endParaRPr>
           </a:p>
@@ -1923,7 +1949,7 @@
         <p:spPr>
           <a:xfrm>
             <a:off x="31453560" y="29977560"/>
-            <a:ext cx="10239840" cy="2281320"/>
+            <a:ext cx="10239480" cy="2280960"/>
           </a:xfrm>
           <a:prstGeom prst="rect">
             <a:avLst/>
@@ -1946,10 +1972,11 @@
               <a:tabLst>
                 <a:tab algn="l" pos="0"/>
               </a:tabLst>
-              <a:defRPr b="0" lang="en-US" sz="5030" spc="-1" strike="noStrike">
+              <a:defRPr b="0" lang="en-US" sz="5030" strike="noStrike" u="none">
                 <a:solidFill>
                   <a:schemeClr val="dk1"/>
                 </a:solidFill>
+                <a:uFillTx/>
                 <a:latin typeface="Arial"/>
                 <a:ea typeface="Arial"/>
               </a:defRPr>
@@ -1965,20 +1992,22 @@
                 <a:tab algn="l" pos="0"/>
               </a:tabLst>
             </a:pPr>
-            <a:fld id="{0FCEAD61-8D43-49FD-BF0F-6413F4775723}" type="slidenum">
-              <a:rPr b="0" lang="en-US" sz="5030" spc="-1" strike="noStrike">
+            <a:fld id="{07E6F75B-2EC1-4C79-88F1-343B76C163BB}" type="slidenum">
+              <a:rPr b="0" lang="en-US" sz="5030" strike="noStrike" u="none">
                 <a:solidFill>
                   <a:schemeClr val="dk1"/>
                 </a:solidFill>
+                <a:uFillTx/>
                 <a:latin typeface="Arial"/>
                 <a:ea typeface="Arial"/>
               </a:rPr>
               <a:t>&lt;number&gt;</a:t>
             </a:fld>
-            <a:endParaRPr b="0" lang="en-US" sz="5030" spc="-1" strike="noStrike">
-              <a:solidFill>
-                <a:srgbClr val="000000"/>
-              </a:solidFill>
+            <a:endParaRPr b="0" lang="en-US" sz="5030" strike="noStrike" u="none">
+              <a:solidFill>
+                <a:srgbClr val="000000"/>
+              </a:solidFill>
+              <a:uFillTx/>
               <a:latin typeface="Times New Roman"/>
             </a:endParaRPr>
           </a:p>
@@ -1997,7 +2026,7 @@
         <p:spPr>
           <a:xfrm>
             <a:off x="2192760" y="29977560"/>
-            <a:ext cx="10239840" cy="2281320"/>
+            <a:ext cx="10239480" cy="2280960"/>
           </a:xfrm>
           <a:prstGeom prst="rect">
             <a:avLst/>
@@ -2014,10 +2043,11 @@
           <a:lstStyle>
             <a:lvl1pPr indent="0">
               <a:buNone/>
-              <a:defRPr b="0" lang="en-US" sz="1400" spc="-1" strike="noStrike">
+              <a:defRPr b="0" lang="en-US" sz="1400" strike="noStrike" u="none">
                 <a:solidFill>
                   <a:srgbClr val="000000"/>
                 </a:solidFill>
+                <a:uFillTx/>
                 <a:latin typeface="Times New Roman"/>
               </a:defRPr>
             </a:lvl1pPr>
@@ -2027,18 +2057,20 @@
               <a:buNone/>
             </a:pPr>
             <a:r>
-              <a:rPr b="0" lang="en-US" sz="1400" spc="-1" strike="noStrike">
+              <a:rPr b="0" lang="en-US" sz="1400" strike="noStrike" u="none">
                 <a:solidFill>
                   <a:srgbClr val="000000"/>
                 </a:solidFill>
+                <a:uFillTx/>
                 <a:latin typeface="Times New Roman"/>
               </a:rPr>
               <a:t>&lt;date/time&gt;</a:t>
             </a:r>
-            <a:endParaRPr b="0" lang="en-US" sz="1400" spc="-1" strike="noStrike">
-              <a:solidFill>
-                <a:srgbClr val="000000"/>
-              </a:solidFill>
+            <a:endParaRPr b="0" lang="en-US" sz="1400" strike="noStrike" u="none">
+              <a:solidFill>
+                <a:srgbClr val="000000"/>
+              </a:solidFill>
+              <a:uFillTx/>
               <a:latin typeface="Times New Roman"/>
             </a:endParaRPr>
           </a:p>
@@ -2046,7 +2078,7 @@
       </p:sp>
     </p:spTree>
   </p:cSld>
-  <p:clrMap bg1="lt1" bg2="lt2" tx1="dk1" tx2="dk2" accent1="accent1" accent2="accent2" accent3="accent3" accent4="accent4" accent5="accent5" accent6="accent6" hlink="hlink" folHlink="folHlink"/>
+  <p:clrMap bg1="lt1" tx1="dk1" bg2="lt2" tx2="dk2" accent1="accent1" accent2="accent2" accent3="accent3" accent4="accent4" accent5="accent5" accent6="accent6" hlink="hlink" folHlink="folHlink"/>
   <p:sldLayoutIdLst>
     <p:sldLayoutId id="2147483667" r:id="rId5"/>
   </p:sldLayoutIdLst>
@@ -2089,8 +2121,8 @@
         </p:blipFill>
         <p:spPr>
           <a:xfrm rot="16200000">
-            <a:off x="-11069640" y="16463880"/>
-            <a:ext cx="14270040" cy="3932280"/>
+            <a:off x="-11069280" y="16464240"/>
+            <a:ext cx="14269680" cy="3931920"/>
           </a:xfrm>
           <a:prstGeom prst="rect">
             <a:avLst/>
@@ -2112,8 +2144,8 @@
         </p:blipFill>
         <p:spPr>
           <a:xfrm rot="5400000">
-            <a:off x="40695480" y="16459200"/>
-            <a:ext cx="14270040" cy="3932280"/>
+            <a:off x="40695840" y="16459200"/>
+            <a:ext cx="14269680" cy="3931920"/>
           </a:xfrm>
           <a:prstGeom prst="rect">
             <a:avLst/>
@@ -2136,7 +2168,7 @@
         <p:spPr>
           <a:xfrm>
             <a:off x="6946920" y="33426360"/>
-            <a:ext cx="29992680" cy="1443240"/>
+            <a:ext cx="29992320" cy="1442880"/>
           </a:xfrm>
           <a:prstGeom prst="rect">
             <a:avLst/>
@@ -2155,7 +2187,7 @@
         <p:spPr>
           <a:xfrm>
             <a:off x="6946920" y="33998040"/>
-            <a:ext cx="21940920" cy="1265400"/>
+            <a:ext cx="21940560" cy="1265040"/>
           </a:xfrm>
           <a:prstGeom prst="rect">
             <a:avLst/>
@@ -2190,19 +2222,21 @@
               </a:lnSpc>
             </a:pPr>
             <a:r>
-              <a:rPr b="0" lang="en-US" sz="4560" spc="-1" strike="noStrike">
+              <a:rPr b="0" lang="en-US" sz="4560" strike="noStrike" u="none">
                 <a:solidFill>
                   <a:srgbClr val="808080"/>
                 </a:solidFill>
+                <a:uFillTx/>
                 <a:latin typeface="Arial"/>
                 <a:ea typeface="Arial"/>
               </a:rPr>
               <a:t>Template ID: pragmaticgraphite  Size: 48x36</a:t>
             </a:r>
-            <a:endParaRPr b="0" lang="en-US" sz="4560" spc="-1" strike="noStrike">
-              <a:solidFill>
-                <a:srgbClr val="000000"/>
-              </a:solidFill>
+            <a:endParaRPr b="0" lang="en-US" sz="4560" strike="noStrike" u="none">
+              <a:solidFill>
+                <a:srgbClr val="000000"/>
+              </a:solidFill>
+              <a:uFillTx/>
               <a:latin typeface="Arial"/>
             </a:endParaRPr>
           </a:p>
@@ -2221,7 +2255,7 @@
         <p:spPr>
           <a:xfrm>
             <a:off x="14994360" y="29977560"/>
-            <a:ext cx="13897440" cy="2281320"/>
+            <a:ext cx="13897080" cy="2280960"/>
           </a:xfrm>
           <a:prstGeom prst="rect">
             <a:avLst/>
@@ -2244,10 +2278,11 @@
               <a:tabLst>
                 <a:tab algn="l" pos="0"/>
               </a:tabLst>
-              <a:defRPr b="0" lang="en-US" sz="1400" spc="-1" strike="noStrike">
+              <a:defRPr b="0" lang="en-US" sz="1400" strike="noStrike" u="none">
                 <a:solidFill>
                   <a:srgbClr val="000000"/>
                 </a:solidFill>
+                <a:uFillTx/>
                 <a:latin typeface="Times New Roman"/>
               </a:defRPr>
             </a:lvl1pPr>
@@ -2263,18 +2298,20 @@
               </a:tabLst>
             </a:pPr>
             <a:r>
-              <a:rPr b="0" lang="en-US" sz="1400" spc="-1" strike="noStrike">
+              <a:rPr b="0" lang="en-US" sz="1400" strike="noStrike" u="none">
                 <a:solidFill>
                   <a:srgbClr val="000000"/>
                 </a:solidFill>
+                <a:uFillTx/>
                 <a:latin typeface="Times New Roman"/>
               </a:rPr>
               <a:t>&lt;footer&gt;</a:t>
             </a:r>
-            <a:endParaRPr b="0" lang="en-US" sz="1400" spc="-1" strike="noStrike">
-              <a:solidFill>
-                <a:srgbClr val="000000"/>
-              </a:solidFill>
+            <a:endParaRPr b="0" lang="en-US" sz="1400" strike="noStrike" u="none">
+              <a:solidFill>
+                <a:srgbClr val="000000"/>
+              </a:solidFill>
+              <a:uFillTx/>
               <a:latin typeface="Times New Roman"/>
             </a:endParaRPr>
           </a:p>
@@ -2293,7 +2330,7 @@
         <p:spPr>
           <a:xfrm>
             <a:off x="31453560" y="29977560"/>
-            <a:ext cx="10239840" cy="2281320"/>
+            <a:ext cx="10239480" cy="2280960"/>
           </a:xfrm>
           <a:prstGeom prst="rect">
             <a:avLst/>
@@ -2316,10 +2353,11 @@
               <a:tabLst>
                 <a:tab algn="l" pos="0"/>
               </a:tabLst>
-              <a:defRPr b="0" lang="en-US" sz="5030" spc="-1" strike="noStrike">
+              <a:defRPr b="0" lang="en-US" sz="5030" strike="noStrike" u="none">
                 <a:solidFill>
                   <a:schemeClr val="dk1"/>
                 </a:solidFill>
+                <a:uFillTx/>
                 <a:latin typeface="Arial"/>
                 <a:ea typeface="Arial"/>
               </a:defRPr>
@@ -2335,20 +2373,22 @@
                 <a:tab algn="l" pos="0"/>
               </a:tabLst>
             </a:pPr>
-            <a:fld id="{30EDCB04-EBC3-481E-97C5-B9EF93C1CCEC}" type="slidenum">
-              <a:rPr b="0" lang="en-US" sz="5030" spc="-1" strike="noStrike">
+            <a:fld id="{1A26482B-F7BF-40DB-8F5C-5E104904079C}" type="slidenum">
+              <a:rPr b="0" lang="en-US" sz="5030" strike="noStrike" u="none">
                 <a:solidFill>
                   <a:schemeClr val="dk1"/>
                 </a:solidFill>
+                <a:uFillTx/>
                 <a:latin typeface="Arial"/>
                 <a:ea typeface="Arial"/>
               </a:rPr>
               <a:t>&lt;number&gt;</a:t>
             </a:fld>
-            <a:endParaRPr b="0" lang="en-US" sz="5030" spc="-1" strike="noStrike">
-              <a:solidFill>
-                <a:srgbClr val="000000"/>
-              </a:solidFill>
+            <a:endParaRPr b="0" lang="en-US" sz="5030" strike="noStrike" u="none">
+              <a:solidFill>
+                <a:srgbClr val="000000"/>
+              </a:solidFill>
+              <a:uFillTx/>
               <a:latin typeface="Times New Roman"/>
             </a:endParaRPr>
           </a:p>
@@ -2367,7 +2407,7 @@
         <p:spPr>
           <a:xfrm>
             <a:off x="2192760" y="29977560"/>
-            <a:ext cx="10239840" cy="2281320"/>
+            <a:ext cx="10239480" cy="2280960"/>
           </a:xfrm>
           <a:prstGeom prst="rect">
             <a:avLst/>
@@ -2384,10 +2424,11 @@
           <a:lstStyle>
             <a:lvl1pPr indent="0">
               <a:buNone/>
-              <a:defRPr b="0" lang="en-US" sz="1400" spc="-1" strike="noStrike">
+              <a:defRPr b="0" lang="en-US" sz="1400" strike="noStrike" u="none">
                 <a:solidFill>
                   <a:srgbClr val="000000"/>
                 </a:solidFill>
+                <a:uFillTx/>
                 <a:latin typeface="Times New Roman"/>
               </a:defRPr>
             </a:lvl1pPr>
@@ -2397,18 +2438,20 @@
               <a:buNone/>
             </a:pPr>
             <a:r>
-              <a:rPr b="0" lang="en-US" sz="1400" spc="-1" strike="noStrike">
+              <a:rPr b="0" lang="en-US" sz="1400" strike="noStrike" u="none">
                 <a:solidFill>
                   <a:srgbClr val="000000"/>
                 </a:solidFill>
+                <a:uFillTx/>
                 <a:latin typeface="Times New Roman"/>
               </a:rPr>
               <a:t>&lt;date/time&gt;</a:t>
             </a:r>
-            <a:endParaRPr b="0" lang="en-US" sz="1400" spc="-1" strike="noStrike">
-              <a:solidFill>
-                <a:srgbClr val="000000"/>
-              </a:solidFill>
+            <a:endParaRPr b="0" lang="en-US" sz="1400" strike="noStrike" u="none">
+              <a:solidFill>
+                <a:srgbClr val="000000"/>
+              </a:solidFill>
+              <a:uFillTx/>
               <a:latin typeface="Times New Roman"/>
             </a:endParaRPr>
           </a:p>
@@ -2416,7 +2459,7 @@
       </p:sp>
     </p:spTree>
   </p:cSld>
-  <p:clrMap bg1="lt1" bg2="lt2" tx1="dk1" tx2="dk2" accent1="accent1" accent2="accent2" accent3="accent3" accent4="accent4" accent5="accent5" accent6="accent6" hlink="hlink" folHlink="folHlink"/>
+  <p:clrMap bg1="lt1" tx1="dk1" bg2="lt2" tx2="dk2" accent1="accent1" accent2="accent2" accent3="accent3" accent4="accent4" accent5="accent5" accent6="accent6" hlink="hlink" folHlink="folHlink"/>
   <p:sldLayoutIdLst>
     <p:sldLayoutId id="2147483669" r:id="rId5"/>
   </p:sldLayoutIdLst>
@@ -2459,8 +2502,8 @@
         </p:blipFill>
         <p:spPr>
           <a:xfrm rot="16200000">
-            <a:off x="-11069640" y="16463880"/>
-            <a:ext cx="14270040" cy="3932280"/>
+            <a:off x="-11069280" y="16464240"/>
+            <a:ext cx="14269680" cy="3931920"/>
           </a:xfrm>
           <a:prstGeom prst="rect">
             <a:avLst/>
@@ -2482,8 +2525,8 @@
         </p:blipFill>
         <p:spPr>
           <a:xfrm rot="5400000">
-            <a:off x="40695480" y="16459200"/>
-            <a:ext cx="14270040" cy="3932280"/>
+            <a:off x="40695840" y="16459200"/>
+            <a:ext cx="14269680" cy="3931920"/>
           </a:xfrm>
           <a:prstGeom prst="rect">
             <a:avLst/>
@@ -2506,7 +2549,7 @@
         <p:spPr>
           <a:xfrm>
             <a:off x="6946920" y="33426360"/>
-            <a:ext cx="29992680" cy="1443240"/>
+            <a:ext cx="29992320" cy="1442880"/>
           </a:xfrm>
           <a:prstGeom prst="rect">
             <a:avLst/>
@@ -2525,7 +2568,7 @@
         <p:spPr>
           <a:xfrm>
             <a:off x="6946920" y="33998040"/>
-            <a:ext cx="21940920" cy="1265400"/>
+            <a:ext cx="21940560" cy="1265040"/>
           </a:xfrm>
           <a:prstGeom prst="rect">
             <a:avLst/>
@@ -2560,19 +2603,21 @@
               </a:lnSpc>
             </a:pPr>
             <a:r>
-              <a:rPr b="0" lang="en-US" sz="4560" spc="-1" strike="noStrike">
+              <a:rPr b="0" lang="en-US" sz="4560" strike="noStrike" u="none">
                 <a:solidFill>
                   <a:srgbClr val="808080"/>
                 </a:solidFill>
+                <a:uFillTx/>
                 <a:latin typeface="Arial"/>
                 <a:ea typeface="Arial"/>
               </a:rPr>
               <a:t>Template ID: pragmaticgraphite  Size: 48x36</a:t>
             </a:r>
-            <a:endParaRPr b="0" lang="en-US" sz="4560" spc="-1" strike="noStrike">
-              <a:solidFill>
-                <a:srgbClr val="000000"/>
-              </a:solidFill>
+            <a:endParaRPr b="0" lang="en-US" sz="4560" strike="noStrike" u="none">
+              <a:solidFill>
+                <a:srgbClr val="000000"/>
+              </a:solidFill>
+              <a:uFillTx/>
               <a:latin typeface="Arial"/>
             </a:endParaRPr>
           </a:p>
@@ -2591,7 +2636,7 @@
         <p:spPr>
           <a:xfrm>
             <a:off x="14994360" y="29977560"/>
-            <a:ext cx="13897440" cy="2281320"/>
+            <a:ext cx="13897080" cy="2280960"/>
           </a:xfrm>
           <a:prstGeom prst="rect">
             <a:avLst/>
@@ -2614,10 +2659,11 @@
               <a:tabLst>
                 <a:tab algn="l" pos="0"/>
               </a:tabLst>
-              <a:defRPr b="0" lang="en-US" sz="1400" spc="-1" strike="noStrike">
+              <a:defRPr b="0" lang="en-US" sz="1400" strike="noStrike" u="none">
                 <a:solidFill>
                   <a:srgbClr val="000000"/>
                 </a:solidFill>
+                <a:uFillTx/>
                 <a:latin typeface="Times New Roman"/>
               </a:defRPr>
             </a:lvl1pPr>
@@ -2633,18 +2679,20 @@
               </a:tabLst>
             </a:pPr>
             <a:r>
-              <a:rPr b="0" lang="en-US" sz="1400" spc="-1" strike="noStrike">
+              <a:rPr b="0" lang="en-US" sz="1400" strike="noStrike" u="none">
                 <a:solidFill>
                   <a:srgbClr val="000000"/>
                 </a:solidFill>
+                <a:uFillTx/>
                 <a:latin typeface="Times New Roman"/>
               </a:rPr>
-              <a:t>&lt;footer&gt;</a:t>
-            </a:r>
-            <a:endParaRPr b="0" lang="en-US" sz="1400" spc="-1" strike="noStrike">
-              <a:solidFill>
-                <a:srgbClr val="000000"/>
-              </a:solidFill>
+              <a:t> </a:t>
+            </a:r>
+            <a:endParaRPr b="0" lang="en-US" sz="1400" strike="noStrike" u="none">
+              <a:solidFill>
+                <a:srgbClr val="000000"/>
+              </a:solidFill>
+              <a:uFillTx/>
               <a:latin typeface="Times New Roman"/>
             </a:endParaRPr>
           </a:p>
@@ -2663,7 +2711,7 @@
         <p:spPr>
           <a:xfrm>
             <a:off x="31453560" y="29977560"/>
-            <a:ext cx="10239840" cy="2281320"/>
+            <a:ext cx="10239480" cy="2280960"/>
           </a:xfrm>
           <a:prstGeom prst="rect">
             <a:avLst/>
@@ -2686,10 +2734,11 @@
               <a:tabLst>
                 <a:tab algn="l" pos="0"/>
               </a:tabLst>
-              <a:defRPr b="0" lang="en-US" sz="5030" spc="-1" strike="noStrike">
+              <a:defRPr b="0" lang="en-US" sz="5030" strike="noStrike" u="none">
                 <a:solidFill>
                   <a:schemeClr val="dk1"/>
                 </a:solidFill>
+                <a:uFillTx/>
                 <a:latin typeface="Arial"/>
                 <a:ea typeface="Arial"/>
               </a:defRPr>
@@ -2705,20 +2754,22 @@
                 <a:tab algn="l" pos="0"/>
               </a:tabLst>
             </a:pPr>
-            <a:fld id="{52C09362-E2FB-4EEB-8699-6427518DEC3D}" type="slidenum">
-              <a:rPr b="0" lang="en-US" sz="5030" spc="-1" strike="noStrike">
+            <a:fld id="{22B97696-93FF-49BF-B8F8-2E67D43AE5B3}" type="slidenum">
+              <a:rPr b="0" lang="en-US" sz="5030" strike="noStrike" u="none">
                 <a:solidFill>
                   <a:schemeClr val="dk1"/>
                 </a:solidFill>
+                <a:uFillTx/>
                 <a:latin typeface="Arial"/>
                 <a:ea typeface="Arial"/>
               </a:rPr>
-              <a:t>&lt;number&gt;</a:t>
+              <a:t>1</a:t>
             </a:fld>
-            <a:endParaRPr b="0" lang="en-US" sz="5030" spc="-1" strike="noStrike">
-              <a:solidFill>
-                <a:srgbClr val="000000"/>
-              </a:solidFill>
+            <a:endParaRPr b="0" lang="en-US" sz="5030" strike="noStrike" u="none">
+              <a:solidFill>
+                <a:srgbClr val="000000"/>
+              </a:solidFill>
+              <a:uFillTx/>
               <a:latin typeface="Times New Roman"/>
             </a:endParaRPr>
           </a:p>
@@ -2737,7 +2788,7 @@
         <p:spPr>
           <a:xfrm>
             <a:off x="2192760" y="29977560"/>
-            <a:ext cx="10239840" cy="2281320"/>
+            <a:ext cx="10239480" cy="2280960"/>
           </a:xfrm>
           <a:prstGeom prst="rect">
             <a:avLst/>
@@ -2754,10 +2805,11 @@
           <a:lstStyle>
             <a:lvl1pPr indent="0">
               <a:buNone/>
-              <a:defRPr b="0" lang="en-US" sz="1400" spc="-1" strike="noStrike">
+              <a:defRPr b="0" lang="en-US" sz="1400" strike="noStrike" u="none">
                 <a:solidFill>
                   <a:srgbClr val="000000"/>
                 </a:solidFill>
+                <a:uFillTx/>
                 <a:latin typeface="Times New Roman"/>
               </a:defRPr>
             </a:lvl1pPr>
@@ -2767,18 +2819,20 @@
               <a:buNone/>
             </a:pPr>
             <a:r>
-              <a:rPr b="0" lang="en-US" sz="1400" spc="-1" strike="noStrike">
+              <a:rPr b="0" lang="en-US" sz="1400" strike="noStrike" u="none">
                 <a:solidFill>
                   <a:srgbClr val="000000"/>
                 </a:solidFill>
+                <a:uFillTx/>
                 <a:latin typeface="Times New Roman"/>
               </a:rPr>
-              <a:t>&lt;date/time&gt;</a:t>
-            </a:r>
-            <a:endParaRPr b="0" lang="en-US" sz="1400" spc="-1" strike="noStrike">
-              <a:solidFill>
-                <a:srgbClr val="000000"/>
-              </a:solidFill>
+              <a:t> </a:t>
+            </a:r>
+            <a:endParaRPr b="0" lang="en-US" sz="1400" strike="noStrike" u="none">
+              <a:solidFill>
+                <a:srgbClr val="000000"/>
+              </a:solidFill>
+              <a:uFillTx/>
               <a:latin typeface="Times New Roman"/>
             </a:endParaRPr>
           </a:p>
@@ -2786,7 +2840,7 @@
       </p:sp>
     </p:spTree>
   </p:cSld>
-  <p:clrMap bg1="lt1" bg2="lt2" tx1="dk1" tx2="dk2" accent1="accent1" accent2="accent2" accent3="accent3" accent4="accent4" accent5="accent5" accent6="accent6" hlink="hlink" folHlink="folHlink"/>
+  <p:clrMap bg1="lt1" tx1="dk1" bg2="lt2" tx2="dk2" accent1="accent1" accent2="accent2" accent3="accent3" accent4="accent4" accent5="accent5" accent6="accent6" hlink="hlink" folHlink="folHlink"/>
   <p:sldLayoutIdLst>
     <p:sldLayoutId id="2147483651" r:id="rId5"/>
   </p:sldLayoutIdLst>
@@ -2829,8 +2883,8 @@
         </p:blipFill>
         <p:spPr>
           <a:xfrm rot="16200000">
-            <a:off x="-11069640" y="16463880"/>
-            <a:ext cx="14270040" cy="3932280"/>
+            <a:off x="-11069280" y="16464240"/>
+            <a:ext cx="14269680" cy="3931920"/>
           </a:xfrm>
           <a:prstGeom prst="rect">
             <a:avLst/>
@@ -2852,8 +2906,8 @@
         </p:blipFill>
         <p:spPr>
           <a:xfrm rot="5400000">
-            <a:off x="40695480" y="16459200"/>
-            <a:ext cx="14270040" cy="3932280"/>
+            <a:off x="40695840" y="16459200"/>
+            <a:ext cx="14269680" cy="3931920"/>
           </a:xfrm>
           <a:prstGeom prst="rect">
             <a:avLst/>
@@ -2876,7 +2930,7 @@
         <p:spPr>
           <a:xfrm>
             <a:off x="6946920" y="33426360"/>
-            <a:ext cx="29992680" cy="1443240"/>
+            <a:ext cx="29992320" cy="1442880"/>
           </a:xfrm>
           <a:prstGeom prst="rect">
             <a:avLst/>
@@ -2895,7 +2949,7 @@
         <p:spPr>
           <a:xfrm>
             <a:off x="6946920" y="33998040"/>
-            <a:ext cx="21940920" cy="1265400"/>
+            <a:ext cx="21940560" cy="1265040"/>
           </a:xfrm>
           <a:prstGeom prst="rect">
             <a:avLst/>
@@ -2930,19 +2984,21 @@
               </a:lnSpc>
             </a:pPr>
             <a:r>
-              <a:rPr b="0" lang="en-US" sz="4560" spc="-1" strike="noStrike">
+              <a:rPr b="0" lang="en-US" sz="4560" strike="noStrike" u="none">
                 <a:solidFill>
                   <a:srgbClr val="808080"/>
                 </a:solidFill>
+                <a:uFillTx/>
                 <a:latin typeface="Arial"/>
                 <a:ea typeface="Arial"/>
               </a:rPr>
               <a:t>Template ID: pragmaticgraphite  Size: 48x36</a:t>
             </a:r>
-            <a:endParaRPr b="0" lang="en-US" sz="4560" spc="-1" strike="noStrike">
-              <a:solidFill>
-                <a:srgbClr val="000000"/>
-              </a:solidFill>
+            <a:endParaRPr b="0" lang="en-US" sz="4560" strike="noStrike" u="none">
+              <a:solidFill>
+                <a:srgbClr val="000000"/>
+              </a:solidFill>
+              <a:uFillTx/>
               <a:latin typeface="Arial"/>
             </a:endParaRPr>
           </a:p>
@@ -2961,7 +3017,7 @@
         <p:spPr>
           <a:xfrm>
             <a:off x="14994360" y="29977560"/>
-            <a:ext cx="13897440" cy="2281320"/>
+            <a:ext cx="13897080" cy="2280960"/>
           </a:xfrm>
           <a:prstGeom prst="rect">
             <a:avLst/>
@@ -2984,10 +3040,11 @@
               <a:tabLst>
                 <a:tab algn="l" pos="0"/>
               </a:tabLst>
-              <a:defRPr b="0" lang="en-US" sz="1400" spc="-1" strike="noStrike">
+              <a:defRPr b="0" lang="en-US" sz="1400" strike="noStrike" u="none">
                 <a:solidFill>
                   <a:srgbClr val="000000"/>
                 </a:solidFill>
+                <a:uFillTx/>
                 <a:latin typeface="Times New Roman"/>
               </a:defRPr>
             </a:lvl1pPr>
@@ -3003,18 +3060,20 @@
               </a:tabLst>
             </a:pPr>
             <a:r>
-              <a:rPr b="0" lang="en-US" sz="1400" spc="-1" strike="noStrike">
+              <a:rPr b="0" lang="en-US" sz="1400" strike="noStrike" u="none">
                 <a:solidFill>
                   <a:srgbClr val="000000"/>
                 </a:solidFill>
+                <a:uFillTx/>
                 <a:latin typeface="Times New Roman"/>
               </a:rPr>
-              <a:t>&lt;footer&gt;</a:t>
-            </a:r>
-            <a:endParaRPr b="0" lang="en-US" sz="1400" spc="-1" strike="noStrike">
-              <a:solidFill>
-                <a:srgbClr val="000000"/>
-              </a:solidFill>
+              <a:t> </a:t>
+            </a:r>
+            <a:endParaRPr b="0" lang="en-US" sz="1400" strike="noStrike" u="none">
+              <a:solidFill>
+                <a:srgbClr val="000000"/>
+              </a:solidFill>
+              <a:uFillTx/>
               <a:latin typeface="Times New Roman"/>
             </a:endParaRPr>
           </a:p>
@@ -3033,7 +3092,7 @@
         <p:spPr>
           <a:xfrm>
             <a:off x="31453560" y="29977560"/>
-            <a:ext cx="10239840" cy="2281320"/>
+            <a:ext cx="10239480" cy="2280960"/>
           </a:xfrm>
           <a:prstGeom prst="rect">
             <a:avLst/>
@@ -3056,10 +3115,11 @@
               <a:tabLst>
                 <a:tab algn="l" pos="0"/>
               </a:tabLst>
-              <a:defRPr b="0" lang="en-US" sz="5030" spc="-1" strike="noStrike">
+              <a:defRPr b="0" lang="en-US" sz="5030" strike="noStrike" u="none">
                 <a:solidFill>
                   <a:schemeClr val="dk1"/>
                 </a:solidFill>
+                <a:uFillTx/>
                 <a:latin typeface="Arial"/>
                 <a:ea typeface="Arial"/>
               </a:defRPr>
@@ -3075,20 +3135,22 @@
                 <a:tab algn="l" pos="0"/>
               </a:tabLst>
             </a:pPr>
-            <a:fld id="{76294933-6C19-4923-9A8E-53D200AF9C32}" type="slidenum">
-              <a:rPr b="0" lang="en-US" sz="5030" spc="-1" strike="noStrike">
+            <a:fld id="{862EA53A-6103-4B7A-B7E6-977326E1136F}" type="slidenum">
+              <a:rPr b="0" lang="en-US" sz="5030" strike="noStrike" u="none">
                 <a:solidFill>
                   <a:schemeClr val="dk1"/>
                 </a:solidFill>
+                <a:uFillTx/>
                 <a:latin typeface="Arial"/>
                 <a:ea typeface="Arial"/>
               </a:rPr>
-              <a:t>&lt;number&gt;</a:t>
+              <a:t>1</a:t>
             </a:fld>
-            <a:endParaRPr b="0" lang="en-US" sz="5030" spc="-1" strike="noStrike">
-              <a:solidFill>
-                <a:srgbClr val="000000"/>
-              </a:solidFill>
+            <a:endParaRPr b="0" lang="en-US" sz="5030" strike="noStrike" u="none">
+              <a:solidFill>
+                <a:srgbClr val="000000"/>
+              </a:solidFill>
+              <a:uFillTx/>
               <a:latin typeface="Times New Roman"/>
             </a:endParaRPr>
           </a:p>
@@ -3107,7 +3169,7 @@
         <p:spPr>
           <a:xfrm>
             <a:off x="2192760" y="29977560"/>
-            <a:ext cx="10239840" cy="2281320"/>
+            <a:ext cx="10239480" cy="2280960"/>
           </a:xfrm>
           <a:prstGeom prst="rect">
             <a:avLst/>
@@ -3124,10 +3186,11 @@
           <a:lstStyle>
             <a:lvl1pPr indent="0">
               <a:buNone/>
-              <a:defRPr b="0" lang="en-US" sz="1400" spc="-1" strike="noStrike">
+              <a:defRPr b="0" lang="en-US" sz="1400" strike="noStrike" u="none">
                 <a:solidFill>
                   <a:srgbClr val="000000"/>
                 </a:solidFill>
+                <a:uFillTx/>
                 <a:latin typeface="Times New Roman"/>
               </a:defRPr>
             </a:lvl1pPr>
@@ -3137,18 +3200,20 @@
               <a:buNone/>
             </a:pPr>
             <a:r>
-              <a:rPr b="0" lang="en-US" sz="1400" spc="-1" strike="noStrike">
+              <a:rPr b="0" lang="en-US" sz="1400" strike="noStrike" u="none">
                 <a:solidFill>
                   <a:srgbClr val="000000"/>
                 </a:solidFill>
+                <a:uFillTx/>
                 <a:latin typeface="Times New Roman"/>
               </a:rPr>
-              <a:t>&lt;date/time&gt;</a:t>
-            </a:r>
-            <a:endParaRPr b="0" lang="en-US" sz="1400" spc="-1" strike="noStrike">
-              <a:solidFill>
-                <a:srgbClr val="000000"/>
-              </a:solidFill>
+              <a:t> </a:t>
+            </a:r>
+            <a:endParaRPr b="0" lang="en-US" sz="1400" strike="noStrike" u="none">
+              <a:solidFill>
+                <a:srgbClr val="000000"/>
+              </a:solidFill>
+              <a:uFillTx/>
               <a:latin typeface="Times New Roman"/>
             </a:endParaRPr>
           </a:p>
@@ -3156,7 +3221,7 @@
       </p:sp>
     </p:spTree>
   </p:cSld>
-  <p:clrMap bg1="lt1" bg2="lt2" tx1="dk1" tx2="dk2" accent1="accent1" accent2="accent2" accent3="accent3" accent4="accent4" accent5="accent5" accent6="accent6" hlink="hlink" folHlink="folHlink"/>
+  <p:clrMap bg1="lt1" tx1="dk1" bg2="lt2" tx2="dk2" accent1="accent1" accent2="accent2" accent3="accent3" accent4="accent4" accent5="accent5" accent6="accent6" hlink="hlink" folHlink="folHlink"/>
   <p:sldLayoutIdLst>
     <p:sldLayoutId id="2147483653" r:id="rId5"/>
   </p:sldLayoutIdLst>
@@ -3199,8 +3264,8 @@
         </p:blipFill>
         <p:spPr>
           <a:xfrm rot="16200000">
-            <a:off x="-11069640" y="16463880"/>
-            <a:ext cx="14270040" cy="3932280"/>
+            <a:off x="-11069280" y="16464240"/>
+            <a:ext cx="14269680" cy="3931920"/>
           </a:xfrm>
           <a:prstGeom prst="rect">
             <a:avLst/>
@@ -3222,8 +3287,8 @@
         </p:blipFill>
         <p:spPr>
           <a:xfrm rot="5400000">
-            <a:off x="40695480" y="16459200"/>
-            <a:ext cx="14270040" cy="3932280"/>
+            <a:off x="40695840" y="16459200"/>
+            <a:ext cx="14269680" cy="3931920"/>
           </a:xfrm>
           <a:prstGeom prst="rect">
             <a:avLst/>
@@ -3246,7 +3311,7 @@
         <p:spPr>
           <a:xfrm>
             <a:off x="6946920" y="33426360"/>
-            <a:ext cx="29992680" cy="1443240"/>
+            <a:ext cx="29992320" cy="1442880"/>
           </a:xfrm>
           <a:prstGeom prst="rect">
             <a:avLst/>
@@ -3265,7 +3330,7 @@
         <p:spPr>
           <a:xfrm>
             <a:off x="6946920" y="33998040"/>
-            <a:ext cx="21940920" cy="1265400"/>
+            <a:ext cx="21940560" cy="1265040"/>
           </a:xfrm>
           <a:prstGeom prst="rect">
             <a:avLst/>
@@ -3300,19 +3365,21 @@
               </a:lnSpc>
             </a:pPr>
             <a:r>
-              <a:rPr b="0" lang="en-US" sz="4560" spc="-1" strike="noStrike">
+              <a:rPr b="0" lang="en-US" sz="4560" strike="noStrike" u="none">
                 <a:solidFill>
                   <a:srgbClr val="808080"/>
                 </a:solidFill>
+                <a:uFillTx/>
                 <a:latin typeface="Arial"/>
                 <a:ea typeface="Arial"/>
               </a:rPr>
               <a:t>Template ID: pragmaticgraphite  Size: 48x36</a:t>
             </a:r>
-            <a:endParaRPr b="0" lang="en-US" sz="4560" spc="-1" strike="noStrike">
-              <a:solidFill>
-                <a:srgbClr val="000000"/>
-              </a:solidFill>
+            <a:endParaRPr b="0" lang="en-US" sz="4560" strike="noStrike" u="none">
+              <a:solidFill>
+                <a:srgbClr val="000000"/>
+              </a:solidFill>
+              <a:uFillTx/>
               <a:latin typeface="Arial"/>
             </a:endParaRPr>
           </a:p>
@@ -3331,7 +3398,7 @@
         <p:spPr>
           <a:xfrm>
             <a:off x="3291480" y="11003760"/>
-            <a:ext cx="37303560" cy="5495400"/>
+            <a:ext cx="37303200" cy="5495040"/>
           </a:xfrm>
           <a:prstGeom prst="rect">
             <a:avLst/>
@@ -3350,18 +3417,20 @@
               <a:buNone/>
             </a:pPr>
             <a:r>
-              <a:rPr b="0" lang="en-US" sz="1800" spc="-1" strike="noStrike">
+              <a:rPr b="0" lang="en-US" sz="1800" strike="noStrike" u="none">
                 <a:solidFill>
                   <a:srgbClr val="000000"/>
                 </a:solidFill>
+                <a:uFillTx/>
                 <a:latin typeface="Arial"/>
               </a:rPr>
               <a:t>Click to edit the title text format</a:t>
             </a:r>
-            <a:endParaRPr b="0" lang="en-US" sz="1800" spc="-1" strike="noStrike">
-              <a:solidFill>
-                <a:srgbClr val="000000"/>
-              </a:solidFill>
+            <a:endParaRPr b="0" lang="en-US" sz="1800" strike="noStrike" u="none">
+              <a:solidFill>
+                <a:srgbClr val="000000"/>
+              </a:solidFill>
+              <a:uFillTx/>
               <a:latin typeface="Arial"/>
             </a:endParaRPr>
           </a:p>
@@ -3407,18 +3476,20 @@
               <a:buChar char=""/>
             </a:pPr>
             <a:r>
-              <a:rPr b="0" lang="en-US" sz="1800" spc="-1" strike="noStrike">
+              <a:rPr b="0" lang="en-US" sz="1800" strike="noStrike" u="none">
                 <a:solidFill>
                   <a:srgbClr val="000000"/>
                 </a:solidFill>
+                <a:uFillTx/>
                 <a:latin typeface="Arial"/>
               </a:rPr>
               <a:t>Click to edit the outline text format</a:t>
             </a:r>
-            <a:endParaRPr b="0" lang="en-US" sz="1800" spc="-1" strike="noStrike">
-              <a:solidFill>
-                <a:srgbClr val="000000"/>
-              </a:solidFill>
+            <a:endParaRPr b="0" lang="en-US" sz="1800" strike="noStrike" u="none">
+              <a:solidFill>
+                <a:srgbClr val="000000"/>
+              </a:solidFill>
+              <a:uFillTx/>
               <a:latin typeface="Arial"/>
             </a:endParaRPr>
           </a:p>
@@ -3435,18 +3506,20 @@
               <a:buChar char=""/>
             </a:pPr>
             <a:r>
-              <a:rPr b="0" lang="en-US" sz="1800" spc="-1" strike="noStrike">
+              <a:rPr b="0" lang="en-US" sz="1800" strike="noStrike" u="none">
                 <a:solidFill>
                   <a:srgbClr val="000000"/>
                 </a:solidFill>
+                <a:uFillTx/>
                 <a:latin typeface="Arial"/>
               </a:rPr>
               <a:t>Second Outline Level</a:t>
             </a:r>
-            <a:endParaRPr b="0" lang="en-US" sz="1800" spc="-1" strike="noStrike">
-              <a:solidFill>
-                <a:srgbClr val="000000"/>
-              </a:solidFill>
+            <a:endParaRPr b="0" lang="en-US" sz="1800" strike="noStrike" u="none">
+              <a:solidFill>
+                <a:srgbClr val="000000"/>
+              </a:solidFill>
+              <a:uFillTx/>
               <a:latin typeface="Arial"/>
             </a:endParaRPr>
           </a:p>
@@ -3463,18 +3536,20 @@
               <a:buChar char=""/>
             </a:pPr>
             <a:r>
-              <a:rPr b="0" lang="en-US" sz="1800" spc="-1" strike="noStrike">
+              <a:rPr b="0" lang="en-US" sz="1800" strike="noStrike" u="none">
                 <a:solidFill>
                   <a:srgbClr val="000000"/>
                 </a:solidFill>
+                <a:uFillTx/>
                 <a:latin typeface="Arial"/>
               </a:rPr>
               <a:t>Third Outline Level</a:t>
             </a:r>
-            <a:endParaRPr b="0" lang="en-US" sz="1800" spc="-1" strike="noStrike">
-              <a:solidFill>
-                <a:srgbClr val="000000"/>
-              </a:solidFill>
+            <a:endParaRPr b="0" lang="en-US" sz="1800" strike="noStrike" u="none">
+              <a:solidFill>
+                <a:srgbClr val="000000"/>
+              </a:solidFill>
+              <a:uFillTx/>
               <a:latin typeface="Arial"/>
             </a:endParaRPr>
           </a:p>
@@ -3491,18 +3566,20 @@
               <a:buChar char=""/>
             </a:pPr>
             <a:r>
-              <a:rPr b="0" lang="en-US" sz="1800" spc="-1" strike="noStrike">
+              <a:rPr b="0" lang="en-US" sz="1800" strike="noStrike" u="none">
                 <a:solidFill>
                   <a:srgbClr val="000000"/>
                 </a:solidFill>
+                <a:uFillTx/>
                 <a:latin typeface="Arial"/>
               </a:rPr>
               <a:t>Fourth Outline Level</a:t>
             </a:r>
-            <a:endParaRPr b="0" lang="en-US" sz="1800" spc="-1" strike="noStrike">
-              <a:solidFill>
-                <a:srgbClr val="000000"/>
-              </a:solidFill>
+            <a:endParaRPr b="0" lang="en-US" sz="1800" strike="noStrike" u="none">
+              <a:solidFill>
+                <a:srgbClr val="000000"/>
+              </a:solidFill>
+              <a:uFillTx/>
               <a:latin typeface="Arial"/>
             </a:endParaRPr>
           </a:p>
@@ -3519,18 +3596,20 @@
               <a:buChar char=""/>
             </a:pPr>
             <a:r>
-              <a:rPr b="0" lang="en-US" sz="1800" spc="-1" strike="noStrike">
+              <a:rPr b="0" lang="en-US" sz="1800" strike="noStrike" u="none">
                 <a:solidFill>
                   <a:srgbClr val="000000"/>
                 </a:solidFill>
+                <a:uFillTx/>
                 <a:latin typeface="Arial"/>
               </a:rPr>
               <a:t>Fifth Outline Level</a:t>
             </a:r>
-            <a:endParaRPr b="0" lang="en-US" sz="1800" spc="-1" strike="noStrike">
-              <a:solidFill>
-                <a:srgbClr val="000000"/>
-              </a:solidFill>
+            <a:endParaRPr b="0" lang="en-US" sz="1800" strike="noStrike" u="none">
+              <a:solidFill>
+                <a:srgbClr val="000000"/>
+              </a:solidFill>
+              <a:uFillTx/>
               <a:latin typeface="Arial"/>
             </a:endParaRPr>
           </a:p>
@@ -3547,18 +3626,20 @@
               <a:buChar char=""/>
             </a:pPr>
             <a:r>
-              <a:rPr b="0" lang="en-US" sz="1800" spc="-1" strike="noStrike">
+              <a:rPr b="0" lang="en-US" sz="1800" strike="noStrike" u="none">
                 <a:solidFill>
                   <a:srgbClr val="000000"/>
                 </a:solidFill>
+                <a:uFillTx/>
                 <a:latin typeface="Arial"/>
               </a:rPr>
               <a:t>Sixth Outline Level</a:t>
             </a:r>
-            <a:endParaRPr b="0" lang="en-US" sz="1800" spc="-1" strike="noStrike">
-              <a:solidFill>
-                <a:srgbClr val="000000"/>
-              </a:solidFill>
+            <a:endParaRPr b="0" lang="en-US" sz="1800" strike="noStrike" u="none">
+              <a:solidFill>
+                <a:srgbClr val="000000"/>
+              </a:solidFill>
+              <a:uFillTx/>
               <a:latin typeface="Arial"/>
             </a:endParaRPr>
           </a:p>
@@ -3575,18 +3656,20 @@
               <a:buChar char=""/>
             </a:pPr>
             <a:r>
-              <a:rPr b="0" lang="en-US" sz="1800" spc="-1" strike="noStrike">
+              <a:rPr b="0" lang="en-US" sz="1800" strike="noStrike" u="none">
                 <a:solidFill>
                   <a:srgbClr val="000000"/>
                 </a:solidFill>
+                <a:uFillTx/>
                 <a:latin typeface="Arial"/>
               </a:rPr>
               <a:t>Seventh Outline Level</a:t>
             </a:r>
-            <a:endParaRPr b="0" lang="en-US" sz="1800" spc="-1" strike="noStrike">
-              <a:solidFill>
-                <a:srgbClr val="000000"/>
-              </a:solidFill>
+            <a:endParaRPr b="0" lang="en-US" sz="1800" strike="noStrike" u="none">
+              <a:solidFill>
+                <a:srgbClr val="000000"/>
+              </a:solidFill>
+              <a:uFillTx/>
               <a:latin typeface="Arial"/>
             </a:endParaRPr>
           </a:p>
@@ -3605,7 +3688,7 @@
         <p:spPr>
           <a:xfrm>
             <a:off x="14994360" y="29977560"/>
-            <a:ext cx="13897440" cy="2281320"/>
+            <a:ext cx="13897080" cy="2280960"/>
           </a:xfrm>
           <a:prstGeom prst="rect">
             <a:avLst/>
@@ -3628,10 +3711,11 @@
               <a:tabLst>
                 <a:tab algn="l" pos="0"/>
               </a:tabLst>
-              <a:defRPr b="0" lang="en-US" sz="1400" spc="-1" strike="noStrike">
+              <a:defRPr b="0" lang="en-US" sz="1400" strike="noStrike" u="none">
                 <a:solidFill>
                   <a:srgbClr val="000000"/>
                 </a:solidFill>
+                <a:uFillTx/>
                 <a:latin typeface="Times New Roman"/>
               </a:defRPr>
             </a:lvl1pPr>
@@ -3647,18 +3731,20 @@
               </a:tabLst>
             </a:pPr>
             <a:r>
-              <a:rPr b="0" lang="en-US" sz="1400" spc="-1" strike="noStrike">
+              <a:rPr b="0" lang="en-US" sz="1400" strike="noStrike" u="none">
                 <a:solidFill>
                   <a:srgbClr val="000000"/>
                 </a:solidFill>
+                <a:uFillTx/>
                 <a:latin typeface="Times New Roman"/>
               </a:rPr>
               <a:t>&lt;footer&gt;</a:t>
             </a:r>
-            <a:endParaRPr b="0" lang="en-US" sz="1400" spc="-1" strike="noStrike">
-              <a:solidFill>
-                <a:srgbClr val="000000"/>
-              </a:solidFill>
+            <a:endParaRPr b="0" lang="en-US" sz="1400" strike="noStrike" u="none">
+              <a:solidFill>
+                <a:srgbClr val="000000"/>
+              </a:solidFill>
+              <a:uFillTx/>
               <a:latin typeface="Times New Roman"/>
             </a:endParaRPr>
           </a:p>
@@ -3677,7 +3763,7 @@
         <p:spPr>
           <a:xfrm>
             <a:off x="31453560" y="29977560"/>
-            <a:ext cx="10239840" cy="2281320"/>
+            <a:ext cx="10239480" cy="2280960"/>
           </a:xfrm>
           <a:prstGeom prst="rect">
             <a:avLst/>
@@ -3700,10 +3786,11 @@
               <a:tabLst>
                 <a:tab algn="l" pos="0"/>
               </a:tabLst>
-              <a:defRPr b="0" lang="en-US" sz="5030" spc="-1" strike="noStrike">
+              <a:defRPr b="0" lang="en-US" sz="5030" strike="noStrike" u="none">
                 <a:solidFill>
                   <a:schemeClr val="dk1"/>
                 </a:solidFill>
+                <a:uFillTx/>
                 <a:latin typeface="Arial"/>
                 <a:ea typeface="Arial"/>
               </a:defRPr>
@@ -3719,20 +3806,22 @@
                 <a:tab algn="l" pos="0"/>
               </a:tabLst>
             </a:pPr>
-            <a:fld id="{BF9CDB33-FA31-4FB5-B5EA-E02FEC91A177}" type="slidenum">
-              <a:rPr b="0" lang="en-US" sz="5030" spc="-1" strike="noStrike">
+            <a:fld id="{1CF767A1-ACE9-4F1E-90DB-1E343A3B53CD}" type="slidenum">
+              <a:rPr b="0" lang="en-US" sz="5030" strike="noStrike" u="none">
                 <a:solidFill>
                   <a:schemeClr val="dk1"/>
                 </a:solidFill>
+                <a:uFillTx/>
                 <a:latin typeface="Arial"/>
                 <a:ea typeface="Arial"/>
               </a:rPr>
               <a:t>&lt;number&gt;</a:t>
             </a:fld>
-            <a:endParaRPr b="0" lang="en-US" sz="5030" spc="-1" strike="noStrike">
-              <a:solidFill>
-                <a:srgbClr val="000000"/>
-              </a:solidFill>
+            <a:endParaRPr b="0" lang="en-US" sz="5030" strike="noStrike" u="none">
+              <a:solidFill>
+                <a:srgbClr val="000000"/>
+              </a:solidFill>
+              <a:uFillTx/>
               <a:latin typeface="Times New Roman"/>
             </a:endParaRPr>
           </a:p>
@@ -3751,7 +3840,7 @@
         <p:spPr>
           <a:xfrm>
             <a:off x="2192760" y="29977560"/>
-            <a:ext cx="10239840" cy="2281320"/>
+            <a:ext cx="10239480" cy="2280960"/>
           </a:xfrm>
           <a:prstGeom prst="rect">
             <a:avLst/>
@@ -3768,10 +3857,11 @@
           <a:lstStyle>
             <a:lvl1pPr indent="0">
               <a:buNone/>
-              <a:defRPr b="0" lang="en-US" sz="1400" spc="-1" strike="noStrike">
+              <a:defRPr b="0" lang="en-US" sz="1400" strike="noStrike" u="none">
                 <a:solidFill>
                   <a:srgbClr val="000000"/>
                 </a:solidFill>
+                <a:uFillTx/>
                 <a:latin typeface="Times New Roman"/>
               </a:defRPr>
             </a:lvl1pPr>
@@ -3781,18 +3871,20 @@
               <a:buNone/>
             </a:pPr>
             <a:r>
-              <a:rPr b="0" lang="en-US" sz="1400" spc="-1" strike="noStrike">
+              <a:rPr b="0" lang="en-US" sz="1400" strike="noStrike" u="none">
                 <a:solidFill>
                   <a:srgbClr val="000000"/>
                 </a:solidFill>
+                <a:uFillTx/>
                 <a:latin typeface="Times New Roman"/>
               </a:rPr>
               <a:t>&lt;date/time&gt;</a:t>
             </a:r>
-            <a:endParaRPr b="0" lang="en-US" sz="1400" spc="-1" strike="noStrike">
-              <a:solidFill>
-                <a:srgbClr val="000000"/>
-              </a:solidFill>
+            <a:endParaRPr b="0" lang="en-US" sz="1400" strike="noStrike" u="none">
+              <a:solidFill>
+                <a:srgbClr val="000000"/>
+              </a:solidFill>
+              <a:uFillTx/>
               <a:latin typeface="Times New Roman"/>
             </a:endParaRPr>
           </a:p>
@@ -3800,7 +3892,7 @@
       </p:sp>
     </p:spTree>
   </p:cSld>
-  <p:clrMap bg1="lt1" bg2="lt2" tx1="dk1" tx2="dk2" accent1="accent1" accent2="accent2" accent3="accent3" accent4="accent4" accent5="accent5" accent6="accent6" hlink="hlink" folHlink="folHlink"/>
+  <p:clrMap bg1="lt1" tx1="dk1" bg2="lt2" tx2="dk2" accent1="accent1" accent2="accent2" accent3="accent3" accent4="accent4" accent5="accent5" accent6="accent6" hlink="hlink" folHlink="folHlink"/>
   <p:sldLayoutIdLst>
     <p:sldLayoutId id="2147483655" r:id="rId5"/>
   </p:sldLayoutIdLst>
@@ -3843,8 +3935,8 @@
         </p:blipFill>
         <p:spPr>
           <a:xfrm rot="16200000">
-            <a:off x="-11069640" y="16463880"/>
-            <a:ext cx="14270040" cy="3932280"/>
+            <a:off x="-11069280" y="16464240"/>
+            <a:ext cx="14269680" cy="3931920"/>
           </a:xfrm>
           <a:prstGeom prst="rect">
             <a:avLst/>
@@ -3866,8 +3958,8 @@
         </p:blipFill>
         <p:spPr>
           <a:xfrm rot="5400000">
-            <a:off x="40695480" y="16459200"/>
-            <a:ext cx="14270040" cy="3932280"/>
+            <a:off x="40695840" y="16459200"/>
+            <a:ext cx="14269680" cy="3931920"/>
           </a:xfrm>
           <a:prstGeom prst="rect">
             <a:avLst/>
@@ -3890,7 +3982,7 @@
         <p:spPr>
           <a:xfrm>
             <a:off x="6946920" y="33426360"/>
-            <a:ext cx="29992680" cy="1443240"/>
+            <a:ext cx="29992320" cy="1442880"/>
           </a:xfrm>
           <a:prstGeom prst="rect">
             <a:avLst/>
@@ -3909,7 +4001,7 @@
         <p:spPr>
           <a:xfrm>
             <a:off x="6946920" y="33998040"/>
-            <a:ext cx="21940920" cy="1265400"/>
+            <a:ext cx="21940560" cy="1265040"/>
           </a:xfrm>
           <a:prstGeom prst="rect">
             <a:avLst/>
@@ -3944,19 +4036,21 @@
               </a:lnSpc>
             </a:pPr>
             <a:r>
-              <a:rPr b="0" lang="en-US" sz="4560" spc="-1" strike="noStrike">
+              <a:rPr b="0" lang="en-US" sz="4560" strike="noStrike" u="none">
                 <a:solidFill>
                   <a:srgbClr val="808080"/>
                 </a:solidFill>
+                <a:uFillTx/>
                 <a:latin typeface="Arial"/>
                 <a:ea typeface="Arial"/>
               </a:rPr>
               <a:t>Template ID: pragmaticgraphite  Size: 48x36</a:t>
             </a:r>
-            <a:endParaRPr b="0" lang="en-US" sz="4560" spc="-1" strike="noStrike">
-              <a:solidFill>
-                <a:srgbClr val="000000"/>
-              </a:solidFill>
+            <a:endParaRPr b="0" lang="en-US" sz="4560" strike="noStrike" u="none">
+              <a:solidFill>
+                <a:srgbClr val="000000"/>
+              </a:solidFill>
+              <a:uFillTx/>
               <a:latin typeface="Arial"/>
             </a:endParaRPr>
           </a:p>
@@ -3975,7 +4069,7 @@
         <p:spPr>
           <a:xfrm>
             <a:off x="14994360" y="29977560"/>
-            <a:ext cx="13897440" cy="2281320"/>
+            <a:ext cx="13897080" cy="2280960"/>
           </a:xfrm>
           <a:prstGeom prst="rect">
             <a:avLst/>
@@ -3998,10 +4092,11 @@
               <a:tabLst>
                 <a:tab algn="l" pos="0"/>
               </a:tabLst>
-              <a:defRPr b="0" lang="en-US" sz="1400" spc="-1" strike="noStrike">
+              <a:defRPr b="0" lang="en-US" sz="1400" strike="noStrike" u="none">
                 <a:solidFill>
                   <a:srgbClr val="000000"/>
                 </a:solidFill>
+                <a:uFillTx/>
                 <a:latin typeface="Times New Roman"/>
               </a:defRPr>
             </a:lvl1pPr>
@@ -4017,18 +4112,20 @@
               </a:tabLst>
             </a:pPr>
             <a:r>
-              <a:rPr b="0" lang="en-US" sz="1400" spc="-1" strike="noStrike">
+              <a:rPr b="0" lang="en-US" sz="1400" strike="noStrike" u="none">
                 <a:solidFill>
                   <a:srgbClr val="000000"/>
                 </a:solidFill>
+                <a:uFillTx/>
                 <a:latin typeface="Times New Roman"/>
               </a:rPr>
               <a:t>&lt;footer&gt;</a:t>
             </a:r>
-            <a:endParaRPr b="0" lang="en-US" sz="1400" spc="-1" strike="noStrike">
-              <a:solidFill>
-                <a:srgbClr val="000000"/>
-              </a:solidFill>
+            <a:endParaRPr b="0" lang="en-US" sz="1400" strike="noStrike" u="none">
+              <a:solidFill>
+                <a:srgbClr val="000000"/>
+              </a:solidFill>
+              <a:uFillTx/>
               <a:latin typeface="Times New Roman"/>
             </a:endParaRPr>
           </a:p>
@@ -4047,7 +4144,7 @@
         <p:spPr>
           <a:xfrm>
             <a:off x="31453560" y="29977560"/>
-            <a:ext cx="10239840" cy="2281320"/>
+            <a:ext cx="10239480" cy="2280960"/>
           </a:xfrm>
           <a:prstGeom prst="rect">
             <a:avLst/>
@@ -4070,10 +4167,11 @@
               <a:tabLst>
                 <a:tab algn="l" pos="0"/>
               </a:tabLst>
-              <a:defRPr b="0" lang="en-US" sz="5030" spc="-1" strike="noStrike">
+              <a:defRPr b="0" lang="en-US" sz="5030" strike="noStrike" u="none">
                 <a:solidFill>
                   <a:schemeClr val="dk1"/>
                 </a:solidFill>
+                <a:uFillTx/>
                 <a:latin typeface="Arial"/>
                 <a:ea typeface="Arial"/>
               </a:defRPr>
@@ -4089,20 +4187,22 @@
                 <a:tab algn="l" pos="0"/>
               </a:tabLst>
             </a:pPr>
-            <a:fld id="{1493F261-9E98-447C-85C8-7D74F83DA77C}" type="slidenum">
-              <a:rPr b="0" lang="en-US" sz="5030" spc="-1" strike="noStrike">
+            <a:fld id="{D2FF6522-6EEE-44C1-97B9-37237D4A8681}" type="slidenum">
+              <a:rPr b="0" lang="en-US" sz="5030" strike="noStrike" u="none">
                 <a:solidFill>
                   <a:schemeClr val="dk1"/>
                 </a:solidFill>
+                <a:uFillTx/>
                 <a:latin typeface="Arial"/>
                 <a:ea typeface="Arial"/>
               </a:rPr>
               <a:t>&lt;number&gt;</a:t>
             </a:fld>
-            <a:endParaRPr b="0" lang="en-US" sz="5030" spc="-1" strike="noStrike">
-              <a:solidFill>
-                <a:srgbClr val="000000"/>
-              </a:solidFill>
+            <a:endParaRPr b="0" lang="en-US" sz="5030" strike="noStrike" u="none">
+              <a:solidFill>
+                <a:srgbClr val="000000"/>
+              </a:solidFill>
+              <a:uFillTx/>
               <a:latin typeface="Times New Roman"/>
             </a:endParaRPr>
           </a:p>
@@ -4121,7 +4221,7 @@
         <p:spPr>
           <a:xfrm>
             <a:off x="2192760" y="29977560"/>
-            <a:ext cx="10239840" cy="2281320"/>
+            <a:ext cx="10239480" cy="2280960"/>
           </a:xfrm>
           <a:prstGeom prst="rect">
             <a:avLst/>
@@ -4138,10 +4238,11 @@
           <a:lstStyle>
             <a:lvl1pPr indent="0">
               <a:buNone/>
-              <a:defRPr b="0" lang="en-US" sz="1400" spc="-1" strike="noStrike">
+              <a:defRPr b="0" lang="en-US" sz="1400" strike="noStrike" u="none">
                 <a:solidFill>
                   <a:srgbClr val="000000"/>
                 </a:solidFill>
+                <a:uFillTx/>
                 <a:latin typeface="Times New Roman"/>
               </a:defRPr>
             </a:lvl1pPr>
@@ -4151,18 +4252,20 @@
               <a:buNone/>
             </a:pPr>
             <a:r>
-              <a:rPr b="0" lang="en-US" sz="1400" spc="-1" strike="noStrike">
+              <a:rPr b="0" lang="en-US" sz="1400" strike="noStrike" u="none">
                 <a:solidFill>
                   <a:srgbClr val="000000"/>
                 </a:solidFill>
+                <a:uFillTx/>
                 <a:latin typeface="Times New Roman"/>
               </a:rPr>
               <a:t>&lt;date/time&gt;</a:t>
             </a:r>
-            <a:endParaRPr b="0" lang="en-US" sz="1400" spc="-1" strike="noStrike">
-              <a:solidFill>
-                <a:srgbClr val="000000"/>
-              </a:solidFill>
+            <a:endParaRPr b="0" lang="en-US" sz="1400" strike="noStrike" u="none">
+              <a:solidFill>
+                <a:srgbClr val="000000"/>
+              </a:solidFill>
+              <a:uFillTx/>
               <a:latin typeface="Times New Roman"/>
             </a:endParaRPr>
           </a:p>
@@ -4170,7 +4273,7 @@
       </p:sp>
     </p:spTree>
   </p:cSld>
-  <p:clrMap bg1="lt1" bg2="lt2" tx1="dk1" tx2="dk2" accent1="accent1" accent2="accent2" accent3="accent3" accent4="accent4" accent5="accent5" accent6="accent6" hlink="hlink" folHlink="folHlink"/>
+  <p:clrMap bg1="lt1" tx1="dk1" bg2="lt2" tx2="dk2" accent1="accent1" accent2="accent2" accent3="accent3" accent4="accent4" accent5="accent5" accent6="accent6" hlink="hlink" folHlink="folHlink"/>
   <p:sldLayoutIdLst>
     <p:sldLayoutId id="2147483657" r:id="rId5"/>
   </p:sldLayoutIdLst>
@@ -4213,8 +4316,8 @@
         </p:blipFill>
         <p:spPr>
           <a:xfrm rot="16200000">
-            <a:off x="-11069640" y="16463880"/>
-            <a:ext cx="14270040" cy="3932280"/>
+            <a:off x="-11069280" y="16464240"/>
+            <a:ext cx="14269680" cy="3931920"/>
           </a:xfrm>
           <a:prstGeom prst="rect">
             <a:avLst/>
@@ -4236,8 +4339,8 @@
         </p:blipFill>
         <p:spPr>
           <a:xfrm rot="5400000">
-            <a:off x="40695480" y="16459200"/>
-            <a:ext cx="14270040" cy="3932280"/>
+            <a:off x="40695840" y="16459200"/>
+            <a:ext cx="14269680" cy="3931920"/>
           </a:xfrm>
           <a:prstGeom prst="rect">
             <a:avLst/>
@@ -4260,7 +4363,7 @@
         <p:spPr>
           <a:xfrm>
             <a:off x="6946920" y="33426360"/>
-            <a:ext cx="29992680" cy="1443240"/>
+            <a:ext cx="29992320" cy="1442880"/>
           </a:xfrm>
           <a:prstGeom prst="rect">
             <a:avLst/>
@@ -4279,7 +4382,7 @@
         <p:spPr>
           <a:xfrm>
             <a:off x="6946920" y="33998040"/>
-            <a:ext cx="21940920" cy="1265400"/>
+            <a:ext cx="21940560" cy="1265040"/>
           </a:xfrm>
           <a:prstGeom prst="rect">
             <a:avLst/>
@@ -4314,19 +4417,21 @@
               </a:lnSpc>
             </a:pPr>
             <a:r>
-              <a:rPr b="0" lang="en-US" sz="4560" spc="-1" strike="noStrike">
+              <a:rPr b="0" lang="en-US" sz="4560" strike="noStrike" u="none">
                 <a:solidFill>
                   <a:srgbClr val="808080"/>
                 </a:solidFill>
+                <a:uFillTx/>
                 <a:latin typeface="Arial"/>
                 <a:ea typeface="Arial"/>
               </a:rPr>
               <a:t>Template ID: pragmaticgraphite  Size: 48x36</a:t>
             </a:r>
-            <a:endParaRPr b="0" lang="en-US" sz="4560" spc="-1" strike="noStrike">
-              <a:solidFill>
-                <a:srgbClr val="000000"/>
-              </a:solidFill>
+            <a:endParaRPr b="0" lang="en-US" sz="4560" strike="noStrike" u="none">
+              <a:solidFill>
+                <a:srgbClr val="000000"/>
+              </a:solidFill>
+              <a:uFillTx/>
               <a:latin typeface="Arial"/>
             </a:endParaRPr>
           </a:p>
@@ -4345,7 +4450,7 @@
         <p:spPr>
           <a:xfrm>
             <a:off x="3291480" y="11003760"/>
-            <a:ext cx="37303560" cy="5495400"/>
+            <a:ext cx="37303200" cy="5495040"/>
           </a:xfrm>
           <a:prstGeom prst="rect">
             <a:avLst/>
@@ -4364,18 +4469,20 @@
               <a:buNone/>
             </a:pPr>
             <a:r>
-              <a:rPr b="0" lang="en-US" sz="1800" spc="-1" strike="noStrike">
+              <a:rPr b="0" lang="en-US" sz="1800" strike="noStrike" u="none">
                 <a:solidFill>
                   <a:srgbClr val="000000"/>
                 </a:solidFill>
+                <a:uFillTx/>
                 <a:latin typeface="Arial"/>
               </a:rPr>
               <a:t>Click to edit the title text format</a:t>
             </a:r>
-            <a:endParaRPr b="0" lang="en-US" sz="1800" spc="-1" strike="noStrike">
-              <a:solidFill>
-                <a:srgbClr val="000000"/>
-              </a:solidFill>
+            <a:endParaRPr b="0" lang="en-US" sz="1800" strike="noStrike" u="none">
+              <a:solidFill>
+                <a:srgbClr val="000000"/>
+              </a:solidFill>
+              <a:uFillTx/>
               <a:latin typeface="Arial"/>
             </a:endParaRPr>
           </a:p>
@@ -4421,18 +4528,20 @@
               <a:buChar char=""/>
             </a:pPr>
             <a:r>
-              <a:rPr b="0" lang="en-US" sz="1800" spc="-1" strike="noStrike">
+              <a:rPr b="0" lang="en-US" sz="1800" strike="noStrike" u="none">
                 <a:solidFill>
                   <a:srgbClr val="000000"/>
                 </a:solidFill>
+                <a:uFillTx/>
                 <a:latin typeface="Arial"/>
               </a:rPr>
               <a:t>Click to edit the outline text format</a:t>
             </a:r>
-            <a:endParaRPr b="0" lang="en-US" sz="1800" spc="-1" strike="noStrike">
-              <a:solidFill>
-                <a:srgbClr val="000000"/>
-              </a:solidFill>
+            <a:endParaRPr b="0" lang="en-US" sz="1800" strike="noStrike" u="none">
+              <a:solidFill>
+                <a:srgbClr val="000000"/>
+              </a:solidFill>
+              <a:uFillTx/>
               <a:latin typeface="Arial"/>
             </a:endParaRPr>
           </a:p>
@@ -4449,18 +4558,20 @@
               <a:buChar char=""/>
             </a:pPr>
             <a:r>
-              <a:rPr b="0" lang="en-US" sz="1800" spc="-1" strike="noStrike">
+              <a:rPr b="0" lang="en-US" sz="1800" strike="noStrike" u="none">
                 <a:solidFill>
                   <a:srgbClr val="000000"/>
                 </a:solidFill>
+                <a:uFillTx/>
                 <a:latin typeface="Arial"/>
               </a:rPr>
               <a:t>Second Outline Level</a:t>
             </a:r>
-            <a:endParaRPr b="0" lang="en-US" sz="1800" spc="-1" strike="noStrike">
-              <a:solidFill>
-                <a:srgbClr val="000000"/>
-              </a:solidFill>
+            <a:endParaRPr b="0" lang="en-US" sz="1800" strike="noStrike" u="none">
+              <a:solidFill>
+                <a:srgbClr val="000000"/>
+              </a:solidFill>
+              <a:uFillTx/>
               <a:latin typeface="Arial"/>
             </a:endParaRPr>
           </a:p>
@@ -4477,18 +4588,20 @@
               <a:buChar char=""/>
             </a:pPr>
             <a:r>
-              <a:rPr b="0" lang="en-US" sz="1800" spc="-1" strike="noStrike">
+              <a:rPr b="0" lang="en-US" sz="1800" strike="noStrike" u="none">
                 <a:solidFill>
                   <a:srgbClr val="000000"/>
                 </a:solidFill>
+                <a:uFillTx/>
                 <a:latin typeface="Arial"/>
               </a:rPr>
               <a:t>Third Outline Level</a:t>
             </a:r>
-            <a:endParaRPr b="0" lang="en-US" sz="1800" spc="-1" strike="noStrike">
-              <a:solidFill>
-                <a:srgbClr val="000000"/>
-              </a:solidFill>
+            <a:endParaRPr b="0" lang="en-US" sz="1800" strike="noStrike" u="none">
+              <a:solidFill>
+                <a:srgbClr val="000000"/>
+              </a:solidFill>
+              <a:uFillTx/>
               <a:latin typeface="Arial"/>
             </a:endParaRPr>
           </a:p>
@@ -4505,18 +4618,20 @@
               <a:buChar char=""/>
             </a:pPr>
             <a:r>
-              <a:rPr b="0" lang="en-US" sz="1800" spc="-1" strike="noStrike">
+              <a:rPr b="0" lang="en-US" sz="1800" strike="noStrike" u="none">
                 <a:solidFill>
                   <a:srgbClr val="000000"/>
                 </a:solidFill>
+                <a:uFillTx/>
                 <a:latin typeface="Arial"/>
               </a:rPr>
               <a:t>Fourth Outline Level</a:t>
             </a:r>
-            <a:endParaRPr b="0" lang="en-US" sz="1800" spc="-1" strike="noStrike">
-              <a:solidFill>
-                <a:srgbClr val="000000"/>
-              </a:solidFill>
+            <a:endParaRPr b="0" lang="en-US" sz="1800" strike="noStrike" u="none">
+              <a:solidFill>
+                <a:srgbClr val="000000"/>
+              </a:solidFill>
+              <a:uFillTx/>
               <a:latin typeface="Arial"/>
             </a:endParaRPr>
           </a:p>
@@ -4533,18 +4648,20 @@
               <a:buChar char=""/>
             </a:pPr>
             <a:r>
-              <a:rPr b="0" lang="en-US" sz="1800" spc="-1" strike="noStrike">
+              <a:rPr b="0" lang="en-US" sz="1800" strike="noStrike" u="none">
                 <a:solidFill>
                   <a:srgbClr val="000000"/>
                 </a:solidFill>
+                <a:uFillTx/>
                 <a:latin typeface="Arial"/>
               </a:rPr>
               <a:t>Fifth Outline Level</a:t>
             </a:r>
-            <a:endParaRPr b="0" lang="en-US" sz="1800" spc="-1" strike="noStrike">
-              <a:solidFill>
-                <a:srgbClr val="000000"/>
-              </a:solidFill>
+            <a:endParaRPr b="0" lang="en-US" sz="1800" strike="noStrike" u="none">
+              <a:solidFill>
+                <a:srgbClr val="000000"/>
+              </a:solidFill>
+              <a:uFillTx/>
               <a:latin typeface="Arial"/>
             </a:endParaRPr>
           </a:p>
@@ -4561,18 +4678,20 @@
               <a:buChar char=""/>
             </a:pPr>
             <a:r>
-              <a:rPr b="0" lang="en-US" sz="1800" spc="-1" strike="noStrike">
+              <a:rPr b="0" lang="en-US" sz="1800" strike="noStrike" u="none">
                 <a:solidFill>
                   <a:srgbClr val="000000"/>
                 </a:solidFill>
+                <a:uFillTx/>
                 <a:latin typeface="Arial"/>
               </a:rPr>
               <a:t>Sixth Outline Level</a:t>
             </a:r>
-            <a:endParaRPr b="0" lang="en-US" sz="1800" spc="-1" strike="noStrike">
-              <a:solidFill>
-                <a:srgbClr val="000000"/>
-              </a:solidFill>
+            <a:endParaRPr b="0" lang="en-US" sz="1800" strike="noStrike" u="none">
+              <a:solidFill>
+                <a:srgbClr val="000000"/>
+              </a:solidFill>
+              <a:uFillTx/>
               <a:latin typeface="Arial"/>
             </a:endParaRPr>
           </a:p>
@@ -4589,18 +4708,20 @@
               <a:buChar char=""/>
             </a:pPr>
             <a:r>
-              <a:rPr b="0" lang="en-US" sz="1800" spc="-1" strike="noStrike">
+              <a:rPr b="0" lang="en-US" sz="1800" strike="noStrike" u="none">
                 <a:solidFill>
                   <a:srgbClr val="000000"/>
                 </a:solidFill>
+                <a:uFillTx/>
                 <a:latin typeface="Arial"/>
               </a:rPr>
               <a:t>Seventh Outline Level</a:t>
             </a:r>
-            <a:endParaRPr b="0" lang="en-US" sz="1800" spc="-1" strike="noStrike">
-              <a:solidFill>
-                <a:srgbClr val="000000"/>
-              </a:solidFill>
+            <a:endParaRPr b="0" lang="en-US" sz="1800" strike="noStrike" u="none">
+              <a:solidFill>
+                <a:srgbClr val="000000"/>
+              </a:solidFill>
+              <a:uFillTx/>
               <a:latin typeface="Arial"/>
             </a:endParaRPr>
           </a:p>
@@ -4646,18 +4767,20 @@
               <a:buChar char=""/>
             </a:pPr>
             <a:r>
-              <a:rPr b="0" lang="en-US" sz="1800" spc="-1" strike="noStrike">
+              <a:rPr b="0" lang="en-US" sz="1800" strike="noStrike" u="none">
                 <a:solidFill>
                   <a:srgbClr val="000000"/>
                 </a:solidFill>
+                <a:uFillTx/>
                 <a:latin typeface="Arial"/>
               </a:rPr>
               <a:t>Click to edit the outline text format</a:t>
             </a:r>
-            <a:endParaRPr b="0" lang="en-US" sz="1800" spc="-1" strike="noStrike">
-              <a:solidFill>
-                <a:srgbClr val="000000"/>
-              </a:solidFill>
+            <a:endParaRPr b="0" lang="en-US" sz="1800" strike="noStrike" u="none">
+              <a:solidFill>
+                <a:srgbClr val="000000"/>
+              </a:solidFill>
+              <a:uFillTx/>
               <a:latin typeface="Arial"/>
             </a:endParaRPr>
           </a:p>
@@ -4674,18 +4797,20 @@
               <a:buChar char=""/>
             </a:pPr>
             <a:r>
-              <a:rPr b="0" lang="en-US" sz="1800" spc="-1" strike="noStrike">
+              <a:rPr b="0" lang="en-US" sz="1800" strike="noStrike" u="none">
                 <a:solidFill>
                   <a:srgbClr val="000000"/>
                 </a:solidFill>
+                <a:uFillTx/>
                 <a:latin typeface="Arial"/>
               </a:rPr>
               <a:t>Second Outline Level</a:t>
             </a:r>
-            <a:endParaRPr b="0" lang="en-US" sz="1800" spc="-1" strike="noStrike">
-              <a:solidFill>
-                <a:srgbClr val="000000"/>
-              </a:solidFill>
+            <a:endParaRPr b="0" lang="en-US" sz="1800" strike="noStrike" u="none">
+              <a:solidFill>
+                <a:srgbClr val="000000"/>
+              </a:solidFill>
+              <a:uFillTx/>
               <a:latin typeface="Arial"/>
             </a:endParaRPr>
           </a:p>
@@ -4702,18 +4827,20 @@
               <a:buChar char=""/>
             </a:pPr>
             <a:r>
-              <a:rPr b="0" lang="en-US" sz="1800" spc="-1" strike="noStrike">
+              <a:rPr b="0" lang="en-US" sz="1800" strike="noStrike" u="none">
                 <a:solidFill>
                   <a:srgbClr val="000000"/>
                 </a:solidFill>
+                <a:uFillTx/>
                 <a:latin typeface="Arial"/>
               </a:rPr>
               <a:t>Third Outline Level</a:t>
             </a:r>
-            <a:endParaRPr b="0" lang="en-US" sz="1800" spc="-1" strike="noStrike">
-              <a:solidFill>
-                <a:srgbClr val="000000"/>
-              </a:solidFill>
+            <a:endParaRPr b="0" lang="en-US" sz="1800" strike="noStrike" u="none">
+              <a:solidFill>
+                <a:srgbClr val="000000"/>
+              </a:solidFill>
+              <a:uFillTx/>
               <a:latin typeface="Arial"/>
             </a:endParaRPr>
           </a:p>
@@ -4730,18 +4857,20 @@
               <a:buChar char=""/>
             </a:pPr>
             <a:r>
-              <a:rPr b="0" lang="en-US" sz="1800" spc="-1" strike="noStrike">
+              <a:rPr b="0" lang="en-US" sz="1800" strike="noStrike" u="none">
                 <a:solidFill>
                   <a:srgbClr val="000000"/>
                 </a:solidFill>
+                <a:uFillTx/>
                 <a:latin typeface="Arial"/>
               </a:rPr>
               <a:t>Fourth Outline Level</a:t>
             </a:r>
-            <a:endParaRPr b="0" lang="en-US" sz="1800" spc="-1" strike="noStrike">
-              <a:solidFill>
-                <a:srgbClr val="000000"/>
-              </a:solidFill>
+            <a:endParaRPr b="0" lang="en-US" sz="1800" strike="noStrike" u="none">
+              <a:solidFill>
+                <a:srgbClr val="000000"/>
+              </a:solidFill>
+              <a:uFillTx/>
               <a:latin typeface="Arial"/>
             </a:endParaRPr>
           </a:p>
@@ -4758,18 +4887,20 @@
               <a:buChar char=""/>
             </a:pPr>
             <a:r>
-              <a:rPr b="0" lang="en-US" sz="1800" spc="-1" strike="noStrike">
+              <a:rPr b="0" lang="en-US" sz="1800" strike="noStrike" u="none">
                 <a:solidFill>
                   <a:srgbClr val="000000"/>
                 </a:solidFill>
+                <a:uFillTx/>
                 <a:latin typeface="Arial"/>
               </a:rPr>
               <a:t>Fifth Outline Level</a:t>
             </a:r>
-            <a:endParaRPr b="0" lang="en-US" sz="1800" spc="-1" strike="noStrike">
-              <a:solidFill>
-                <a:srgbClr val="000000"/>
-              </a:solidFill>
+            <a:endParaRPr b="0" lang="en-US" sz="1800" strike="noStrike" u="none">
+              <a:solidFill>
+                <a:srgbClr val="000000"/>
+              </a:solidFill>
+              <a:uFillTx/>
               <a:latin typeface="Arial"/>
             </a:endParaRPr>
           </a:p>
@@ -4786,18 +4917,20 @@
               <a:buChar char=""/>
             </a:pPr>
             <a:r>
-              <a:rPr b="0" lang="en-US" sz="1800" spc="-1" strike="noStrike">
+              <a:rPr b="0" lang="en-US" sz="1800" strike="noStrike" u="none">
                 <a:solidFill>
                   <a:srgbClr val="000000"/>
                 </a:solidFill>
+                <a:uFillTx/>
                 <a:latin typeface="Arial"/>
               </a:rPr>
               <a:t>Sixth Outline Level</a:t>
             </a:r>
-            <a:endParaRPr b="0" lang="en-US" sz="1800" spc="-1" strike="noStrike">
-              <a:solidFill>
-                <a:srgbClr val="000000"/>
-              </a:solidFill>
+            <a:endParaRPr b="0" lang="en-US" sz="1800" strike="noStrike" u="none">
+              <a:solidFill>
+                <a:srgbClr val="000000"/>
+              </a:solidFill>
+              <a:uFillTx/>
               <a:latin typeface="Arial"/>
             </a:endParaRPr>
           </a:p>
@@ -4814,18 +4947,20 @@
               <a:buChar char=""/>
             </a:pPr>
             <a:r>
-              <a:rPr b="0" lang="en-US" sz="1800" spc="-1" strike="noStrike">
+              <a:rPr b="0" lang="en-US" sz="1800" strike="noStrike" u="none">
                 <a:solidFill>
                   <a:srgbClr val="000000"/>
                 </a:solidFill>
+                <a:uFillTx/>
                 <a:latin typeface="Arial"/>
               </a:rPr>
               <a:t>Seventh Outline Level</a:t>
             </a:r>
-            <a:endParaRPr b="0" lang="en-US" sz="1800" spc="-1" strike="noStrike">
-              <a:solidFill>
-                <a:srgbClr val="000000"/>
-              </a:solidFill>
+            <a:endParaRPr b="0" lang="en-US" sz="1800" strike="noStrike" u="none">
+              <a:solidFill>
+                <a:srgbClr val="000000"/>
+              </a:solidFill>
+              <a:uFillTx/>
               <a:latin typeface="Arial"/>
             </a:endParaRPr>
           </a:p>
@@ -4844,7 +4979,7 @@
         <p:spPr>
           <a:xfrm>
             <a:off x="14994360" y="29977560"/>
-            <a:ext cx="13897440" cy="2281320"/>
+            <a:ext cx="13897080" cy="2280960"/>
           </a:xfrm>
           <a:prstGeom prst="rect">
             <a:avLst/>
@@ -4867,10 +5002,11 @@
               <a:tabLst>
                 <a:tab algn="l" pos="0"/>
               </a:tabLst>
-              <a:defRPr b="0" lang="en-US" sz="1400" spc="-1" strike="noStrike">
+              <a:defRPr b="0" lang="en-US" sz="1400" strike="noStrike" u="none">
                 <a:solidFill>
                   <a:srgbClr val="000000"/>
                 </a:solidFill>
+                <a:uFillTx/>
                 <a:latin typeface="Times New Roman"/>
               </a:defRPr>
             </a:lvl1pPr>
@@ -4886,18 +5022,20 @@
               </a:tabLst>
             </a:pPr>
             <a:r>
-              <a:rPr b="0" lang="en-US" sz="1400" spc="-1" strike="noStrike">
+              <a:rPr b="0" lang="en-US" sz="1400" strike="noStrike" u="none">
                 <a:solidFill>
                   <a:srgbClr val="000000"/>
                 </a:solidFill>
+                <a:uFillTx/>
                 <a:latin typeface="Times New Roman"/>
               </a:rPr>
               <a:t>&lt;footer&gt;</a:t>
             </a:r>
-            <a:endParaRPr b="0" lang="en-US" sz="1400" spc="-1" strike="noStrike">
-              <a:solidFill>
-                <a:srgbClr val="000000"/>
-              </a:solidFill>
+            <a:endParaRPr b="0" lang="en-US" sz="1400" strike="noStrike" u="none">
+              <a:solidFill>
+                <a:srgbClr val="000000"/>
+              </a:solidFill>
+              <a:uFillTx/>
               <a:latin typeface="Times New Roman"/>
             </a:endParaRPr>
           </a:p>
@@ -4916,7 +5054,7 @@
         <p:spPr>
           <a:xfrm>
             <a:off x="31453560" y="29977560"/>
-            <a:ext cx="10239840" cy="2281320"/>
+            <a:ext cx="10239480" cy="2280960"/>
           </a:xfrm>
           <a:prstGeom prst="rect">
             <a:avLst/>
@@ -4939,10 +5077,11 @@
               <a:tabLst>
                 <a:tab algn="l" pos="0"/>
               </a:tabLst>
-              <a:defRPr b="0" lang="en-US" sz="5030" spc="-1" strike="noStrike">
+              <a:defRPr b="0" lang="en-US" sz="5030" strike="noStrike" u="none">
                 <a:solidFill>
                   <a:schemeClr val="dk1"/>
                 </a:solidFill>
+                <a:uFillTx/>
                 <a:latin typeface="Arial"/>
                 <a:ea typeface="Arial"/>
               </a:defRPr>
@@ -4958,20 +5097,22 @@
                 <a:tab algn="l" pos="0"/>
               </a:tabLst>
             </a:pPr>
-            <a:fld id="{55565643-0385-49C9-92B3-38BABFE77E2D}" type="slidenum">
-              <a:rPr b="0" lang="en-US" sz="5030" spc="-1" strike="noStrike">
+            <a:fld id="{60F76F21-F4D4-4206-AD87-141EE74E07C9}" type="slidenum">
+              <a:rPr b="0" lang="en-US" sz="5030" strike="noStrike" u="none">
                 <a:solidFill>
                   <a:schemeClr val="dk1"/>
                 </a:solidFill>
+                <a:uFillTx/>
                 <a:latin typeface="Arial"/>
                 <a:ea typeface="Arial"/>
               </a:rPr>
               <a:t>&lt;number&gt;</a:t>
             </a:fld>
-            <a:endParaRPr b="0" lang="en-US" sz="5030" spc="-1" strike="noStrike">
-              <a:solidFill>
-                <a:srgbClr val="000000"/>
-              </a:solidFill>
+            <a:endParaRPr b="0" lang="en-US" sz="5030" strike="noStrike" u="none">
+              <a:solidFill>
+                <a:srgbClr val="000000"/>
+              </a:solidFill>
+              <a:uFillTx/>
               <a:latin typeface="Times New Roman"/>
             </a:endParaRPr>
           </a:p>
@@ -4990,7 +5131,7 @@
         <p:spPr>
           <a:xfrm>
             <a:off x="2192760" y="29977560"/>
-            <a:ext cx="10239840" cy="2281320"/>
+            <a:ext cx="10239480" cy="2280960"/>
           </a:xfrm>
           <a:prstGeom prst="rect">
             <a:avLst/>
@@ -5007,10 +5148,11 @@
           <a:lstStyle>
             <a:lvl1pPr indent="0">
               <a:buNone/>
-              <a:defRPr b="0" lang="en-US" sz="1400" spc="-1" strike="noStrike">
+              <a:defRPr b="0" lang="en-US" sz="1400" strike="noStrike" u="none">
                 <a:solidFill>
                   <a:srgbClr val="000000"/>
                 </a:solidFill>
+                <a:uFillTx/>
                 <a:latin typeface="Times New Roman"/>
               </a:defRPr>
             </a:lvl1pPr>
@@ -5020,18 +5162,20 @@
               <a:buNone/>
             </a:pPr>
             <a:r>
-              <a:rPr b="0" lang="en-US" sz="1400" spc="-1" strike="noStrike">
+              <a:rPr b="0" lang="en-US" sz="1400" strike="noStrike" u="none">
                 <a:solidFill>
                   <a:srgbClr val="000000"/>
                 </a:solidFill>
+                <a:uFillTx/>
                 <a:latin typeface="Times New Roman"/>
               </a:rPr>
               <a:t>&lt;date/time&gt;</a:t>
             </a:r>
-            <a:endParaRPr b="0" lang="en-US" sz="1400" spc="-1" strike="noStrike">
-              <a:solidFill>
-                <a:srgbClr val="000000"/>
-              </a:solidFill>
+            <a:endParaRPr b="0" lang="en-US" sz="1400" strike="noStrike" u="none">
+              <a:solidFill>
+                <a:srgbClr val="000000"/>
+              </a:solidFill>
+              <a:uFillTx/>
               <a:latin typeface="Times New Roman"/>
             </a:endParaRPr>
           </a:p>
@@ -5039,7 +5183,7 @@
       </p:sp>
     </p:spTree>
   </p:cSld>
-  <p:clrMap bg1="lt1" bg2="lt2" tx1="dk1" tx2="dk2" accent1="accent1" accent2="accent2" accent3="accent3" accent4="accent4" accent5="accent5" accent6="accent6" hlink="hlink" folHlink="folHlink"/>
+  <p:clrMap bg1="lt1" tx1="dk1" bg2="lt2" tx2="dk2" accent1="accent1" accent2="accent2" accent3="accent3" accent4="accent4" accent5="accent5" accent6="accent6" hlink="hlink" folHlink="folHlink"/>
   <p:sldLayoutIdLst>
     <p:sldLayoutId id="2147483659" r:id="rId5"/>
   </p:sldLayoutIdLst>
@@ -5082,8 +5226,8 @@
         </p:blipFill>
         <p:spPr>
           <a:xfrm rot="16200000">
-            <a:off x="-11069640" y="16463880"/>
-            <a:ext cx="14270040" cy="3932280"/>
+            <a:off x="-11069280" y="16464240"/>
+            <a:ext cx="14269680" cy="3931920"/>
           </a:xfrm>
           <a:prstGeom prst="rect">
             <a:avLst/>
@@ -5105,8 +5249,8 @@
         </p:blipFill>
         <p:spPr>
           <a:xfrm rot="5400000">
-            <a:off x="40695480" y="16459200"/>
-            <a:ext cx="14270040" cy="3932280"/>
+            <a:off x="40695840" y="16459200"/>
+            <a:ext cx="14269680" cy="3931920"/>
           </a:xfrm>
           <a:prstGeom prst="rect">
             <a:avLst/>
@@ -5129,7 +5273,7 @@
         <p:spPr>
           <a:xfrm>
             <a:off x="6946920" y="33426360"/>
-            <a:ext cx="29992680" cy="1443240"/>
+            <a:ext cx="29992320" cy="1442880"/>
           </a:xfrm>
           <a:prstGeom prst="rect">
             <a:avLst/>
@@ -5148,7 +5292,7 @@
         <p:spPr>
           <a:xfrm>
             <a:off x="6946920" y="33998040"/>
-            <a:ext cx="21940920" cy="1265400"/>
+            <a:ext cx="21940560" cy="1265040"/>
           </a:xfrm>
           <a:prstGeom prst="rect">
             <a:avLst/>
@@ -5183,19 +5327,21 @@
               </a:lnSpc>
             </a:pPr>
             <a:r>
-              <a:rPr b="0" lang="en-US" sz="4560" spc="-1" strike="noStrike">
+              <a:rPr b="0" lang="en-US" sz="4560" strike="noStrike" u="none">
                 <a:solidFill>
                   <a:srgbClr val="808080"/>
                 </a:solidFill>
+                <a:uFillTx/>
                 <a:latin typeface="Arial"/>
                 <a:ea typeface="Arial"/>
               </a:rPr>
               <a:t>Template ID: pragmaticgraphite  Size: 48x36</a:t>
             </a:r>
-            <a:endParaRPr b="0" lang="en-US" sz="4560" spc="-1" strike="noStrike">
-              <a:solidFill>
-                <a:srgbClr val="000000"/>
-              </a:solidFill>
+            <a:endParaRPr b="0" lang="en-US" sz="4560" strike="noStrike" u="none">
+              <a:solidFill>
+                <a:srgbClr val="000000"/>
+              </a:solidFill>
+              <a:uFillTx/>
               <a:latin typeface="Arial"/>
             </a:endParaRPr>
           </a:p>
@@ -5214,7 +5360,7 @@
         <p:spPr>
           <a:xfrm>
             <a:off x="14994360" y="29977560"/>
-            <a:ext cx="13897440" cy="2281320"/>
+            <a:ext cx="13897080" cy="2280960"/>
           </a:xfrm>
           <a:prstGeom prst="rect">
             <a:avLst/>
@@ -5237,10 +5383,11 @@
               <a:tabLst>
                 <a:tab algn="l" pos="0"/>
               </a:tabLst>
-              <a:defRPr b="0" lang="en-US" sz="1400" spc="-1" strike="noStrike">
+              <a:defRPr b="0" lang="en-US" sz="1400" strike="noStrike" u="none">
                 <a:solidFill>
                   <a:srgbClr val="000000"/>
                 </a:solidFill>
+                <a:uFillTx/>
                 <a:latin typeface="Times New Roman"/>
               </a:defRPr>
             </a:lvl1pPr>
@@ -5256,18 +5403,20 @@
               </a:tabLst>
             </a:pPr>
             <a:r>
-              <a:rPr b="0" lang="en-US" sz="1400" spc="-1" strike="noStrike">
+              <a:rPr b="0" lang="en-US" sz="1400" strike="noStrike" u="none">
                 <a:solidFill>
                   <a:srgbClr val="000000"/>
                 </a:solidFill>
+                <a:uFillTx/>
                 <a:latin typeface="Times New Roman"/>
               </a:rPr>
               <a:t>&lt;footer&gt;</a:t>
             </a:r>
-            <a:endParaRPr b="0" lang="en-US" sz="1400" spc="-1" strike="noStrike">
-              <a:solidFill>
-                <a:srgbClr val="000000"/>
-              </a:solidFill>
+            <a:endParaRPr b="0" lang="en-US" sz="1400" strike="noStrike" u="none">
+              <a:solidFill>
+                <a:srgbClr val="000000"/>
+              </a:solidFill>
+              <a:uFillTx/>
               <a:latin typeface="Times New Roman"/>
             </a:endParaRPr>
           </a:p>
@@ -5286,7 +5435,7 @@
         <p:spPr>
           <a:xfrm>
             <a:off x="31453560" y="29977560"/>
-            <a:ext cx="10239840" cy="2281320"/>
+            <a:ext cx="10239480" cy="2280960"/>
           </a:xfrm>
           <a:prstGeom prst="rect">
             <a:avLst/>
@@ -5309,10 +5458,11 @@
               <a:tabLst>
                 <a:tab algn="l" pos="0"/>
               </a:tabLst>
-              <a:defRPr b="0" lang="en-US" sz="5030" spc="-1" strike="noStrike">
+              <a:defRPr b="0" lang="en-US" sz="5030" strike="noStrike" u="none">
                 <a:solidFill>
                   <a:schemeClr val="dk1"/>
                 </a:solidFill>
+                <a:uFillTx/>
                 <a:latin typeface="Arial"/>
                 <a:ea typeface="Arial"/>
               </a:defRPr>
@@ -5328,20 +5478,22 @@
                 <a:tab algn="l" pos="0"/>
               </a:tabLst>
             </a:pPr>
-            <a:fld id="{128A8CA7-E7C0-4ACF-8BC0-2D710CBE651F}" type="slidenum">
-              <a:rPr b="0" lang="en-US" sz="5030" spc="-1" strike="noStrike">
+            <a:fld id="{E830A276-9AF5-4569-BCBE-B9A48A46A61A}" type="slidenum">
+              <a:rPr b="0" lang="en-US" sz="5030" strike="noStrike" u="none">
                 <a:solidFill>
                   <a:schemeClr val="dk1"/>
                 </a:solidFill>
+                <a:uFillTx/>
                 <a:latin typeface="Arial"/>
                 <a:ea typeface="Arial"/>
               </a:rPr>
               <a:t>&lt;number&gt;</a:t>
             </a:fld>
-            <a:endParaRPr b="0" lang="en-US" sz="5030" spc="-1" strike="noStrike">
-              <a:solidFill>
-                <a:srgbClr val="000000"/>
-              </a:solidFill>
+            <a:endParaRPr b="0" lang="en-US" sz="5030" strike="noStrike" u="none">
+              <a:solidFill>
+                <a:srgbClr val="000000"/>
+              </a:solidFill>
+              <a:uFillTx/>
               <a:latin typeface="Times New Roman"/>
             </a:endParaRPr>
           </a:p>
@@ -5360,7 +5512,7 @@
         <p:spPr>
           <a:xfrm>
             <a:off x="2192760" y="29977560"/>
-            <a:ext cx="10239840" cy="2281320"/>
+            <a:ext cx="10239480" cy="2280960"/>
           </a:xfrm>
           <a:prstGeom prst="rect">
             <a:avLst/>
@@ -5377,10 +5529,11 @@
           <a:lstStyle>
             <a:lvl1pPr indent="0">
               <a:buNone/>
-              <a:defRPr b="0" lang="en-US" sz="1400" spc="-1" strike="noStrike">
+              <a:defRPr b="0" lang="en-US" sz="1400" strike="noStrike" u="none">
                 <a:solidFill>
                   <a:srgbClr val="000000"/>
                 </a:solidFill>
+                <a:uFillTx/>
                 <a:latin typeface="Times New Roman"/>
               </a:defRPr>
             </a:lvl1pPr>
@@ -5390,18 +5543,20 @@
               <a:buNone/>
             </a:pPr>
             <a:r>
-              <a:rPr b="0" lang="en-US" sz="1400" spc="-1" strike="noStrike">
+              <a:rPr b="0" lang="en-US" sz="1400" strike="noStrike" u="none">
                 <a:solidFill>
                   <a:srgbClr val="000000"/>
                 </a:solidFill>
+                <a:uFillTx/>
                 <a:latin typeface="Times New Roman"/>
               </a:rPr>
               <a:t>&lt;date/time&gt;</a:t>
             </a:r>
-            <a:endParaRPr b="0" lang="en-US" sz="1400" spc="-1" strike="noStrike">
-              <a:solidFill>
-                <a:srgbClr val="000000"/>
-              </a:solidFill>
+            <a:endParaRPr b="0" lang="en-US" sz="1400" strike="noStrike" u="none">
+              <a:solidFill>
+                <a:srgbClr val="000000"/>
+              </a:solidFill>
+              <a:uFillTx/>
               <a:latin typeface="Times New Roman"/>
             </a:endParaRPr>
           </a:p>
@@ -5409,7 +5564,7 @@
       </p:sp>
     </p:spTree>
   </p:cSld>
-  <p:clrMap bg1="lt1" bg2="lt2" tx1="dk1" tx2="dk2" accent1="accent1" accent2="accent2" accent3="accent3" accent4="accent4" accent5="accent5" accent6="accent6" hlink="hlink" folHlink="folHlink"/>
+  <p:clrMap bg1="lt1" tx1="dk1" bg2="lt2" tx2="dk2" accent1="accent1" accent2="accent2" accent3="accent3" accent4="accent4" accent5="accent5" accent6="accent6" hlink="hlink" folHlink="folHlink"/>
   <p:sldLayoutIdLst>
     <p:sldLayoutId id="2147483661" r:id="rId5"/>
   </p:sldLayoutIdLst>
@@ -5452,8 +5607,8 @@
         </p:blipFill>
         <p:spPr>
           <a:xfrm rot="16200000">
-            <a:off x="-11069640" y="16463880"/>
-            <a:ext cx="14270040" cy="3932280"/>
+            <a:off x="-11069280" y="16464240"/>
+            <a:ext cx="14269680" cy="3931920"/>
           </a:xfrm>
           <a:prstGeom prst="rect">
             <a:avLst/>
@@ -5475,8 +5630,8 @@
         </p:blipFill>
         <p:spPr>
           <a:xfrm rot="5400000">
-            <a:off x="40695480" y="16459200"/>
-            <a:ext cx="14270040" cy="3932280"/>
+            <a:off x="40695840" y="16459200"/>
+            <a:ext cx="14269680" cy="3931920"/>
           </a:xfrm>
           <a:prstGeom prst="rect">
             <a:avLst/>
@@ -5499,7 +5654,7 @@
         <p:spPr>
           <a:xfrm>
             <a:off x="6946920" y="33426360"/>
-            <a:ext cx="29992680" cy="1443240"/>
+            <a:ext cx="29992320" cy="1442880"/>
           </a:xfrm>
           <a:prstGeom prst="rect">
             <a:avLst/>
@@ -5518,7 +5673,7 @@
         <p:spPr>
           <a:xfrm>
             <a:off x="6946920" y="33998040"/>
-            <a:ext cx="21940920" cy="1265400"/>
+            <a:ext cx="21940560" cy="1265040"/>
           </a:xfrm>
           <a:prstGeom prst="rect">
             <a:avLst/>
@@ -5553,19 +5708,21 @@
               </a:lnSpc>
             </a:pPr>
             <a:r>
-              <a:rPr b="0" lang="en-US" sz="4560" spc="-1" strike="noStrike">
+              <a:rPr b="0" lang="en-US" sz="4560" strike="noStrike" u="none">
                 <a:solidFill>
                   <a:srgbClr val="808080"/>
                 </a:solidFill>
+                <a:uFillTx/>
                 <a:latin typeface="Arial"/>
                 <a:ea typeface="Arial"/>
               </a:rPr>
               <a:t>Template ID: pragmaticgraphite  Size: 48x36</a:t>
             </a:r>
-            <a:endParaRPr b="0" lang="en-US" sz="4560" spc="-1" strike="noStrike">
-              <a:solidFill>
-                <a:srgbClr val="000000"/>
-              </a:solidFill>
+            <a:endParaRPr b="0" lang="en-US" sz="4560" strike="noStrike" u="none">
+              <a:solidFill>
+                <a:srgbClr val="000000"/>
+              </a:solidFill>
+              <a:uFillTx/>
               <a:latin typeface="Arial"/>
             </a:endParaRPr>
           </a:p>
@@ -5584,7 +5741,7 @@
         <p:spPr>
           <a:xfrm>
             <a:off x="3291480" y="11003760"/>
-            <a:ext cx="37303560" cy="5495400"/>
+            <a:ext cx="37303200" cy="5495040"/>
           </a:xfrm>
           <a:prstGeom prst="rect">
             <a:avLst/>
@@ -5603,18 +5760,20 @@
               <a:buNone/>
             </a:pPr>
             <a:r>
-              <a:rPr b="0" lang="en-US" sz="1800" spc="-1" strike="noStrike">
+              <a:rPr b="0" lang="en-US" sz="1800" strike="noStrike" u="none">
                 <a:solidFill>
                   <a:srgbClr val="000000"/>
                 </a:solidFill>
+                <a:uFillTx/>
                 <a:latin typeface="Arial"/>
               </a:rPr>
               <a:t>Click to edit the title text format</a:t>
             </a:r>
-            <a:endParaRPr b="0" lang="en-US" sz="1800" spc="-1" strike="noStrike">
-              <a:solidFill>
-                <a:srgbClr val="000000"/>
-              </a:solidFill>
+            <a:endParaRPr b="0" lang="en-US" sz="1800" strike="noStrike" u="none">
+              <a:solidFill>
+                <a:srgbClr val="000000"/>
+              </a:solidFill>
+              <a:uFillTx/>
               <a:latin typeface="Arial"/>
             </a:endParaRPr>
           </a:p>
@@ -5633,7 +5792,7 @@
         <p:spPr>
           <a:xfrm>
             <a:off x="14994360" y="29977560"/>
-            <a:ext cx="13897440" cy="2281320"/>
+            <a:ext cx="13897080" cy="2280960"/>
           </a:xfrm>
           <a:prstGeom prst="rect">
             <a:avLst/>
@@ -5656,10 +5815,11 @@
               <a:tabLst>
                 <a:tab algn="l" pos="0"/>
               </a:tabLst>
-              <a:defRPr b="0" lang="en-US" sz="1400" spc="-1" strike="noStrike">
+              <a:defRPr b="0" lang="en-US" sz="1400" strike="noStrike" u="none">
                 <a:solidFill>
                   <a:srgbClr val="000000"/>
                 </a:solidFill>
+                <a:uFillTx/>
                 <a:latin typeface="Times New Roman"/>
               </a:defRPr>
             </a:lvl1pPr>
@@ -5675,18 +5835,20 @@
               </a:tabLst>
             </a:pPr>
             <a:r>
-              <a:rPr b="0" lang="en-US" sz="1400" spc="-1" strike="noStrike">
+              <a:rPr b="0" lang="en-US" sz="1400" strike="noStrike" u="none">
                 <a:solidFill>
                   <a:srgbClr val="000000"/>
                 </a:solidFill>
+                <a:uFillTx/>
                 <a:latin typeface="Times New Roman"/>
               </a:rPr>
               <a:t>&lt;footer&gt;</a:t>
             </a:r>
-            <a:endParaRPr b="0" lang="en-US" sz="1400" spc="-1" strike="noStrike">
-              <a:solidFill>
-                <a:srgbClr val="000000"/>
-              </a:solidFill>
+            <a:endParaRPr b="0" lang="en-US" sz="1400" strike="noStrike" u="none">
+              <a:solidFill>
+                <a:srgbClr val="000000"/>
+              </a:solidFill>
+              <a:uFillTx/>
               <a:latin typeface="Times New Roman"/>
             </a:endParaRPr>
           </a:p>
@@ -5705,7 +5867,7 @@
         <p:spPr>
           <a:xfrm>
             <a:off x="31453560" y="29977560"/>
-            <a:ext cx="10239840" cy="2281320"/>
+            <a:ext cx="10239480" cy="2280960"/>
           </a:xfrm>
           <a:prstGeom prst="rect">
             <a:avLst/>
@@ -5728,10 +5890,11 @@
               <a:tabLst>
                 <a:tab algn="l" pos="0"/>
               </a:tabLst>
-              <a:defRPr b="0" lang="en-US" sz="5030" spc="-1" strike="noStrike">
+              <a:defRPr b="0" lang="en-US" sz="5030" strike="noStrike" u="none">
                 <a:solidFill>
                   <a:schemeClr val="dk1"/>
                 </a:solidFill>
+                <a:uFillTx/>
                 <a:latin typeface="Arial"/>
                 <a:ea typeface="Arial"/>
               </a:defRPr>
@@ -5747,20 +5910,22 @@
                 <a:tab algn="l" pos="0"/>
               </a:tabLst>
             </a:pPr>
-            <a:fld id="{B276D781-79AC-4C1F-A86E-D1735EDCDB90}" type="slidenum">
-              <a:rPr b="0" lang="en-US" sz="5030" spc="-1" strike="noStrike">
+            <a:fld id="{237BDD9A-A3C7-4731-BEDD-34686AC76FC0}" type="slidenum">
+              <a:rPr b="0" lang="en-US" sz="5030" strike="noStrike" u="none">
                 <a:solidFill>
                   <a:schemeClr val="dk1"/>
                 </a:solidFill>
+                <a:uFillTx/>
                 <a:latin typeface="Arial"/>
                 <a:ea typeface="Arial"/>
               </a:rPr>
               <a:t>&lt;number&gt;</a:t>
             </a:fld>
-            <a:endParaRPr b="0" lang="en-US" sz="5030" spc="-1" strike="noStrike">
-              <a:solidFill>
-                <a:srgbClr val="000000"/>
-              </a:solidFill>
+            <a:endParaRPr b="0" lang="en-US" sz="5030" strike="noStrike" u="none">
+              <a:solidFill>
+                <a:srgbClr val="000000"/>
+              </a:solidFill>
+              <a:uFillTx/>
               <a:latin typeface="Times New Roman"/>
             </a:endParaRPr>
           </a:p>
@@ -5779,7 +5944,7 @@
         <p:spPr>
           <a:xfrm>
             <a:off x="2192760" y="29977560"/>
-            <a:ext cx="10239840" cy="2281320"/>
+            <a:ext cx="10239480" cy="2280960"/>
           </a:xfrm>
           <a:prstGeom prst="rect">
             <a:avLst/>
@@ -5796,10 +5961,11 @@
           <a:lstStyle>
             <a:lvl1pPr indent="0">
               <a:buNone/>
-              <a:defRPr b="0" lang="en-US" sz="1400" spc="-1" strike="noStrike">
+              <a:defRPr b="0" lang="en-US" sz="1400" strike="noStrike" u="none">
                 <a:solidFill>
                   <a:srgbClr val="000000"/>
                 </a:solidFill>
+                <a:uFillTx/>
                 <a:latin typeface="Times New Roman"/>
               </a:defRPr>
             </a:lvl1pPr>
@@ -5809,18 +5975,20 @@
               <a:buNone/>
             </a:pPr>
             <a:r>
-              <a:rPr b="0" lang="en-US" sz="1400" spc="-1" strike="noStrike">
+              <a:rPr b="0" lang="en-US" sz="1400" strike="noStrike" u="none">
                 <a:solidFill>
                   <a:srgbClr val="000000"/>
                 </a:solidFill>
+                <a:uFillTx/>
                 <a:latin typeface="Times New Roman"/>
               </a:rPr>
               <a:t>&lt;date/time&gt;</a:t>
             </a:r>
-            <a:endParaRPr b="0" lang="en-US" sz="1400" spc="-1" strike="noStrike">
-              <a:solidFill>
-                <a:srgbClr val="000000"/>
-              </a:solidFill>
+            <a:endParaRPr b="0" lang="en-US" sz="1400" strike="noStrike" u="none">
+              <a:solidFill>
+                <a:srgbClr val="000000"/>
+              </a:solidFill>
+              <a:uFillTx/>
               <a:latin typeface="Times New Roman"/>
             </a:endParaRPr>
           </a:p>
@@ -5828,7 +5996,7 @@
       </p:sp>
     </p:spTree>
   </p:cSld>
-  <p:clrMap bg1="lt1" bg2="lt2" tx1="dk1" tx2="dk2" accent1="accent1" accent2="accent2" accent3="accent3" accent4="accent4" accent5="accent5" accent6="accent6" hlink="hlink" folHlink="folHlink"/>
+  <p:clrMap bg1="lt1" tx1="dk1" bg2="lt2" tx2="dk2" accent1="accent1" accent2="accent2" accent3="accent3" accent4="accent4" accent5="accent5" accent6="accent6" hlink="hlink" folHlink="folHlink"/>
   <p:sldLayoutIdLst>
     <p:sldLayoutId id="2147483663" r:id="rId5"/>
   </p:sldLayoutIdLst>
@@ -5871,8 +6039,8 @@
         </p:blipFill>
         <p:spPr>
           <a:xfrm rot="16200000">
-            <a:off x="-11069640" y="16463880"/>
-            <a:ext cx="14270040" cy="3932280"/>
+            <a:off x="-11069280" y="16464240"/>
+            <a:ext cx="14269680" cy="3931920"/>
           </a:xfrm>
           <a:prstGeom prst="rect">
             <a:avLst/>
@@ -5894,8 +6062,8 @@
         </p:blipFill>
         <p:spPr>
           <a:xfrm rot="5400000">
-            <a:off x="40695480" y="16459200"/>
-            <a:ext cx="14270040" cy="3932280"/>
+            <a:off x="40695840" y="16459200"/>
+            <a:ext cx="14269680" cy="3931920"/>
           </a:xfrm>
           <a:prstGeom prst="rect">
             <a:avLst/>
@@ -5918,7 +6086,7 @@
         <p:spPr>
           <a:xfrm>
             <a:off x="6946920" y="33426360"/>
-            <a:ext cx="29992680" cy="1443240"/>
+            <a:ext cx="29992320" cy="1442880"/>
           </a:xfrm>
           <a:prstGeom prst="rect">
             <a:avLst/>
@@ -5937,7 +6105,7 @@
         <p:spPr>
           <a:xfrm>
             <a:off x="6946920" y="33998040"/>
-            <a:ext cx="21940920" cy="1265400"/>
+            <a:ext cx="21940560" cy="1265040"/>
           </a:xfrm>
           <a:prstGeom prst="rect">
             <a:avLst/>
@@ -5972,19 +6140,21 @@
               </a:lnSpc>
             </a:pPr>
             <a:r>
-              <a:rPr b="0" lang="en-US" sz="4560" spc="-1" strike="noStrike">
+              <a:rPr b="0" lang="en-US" sz="4560" strike="noStrike" u="none">
                 <a:solidFill>
                   <a:srgbClr val="808080"/>
                 </a:solidFill>
+                <a:uFillTx/>
                 <a:latin typeface="Arial"/>
                 <a:ea typeface="Arial"/>
               </a:rPr>
               <a:t>Template ID: pragmaticgraphite  Size: 48x36</a:t>
             </a:r>
-            <a:endParaRPr b="0" lang="en-US" sz="4560" spc="-1" strike="noStrike">
-              <a:solidFill>
-                <a:srgbClr val="000000"/>
-              </a:solidFill>
+            <a:endParaRPr b="0" lang="en-US" sz="4560" strike="noStrike" u="none">
+              <a:solidFill>
+                <a:srgbClr val="000000"/>
+              </a:solidFill>
+              <a:uFillTx/>
               <a:latin typeface="Arial"/>
             </a:endParaRPr>
           </a:p>
@@ -6003,7 +6173,7 @@
         <p:spPr>
           <a:xfrm>
             <a:off x="14994360" y="29977560"/>
-            <a:ext cx="13897440" cy="2281320"/>
+            <a:ext cx="13897080" cy="2280960"/>
           </a:xfrm>
           <a:prstGeom prst="rect">
             <a:avLst/>
@@ -6026,10 +6196,11 @@
               <a:tabLst>
                 <a:tab algn="l" pos="0"/>
               </a:tabLst>
-              <a:defRPr b="0" lang="en-US" sz="1400" spc="-1" strike="noStrike">
+              <a:defRPr b="0" lang="en-US" sz="1400" strike="noStrike" u="none">
                 <a:solidFill>
                   <a:srgbClr val="000000"/>
                 </a:solidFill>
+                <a:uFillTx/>
                 <a:latin typeface="Times New Roman"/>
               </a:defRPr>
             </a:lvl1pPr>
@@ -6045,18 +6216,20 @@
               </a:tabLst>
             </a:pPr>
             <a:r>
-              <a:rPr b="0" lang="en-US" sz="1400" spc="-1" strike="noStrike">
+              <a:rPr b="0" lang="en-US" sz="1400" strike="noStrike" u="none">
                 <a:solidFill>
                   <a:srgbClr val="000000"/>
                 </a:solidFill>
+                <a:uFillTx/>
                 <a:latin typeface="Times New Roman"/>
               </a:rPr>
               <a:t>&lt;footer&gt;</a:t>
             </a:r>
-            <a:endParaRPr b="0" lang="en-US" sz="1400" spc="-1" strike="noStrike">
-              <a:solidFill>
-                <a:srgbClr val="000000"/>
-              </a:solidFill>
+            <a:endParaRPr b="0" lang="en-US" sz="1400" strike="noStrike" u="none">
+              <a:solidFill>
+                <a:srgbClr val="000000"/>
+              </a:solidFill>
+              <a:uFillTx/>
               <a:latin typeface="Times New Roman"/>
             </a:endParaRPr>
           </a:p>
@@ -6075,7 +6248,7 @@
         <p:spPr>
           <a:xfrm>
             <a:off x="31453560" y="29977560"/>
-            <a:ext cx="10239840" cy="2281320"/>
+            <a:ext cx="10239480" cy="2280960"/>
           </a:xfrm>
           <a:prstGeom prst="rect">
             <a:avLst/>
@@ -6098,10 +6271,11 @@
               <a:tabLst>
                 <a:tab algn="l" pos="0"/>
               </a:tabLst>
-              <a:defRPr b="0" lang="en-US" sz="5030" spc="-1" strike="noStrike">
+              <a:defRPr b="0" lang="en-US" sz="5030" strike="noStrike" u="none">
                 <a:solidFill>
                   <a:schemeClr val="dk1"/>
                 </a:solidFill>
+                <a:uFillTx/>
                 <a:latin typeface="Arial"/>
                 <a:ea typeface="Arial"/>
               </a:defRPr>
@@ -6117,20 +6291,22 @@
                 <a:tab algn="l" pos="0"/>
               </a:tabLst>
             </a:pPr>
-            <a:fld id="{341F1FFF-4621-478F-8326-3E7D97FF9BEF}" type="slidenum">
-              <a:rPr b="0" lang="en-US" sz="5030" spc="-1" strike="noStrike">
+            <a:fld id="{EF000851-A7B8-4C5A-A4D5-BF3CD0C72EA5}" type="slidenum">
+              <a:rPr b="0" lang="en-US" sz="5030" strike="noStrike" u="none">
                 <a:solidFill>
                   <a:schemeClr val="dk1"/>
                 </a:solidFill>
+                <a:uFillTx/>
                 <a:latin typeface="Arial"/>
                 <a:ea typeface="Arial"/>
               </a:rPr>
               <a:t>&lt;number&gt;</a:t>
             </a:fld>
-            <a:endParaRPr b="0" lang="en-US" sz="5030" spc="-1" strike="noStrike">
-              <a:solidFill>
-                <a:srgbClr val="000000"/>
-              </a:solidFill>
+            <a:endParaRPr b="0" lang="en-US" sz="5030" strike="noStrike" u="none">
+              <a:solidFill>
+                <a:srgbClr val="000000"/>
+              </a:solidFill>
+              <a:uFillTx/>
               <a:latin typeface="Times New Roman"/>
             </a:endParaRPr>
           </a:p>
@@ -6149,7 +6325,7 @@
         <p:spPr>
           <a:xfrm>
             <a:off x="2192760" y="29977560"/>
-            <a:ext cx="10239840" cy="2281320"/>
+            <a:ext cx="10239480" cy="2280960"/>
           </a:xfrm>
           <a:prstGeom prst="rect">
             <a:avLst/>
@@ -6166,10 +6342,11 @@
           <a:lstStyle>
             <a:lvl1pPr indent="0">
               <a:buNone/>
-              <a:defRPr b="0" lang="en-US" sz="1400" spc="-1" strike="noStrike">
+              <a:defRPr b="0" lang="en-US" sz="1400" strike="noStrike" u="none">
                 <a:solidFill>
                   <a:srgbClr val="000000"/>
                 </a:solidFill>
+                <a:uFillTx/>
                 <a:latin typeface="Times New Roman"/>
               </a:defRPr>
             </a:lvl1pPr>
@@ -6179,18 +6356,20 @@
               <a:buNone/>
             </a:pPr>
             <a:r>
-              <a:rPr b="0" lang="en-US" sz="1400" spc="-1" strike="noStrike">
+              <a:rPr b="0" lang="en-US" sz="1400" strike="noStrike" u="none">
                 <a:solidFill>
                   <a:srgbClr val="000000"/>
                 </a:solidFill>
+                <a:uFillTx/>
                 <a:latin typeface="Times New Roman"/>
               </a:rPr>
               <a:t>&lt;date/time&gt;</a:t>
             </a:r>
-            <a:endParaRPr b="0" lang="en-US" sz="1400" spc="-1" strike="noStrike">
-              <a:solidFill>
-                <a:srgbClr val="000000"/>
-              </a:solidFill>
+            <a:endParaRPr b="0" lang="en-US" sz="1400" strike="noStrike" u="none">
+              <a:solidFill>
+                <a:srgbClr val="000000"/>
+              </a:solidFill>
+              <a:uFillTx/>
               <a:latin typeface="Times New Roman"/>
             </a:endParaRPr>
           </a:p>
@@ -6198,7 +6377,7 @@
       </p:sp>
     </p:spTree>
   </p:cSld>
-  <p:clrMap bg1="lt1" bg2="lt2" tx1="dk1" tx2="dk2" accent1="accent1" accent2="accent2" accent3="accent3" accent4="accent4" accent5="accent5" accent6="accent6" hlink="hlink" folHlink="folHlink"/>
+  <p:clrMap bg1="lt1" tx1="dk1" bg2="lt2" tx2="dk2" accent1="accent1" accent2="accent2" accent3="accent3" accent4="accent4" accent5="accent5" accent6="accent6" hlink="hlink" folHlink="folHlink"/>
   <p:sldLayoutIdLst>
     <p:sldLayoutId id="2147483665" r:id="rId5"/>
   </p:sldLayoutIdLst>
@@ -6238,7 +6417,7 @@
         <p:spPr>
           <a:xfrm>
             <a:off x="33147000" y="16651800"/>
-            <a:ext cx="10121760" cy="14182560"/>
+            <a:ext cx="10121400" cy="14182200"/>
           </a:xfrm>
           <a:prstGeom prst="rect">
             <a:avLst/>
@@ -6269,10 +6448,11 @@
                 <a:spcPct val="100000"/>
               </a:lnSpc>
             </a:pPr>
-            <a:endParaRPr b="0" lang="en-US" sz="1800" spc="-1" strike="noStrike">
-              <a:solidFill>
-                <a:srgbClr val="000000"/>
-              </a:solidFill>
+            <a:endParaRPr b="0" lang="en-US" sz="1800" strike="noStrike" u="none">
+              <a:solidFill>
+                <a:srgbClr val="000000"/>
+              </a:solidFill>
+              <a:uFillTx/>
               <a:latin typeface="Arial"/>
               <a:ea typeface="Arial"/>
             </a:endParaRPr>
@@ -6288,7 +6468,7 @@
         <p:spPr>
           <a:xfrm>
             <a:off x="22174200" y="5558400"/>
-            <a:ext cx="10512360" cy="25302240"/>
+            <a:ext cx="10512000" cy="25301880"/>
           </a:xfrm>
           <a:prstGeom prst="rect">
             <a:avLst/>
@@ -6319,10 +6499,11 @@
                 <a:spcPct val="100000"/>
               </a:lnSpc>
             </a:pPr>
-            <a:endParaRPr b="0" lang="en-US" sz="1800" spc="-1" strike="noStrike">
-              <a:solidFill>
-                <a:srgbClr val="000000"/>
-              </a:solidFill>
+            <a:endParaRPr b="0" lang="en-US" sz="1800" strike="noStrike" u="none">
+              <a:solidFill>
+                <a:srgbClr val="000000"/>
+              </a:solidFill>
+              <a:uFillTx/>
               <a:latin typeface="Arial"/>
               <a:ea typeface="Arial"/>
             </a:endParaRPr>
@@ -6338,7 +6519,7 @@
         <p:spPr>
           <a:xfrm>
             <a:off x="33147000" y="6413400"/>
-            <a:ext cx="10121760" cy="10199160"/>
+            <a:ext cx="10121400" cy="10198800"/>
           </a:xfrm>
           <a:prstGeom prst="rect">
             <a:avLst/>
@@ -6369,10 +6550,11 @@
                 <a:spcPct val="100000"/>
               </a:lnSpc>
             </a:pPr>
-            <a:endParaRPr b="0" lang="en-US" sz="1800" spc="-1" strike="noStrike">
-              <a:solidFill>
-                <a:srgbClr val="000000"/>
-              </a:solidFill>
+            <a:endParaRPr b="0" lang="en-US" sz="1800" strike="noStrike" u="none">
+              <a:solidFill>
+                <a:srgbClr val="000000"/>
+              </a:solidFill>
+              <a:uFillTx/>
               <a:latin typeface="Arial"/>
               <a:ea typeface="Arial"/>
             </a:endParaRPr>
@@ -6388,7 +6570,7 @@
         <p:spPr>
           <a:xfrm>
             <a:off x="11201400" y="5558400"/>
-            <a:ext cx="10512360" cy="25302240"/>
+            <a:ext cx="10512000" cy="25301880"/>
           </a:xfrm>
           <a:prstGeom prst="rect">
             <a:avLst/>
@@ -6419,10 +6601,11 @@
                 <a:spcPct val="100000"/>
               </a:lnSpc>
             </a:pPr>
-            <a:endParaRPr b="0" lang="en-US" sz="1800" spc="-1" strike="noStrike">
-              <a:solidFill>
-                <a:srgbClr val="000000"/>
-              </a:solidFill>
+            <a:endParaRPr b="0" lang="en-US" sz="1800" strike="noStrike" u="none">
+              <a:solidFill>
+                <a:srgbClr val="000000"/>
+              </a:solidFill>
+              <a:uFillTx/>
               <a:latin typeface="Arial"/>
               <a:ea typeface="Arial"/>
             </a:endParaRPr>
@@ -6438,7 +6621,7 @@
         <p:spPr>
           <a:xfrm>
             <a:off x="577800" y="5558400"/>
-            <a:ext cx="10163160" cy="11583360"/>
+            <a:ext cx="10162800" cy="11583000"/>
           </a:xfrm>
           <a:prstGeom prst="rect">
             <a:avLst/>
@@ -6469,10 +6652,11 @@
                 <a:spcPct val="100000"/>
               </a:lnSpc>
             </a:pPr>
-            <a:endParaRPr b="0" lang="en-US" sz="1800" spc="-1" strike="noStrike">
-              <a:solidFill>
-                <a:srgbClr val="000000"/>
-              </a:solidFill>
+            <a:endParaRPr b="0" lang="en-US" sz="1800" strike="noStrike" u="none">
+              <a:solidFill>
+                <a:srgbClr val="000000"/>
+              </a:solidFill>
+              <a:uFillTx/>
               <a:latin typeface="Arial"/>
               <a:ea typeface="Arial"/>
             </a:endParaRPr>
@@ -6488,7 +6672,7 @@
         <p:spPr>
           <a:xfrm>
             <a:off x="0" y="3240"/>
-            <a:ext cx="43886520" cy="5250240"/>
+            <a:ext cx="43886160" cy="5249880"/>
           </a:xfrm>
           <a:prstGeom prst="rect">
             <a:avLst/>
@@ -6516,10 +6700,11 @@
                 <a:spcPct val="100000"/>
               </a:lnSpc>
             </a:pPr>
-            <a:endParaRPr b="1" lang="en-US" sz="5400" spc="-1" strike="noStrike">
+            <a:endParaRPr b="1" lang="en-US" sz="5400" strike="noStrike" u="none">
               <a:solidFill>
                 <a:schemeClr val="dk2"/>
               </a:solidFill>
+              <a:uFillTx/>
               <a:latin typeface="Gill Sans"/>
               <a:ea typeface="Arial"/>
             </a:endParaRPr>
@@ -6535,7 +6720,7 @@
         <p:spPr>
           <a:xfrm>
             <a:off x="609480" y="6666480"/>
-            <a:ext cx="10131480" cy="9888120"/>
+            <a:ext cx="10131120" cy="9887400"/>
           </a:xfrm>
           <a:prstGeom prst="rect">
             <a:avLst/>
@@ -6565,19 +6750,21 @@
               </a:tabLst>
             </a:pPr>
             <a:r>
-              <a:rPr b="0" lang="en-US" sz="4000" spc="-1" strike="noStrike">
+              <a:rPr b="0" lang="en-US" sz="4000" strike="noStrike" u="none">
                 <a:solidFill>
                   <a:schemeClr val="dk1"/>
                 </a:solidFill>
+                <a:uFillTx/>
                 <a:latin typeface="Open Sans"/>
                 <a:ea typeface="Open Sans"/>
               </a:rPr>
               <a:t>If we intend to make use of complex quantum algorithms, we need either:</a:t>
             </a:r>
-            <a:endParaRPr b="0" lang="en-US" sz="4000" spc="-1" strike="noStrike">
-              <a:solidFill>
-                <a:srgbClr val="000000"/>
-              </a:solidFill>
+            <a:endParaRPr b="0" lang="en-US" sz="4000" strike="noStrike" u="none">
+              <a:solidFill>
+                <a:srgbClr val="000000"/>
+              </a:solidFill>
+              <a:uFillTx/>
               <a:latin typeface="Arial"/>
             </a:endParaRPr>
           </a:p>
@@ -6591,19 +6778,21 @@
               </a:tabLst>
             </a:pPr>
             <a:r>
-              <a:rPr b="0" lang="en-US" sz="4000" spc="-1" strike="noStrike">
+              <a:rPr b="0" lang="en-US" sz="4000" strike="noStrike" u="none">
                 <a:solidFill>
                   <a:schemeClr val="dk1"/>
                 </a:solidFill>
+                <a:uFillTx/>
                 <a:latin typeface="Open Sans"/>
                 <a:ea typeface="Open Sans"/>
               </a:rPr>
               <a:t>Scalable, reliable quantum hardware.</a:t>
             </a:r>
-            <a:endParaRPr b="0" lang="en-US" sz="4000" spc="-1" strike="noStrike">
-              <a:solidFill>
-                <a:srgbClr val="000000"/>
-              </a:solidFill>
+            <a:endParaRPr b="0" lang="en-US" sz="4000" strike="noStrike" u="none">
+              <a:solidFill>
+                <a:srgbClr val="000000"/>
+              </a:solidFill>
+              <a:uFillTx/>
               <a:latin typeface="Arial"/>
             </a:endParaRPr>
           </a:p>
@@ -6617,29 +6806,32 @@
               </a:tabLst>
             </a:pPr>
             <a:r>
-              <a:rPr b="0" lang="en-US" sz="4000" spc="-1" strike="noStrike">
+              <a:rPr b="0" lang="en-US" sz="4000" strike="noStrike" u="none">
                 <a:solidFill>
                   <a:schemeClr val="dk1"/>
                 </a:solidFill>
+                <a:uFillTx/>
                 <a:latin typeface="Open Sans"/>
                 <a:ea typeface="Open Sans"/>
               </a:rPr>
               <a:t>	</a:t>
             </a:r>
             <a:r>
-              <a:rPr b="0" lang="en-US" sz="4000" spc="-1" strike="noStrike">
+              <a:rPr b="0" lang="en-US" sz="4000" strike="noStrike" u="none">
                 <a:solidFill>
                   <a:schemeClr val="dk1"/>
                 </a:solidFill>
+                <a:uFillTx/>
                 <a:latin typeface="Open Sans"/>
                 <a:ea typeface="Open Sans"/>
               </a:rPr>
               <a:t>or</a:t>
             </a:r>
-            <a:endParaRPr b="0" lang="en-US" sz="4000" spc="-1" strike="noStrike">
-              <a:solidFill>
-                <a:srgbClr val="000000"/>
-              </a:solidFill>
+            <a:endParaRPr b="0" lang="en-US" sz="4000" strike="noStrike" u="none">
+              <a:solidFill>
+                <a:srgbClr val="000000"/>
+              </a:solidFill>
+              <a:uFillTx/>
               <a:latin typeface="Arial"/>
             </a:endParaRPr>
           </a:p>
@@ -6653,19 +6845,21 @@
               </a:tabLst>
             </a:pPr>
             <a:r>
-              <a:rPr b="0" lang="en-US" sz="4000" spc="-1" strike="noStrike">
+              <a:rPr b="0" lang="en-US" sz="4000" strike="noStrike" u="none">
                 <a:solidFill>
                   <a:schemeClr val="dk1"/>
                 </a:solidFill>
+                <a:uFillTx/>
                 <a:latin typeface="Open Sans"/>
                 <a:ea typeface="Open Sans"/>
               </a:rPr>
               <a:t>Sophisticated algorithm, architecture &amp; compilation frameworks that enable execution on heterogeneous, distributed systems.</a:t>
             </a:r>
-            <a:endParaRPr b="0" lang="en-US" sz="4000" spc="-1" strike="noStrike">
-              <a:solidFill>
-                <a:srgbClr val="000000"/>
-              </a:solidFill>
+            <a:endParaRPr b="0" lang="en-US" sz="4000" strike="noStrike" u="none">
+              <a:solidFill>
+                <a:srgbClr val="000000"/>
+              </a:solidFill>
+              <a:uFillTx/>
               <a:latin typeface="Arial"/>
             </a:endParaRPr>
           </a:p>
@@ -6677,11 +6871,15 @@
               <a:spcBef>
                 <a:spcPts val="1417"/>
               </a:spcBef>
-            </a:pPr>
-            <a:endParaRPr b="0" lang="en-US" sz="1800" spc="-1" strike="noStrike">
-              <a:solidFill>
-                <a:srgbClr val="000000"/>
-              </a:solidFill>
+              <a:tabLst>
+                <a:tab algn="l" pos="0"/>
+              </a:tabLst>
+            </a:pPr>
+            <a:endParaRPr b="0" lang="en-US" sz="1800" strike="noStrike" u="none">
+              <a:solidFill>
+                <a:srgbClr val="000000"/>
+              </a:solidFill>
+              <a:uFillTx/>
               <a:latin typeface="Arial"/>
             </a:endParaRPr>
           </a:p>
@@ -6693,11 +6891,15 @@
               <a:spcBef>
                 <a:spcPts val="1417"/>
               </a:spcBef>
-            </a:pPr>
-            <a:endParaRPr b="0" lang="en-US" sz="1800" spc="-1" strike="noStrike">
-              <a:solidFill>
-                <a:srgbClr val="000000"/>
-              </a:solidFill>
+              <a:tabLst>
+                <a:tab algn="l" pos="0"/>
+              </a:tabLst>
+            </a:pPr>
+            <a:endParaRPr b="0" lang="en-US" sz="1800" strike="noStrike" u="none">
+              <a:solidFill>
+                <a:srgbClr val="000000"/>
+              </a:solidFill>
+              <a:uFillTx/>
               <a:latin typeface="Arial"/>
             </a:endParaRPr>
           </a:p>
@@ -6709,11 +6911,15 @@
               <a:spcBef>
                 <a:spcPts val="1417"/>
               </a:spcBef>
-            </a:pPr>
-            <a:endParaRPr b="0" lang="en-US" sz="1800" spc="-1" strike="noStrike">
-              <a:solidFill>
-                <a:srgbClr val="000000"/>
-              </a:solidFill>
+              <a:tabLst>
+                <a:tab algn="l" pos="0"/>
+              </a:tabLst>
+            </a:pPr>
+            <a:endParaRPr b="0" lang="en-US" sz="1800" strike="noStrike" u="none">
+              <a:solidFill>
+                <a:srgbClr val="000000"/>
+              </a:solidFill>
+              <a:uFillTx/>
               <a:latin typeface="Arial"/>
             </a:endParaRPr>
           </a:p>
@@ -6725,11 +6931,15 @@
               <a:spcBef>
                 <a:spcPts val="1417"/>
               </a:spcBef>
-            </a:pPr>
-            <a:endParaRPr b="0" lang="en-US" sz="1800" spc="-1" strike="noStrike">
-              <a:solidFill>
-                <a:srgbClr val="000000"/>
-              </a:solidFill>
+              <a:tabLst>
+                <a:tab algn="l" pos="0"/>
+              </a:tabLst>
+            </a:pPr>
+            <a:endParaRPr b="0" lang="en-US" sz="1800" strike="noStrike" u="none">
+              <a:solidFill>
+                <a:srgbClr val="000000"/>
+              </a:solidFill>
+              <a:uFillTx/>
               <a:latin typeface="Arial"/>
             </a:endParaRPr>
           </a:p>
@@ -6741,21 +6951,26 @@
               <a:spcBef>
                 <a:spcPts val="1417"/>
               </a:spcBef>
-            </a:pPr>
-            <a:r>
-              <a:rPr b="0" lang="en-US" sz="4000" spc="-1" strike="noStrike">
+              <a:tabLst>
+                <a:tab algn="l" pos="0"/>
+              </a:tabLst>
+            </a:pPr>
+            <a:r>
+              <a:rPr b="0" lang="en-US" sz="4000" strike="noStrike" u="none">
                 <a:solidFill>
                   <a:schemeClr val="dk1"/>
                 </a:solidFill>
+                <a:uFillTx/>
                 <a:latin typeface="Open Sans"/>
                 <a:ea typeface="Open Sans"/>
               </a:rPr>
               <a:t>This work proposes a framework for quantum circuit generation in hopes to better utilize complex quantum modeling techniques on real quantum hardware.</a:t>
             </a:r>
-            <a:endParaRPr b="0" lang="en-US" sz="4000" spc="-1" strike="noStrike">
-              <a:solidFill>
-                <a:srgbClr val="000000"/>
-              </a:solidFill>
+            <a:endParaRPr b="0" lang="en-US" sz="4000" strike="noStrike" u="none">
+              <a:solidFill>
+                <a:srgbClr val="000000"/>
+              </a:solidFill>
+              <a:uFillTx/>
               <a:latin typeface="Arial"/>
             </a:endParaRPr>
           </a:p>
@@ -6770,7 +6985,7 @@
         <p:spPr>
           <a:xfrm>
             <a:off x="7545960" y="410400"/>
-            <a:ext cx="28799280" cy="2932920"/>
+            <a:ext cx="28798920" cy="2932560"/>
           </a:xfrm>
           <a:prstGeom prst="rect">
             <a:avLst/>
@@ -6803,19 +7018,21 @@
               </a:tabLst>
             </a:pPr>
             <a:r>
-              <a:rPr b="0" lang="en-US" sz="8500" spc="-1" strike="noStrike">
+              <a:rPr b="0" lang="en-US" sz="8500" strike="noStrike" u="none">
                 <a:solidFill>
                   <a:srgbClr val="ffffff"/>
                 </a:solidFill>
+                <a:uFillTx/>
                 <a:latin typeface="Bree Serif"/>
                 <a:ea typeface="Arial"/>
               </a:rPr>
               <a:t>Quantum Circuit Generation for Modeling Complex Interactions</a:t>
             </a:r>
-            <a:endParaRPr b="0" lang="en-US" sz="8500" spc="-1" strike="noStrike">
-              <a:solidFill>
-                <a:srgbClr val="000000"/>
-              </a:solidFill>
+            <a:endParaRPr b="0" lang="en-US" sz="8500" strike="noStrike" u="none">
+              <a:solidFill>
+                <a:srgbClr val="000000"/>
+              </a:solidFill>
+              <a:uFillTx/>
               <a:latin typeface="Arial"/>
             </a:endParaRPr>
           </a:p>
@@ -6830,7 +7047,7 @@
         <p:spPr>
           <a:xfrm>
             <a:off x="1175040" y="3321000"/>
-            <a:ext cx="36571320" cy="2600640"/>
+            <a:ext cx="36570960" cy="2459160"/>
           </a:xfrm>
           <a:prstGeom prst="rect">
             <a:avLst/>
@@ -6863,19 +7080,21 @@
               </a:tabLst>
             </a:pPr>
             <a:r>
-              <a:rPr b="0" lang="en-US" sz="5600" spc="-1" strike="noStrike">
+              <a:rPr b="0" lang="en-US" sz="5600" strike="noStrike" u="none">
                 <a:solidFill>
                   <a:srgbClr val="ffffff"/>
                 </a:solidFill>
+                <a:uFillTx/>
                 <a:latin typeface="Open Sans"/>
                 <a:ea typeface="Open Sans"/>
               </a:rPr>
               <a:t>                                                                  </a:t>
             </a:r>
-            <a:endParaRPr b="0" lang="en-US" sz="5600" spc="-1" strike="noStrike">
-              <a:solidFill>
-                <a:srgbClr val="000000"/>
-              </a:solidFill>
+            <a:endParaRPr b="0" lang="en-US" sz="5600" strike="noStrike" u="none">
+              <a:solidFill>
+                <a:srgbClr val="000000"/>
+              </a:solidFill>
+              <a:uFillTx/>
               <a:latin typeface="Arial"/>
             </a:endParaRPr>
           </a:p>
@@ -6892,29 +7111,32 @@
               </a:tabLst>
             </a:pPr>
             <a:r>
-              <a:rPr b="0" lang="en-US" sz="4000" spc="-1" strike="noStrike">
+              <a:rPr b="0" lang="en-US" sz="4000" strike="noStrike" u="none">
                 <a:solidFill>
                   <a:srgbClr val="ffffff"/>
                 </a:solidFill>
+                <a:uFillTx/>
                 <a:latin typeface="Open Sans"/>
                 <a:ea typeface="Open Sans"/>
               </a:rPr>
               <a:t>  </a:t>
             </a:r>
             <a:r>
-              <a:rPr b="0" lang="en-US" sz="4000" spc="-1" strike="noStrike">
+              <a:rPr b="0" lang="en-US" sz="4000" strike="noStrike" u="none">
                 <a:solidFill>
                   <a:srgbClr val="ffffff"/>
                 </a:solidFill>
+                <a:uFillTx/>
                 <a:latin typeface="Open Sans"/>
                 <a:ea typeface="Open Sans"/>
               </a:rPr>
               <a:t>Department of Computer Science                 Department of Computer Science                       NVIDIA</a:t>
             </a:r>
-            <a:endParaRPr b="0" lang="en-US" sz="4000" spc="-1" strike="noStrike">
-              <a:solidFill>
-                <a:srgbClr val="000000"/>
-              </a:solidFill>
+            <a:endParaRPr b="0" lang="en-US" sz="4000" strike="noStrike" u="none">
+              <a:solidFill>
+                <a:srgbClr val="000000"/>
+              </a:solidFill>
+              <a:uFillTx/>
               <a:latin typeface="Arial"/>
             </a:endParaRPr>
           </a:p>
@@ -6930,10 +7152,11 @@
                 <a:tab algn="l" pos="0"/>
               </a:tabLst>
             </a:pPr>
-            <a:endParaRPr b="0" lang="en-US" sz="5600" spc="-1" strike="noStrike">
-              <a:solidFill>
-                <a:srgbClr val="000000"/>
-              </a:solidFill>
+            <a:endParaRPr b="0" lang="en-US" sz="5600" strike="noStrike" u="none">
+              <a:solidFill>
+                <a:srgbClr val="000000"/>
+              </a:solidFill>
+              <a:uFillTx/>
               <a:latin typeface="Arial"/>
             </a:endParaRPr>
           </a:p>
@@ -6948,7 +7171,7 @@
         <p:spPr>
           <a:xfrm>
             <a:off x="11417040" y="6666480"/>
-            <a:ext cx="10070640" cy="15173640"/>
+            <a:ext cx="10070280" cy="15173640"/>
           </a:xfrm>
           <a:prstGeom prst="rect">
             <a:avLst/>
@@ -6975,39 +7198,43 @@
               </a:lnSpc>
             </a:pPr>
             <a:r>
-              <a:rPr b="0" lang="en-US" sz="3600" spc="-1" strike="noStrike">
+              <a:rPr b="0" lang="en-US" sz="3600" strike="noStrike" u="none">
                 <a:solidFill>
                   <a:schemeClr val="dk1"/>
                 </a:solidFill>
+                <a:uFillTx/>
                 <a:latin typeface="Open Sans"/>
                 <a:ea typeface="Open Sans"/>
               </a:rPr>
               <a:t>Classical modeling methods are </a:t>
             </a:r>
             <a:r>
-              <a:rPr b="1" lang="en-US" sz="3600" spc="-1" strike="noStrike">
+              <a:rPr b="1" lang="en-US" sz="3600" strike="noStrike" u="none">
                 <a:solidFill>
                   <a:schemeClr val="dk1"/>
                 </a:solidFill>
+                <a:uFillTx/>
                 <a:latin typeface="Open Sans"/>
                 <a:ea typeface="Open Sans"/>
               </a:rPr>
               <a:t>expensive </a:t>
             </a:r>
             <a:r>
-              <a:rPr b="0" lang="en-US" sz="3600" spc="-1" strike="noStrike">
+              <a:rPr b="0" lang="en-US" sz="3600" strike="noStrike" u="none">
                 <a:solidFill>
                   <a:schemeClr val="dk1"/>
                 </a:solidFill>
+                <a:uFillTx/>
                 <a:latin typeface="Open Sans"/>
                 <a:ea typeface="Open Sans"/>
               </a:rPr>
               <a:t>due to an inability to scale for:</a:t>
             </a:r>
-            <a:endParaRPr b="0" lang="en-US" sz="3600" spc="-1" strike="noStrike">
-              <a:solidFill>
-                <a:srgbClr val="000000"/>
-              </a:solidFill>
+            <a:endParaRPr b="0" lang="en-US" sz="3600" strike="noStrike" u="none">
+              <a:solidFill>
+                <a:srgbClr val="000000"/>
+              </a:solidFill>
+              <a:uFillTx/>
               <a:latin typeface="Arial"/>
             </a:endParaRPr>
           </a:p>
@@ -7024,19 +7251,21 @@
               <a:buChar char=""/>
             </a:pPr>
             <a:r>
-              <a:rPr b="0" lang="en-US" sz="3600" spc="-1" strike="noStrike">
+              <a:rPr b="0" lang="en-US" sz="3600" strike="noStrike" u="none">
                 <a:solidFill>
                   <a:schemeClr val="dk1"/>
                 </a:solidFill>
+                <a:uFillTx/>
                 <a:latin typeface="Open Sans"/>
                 <a:ea typeface="Open Sans"/>
               </a:rPr>
               <a:t>Large / dense domain sizes</a:t>
             </a:r>
-            <a:endParaRPr b="0" lang="en-US" sz="3600" spc="-1" strike="noStrike">
-              <a:solidFill>
-                <a:srgbClr val="000000"/>
-              </a:solidFill>
+            <a:endParaRPr b="0" lang="en-US" sz="3600" strike="noStrike" u="none">
+              <a:solidFill>
+                <a:srgbClr val="000000"/>
+              </a:solidFill>
+              <a:uFillTx/>
               <a:latin typeface="Arial"/>
             </a:endParaRPr>
           </a:p>
@@ -7053,19 +7282,21 @@
               <a:buChar char=""/>
             </a:pPr>
             <a:r>
-              <a:rPr b="0" lang="en-US" sz="3600" spc="-1" strike="noStrike">
+              <a:rPr b="0" lang="en-US" sz="3600" strike="noStrike" u="none">
                 <a:solidFill>
                   <a:schemeClr val="dk1"/>
                 </a:solidFill>
+                <a:uFillTx/>
                 <a:latin typeface="Open Sans"/>
                 <a:ea typeface="Open Sans"/>
               </a:rPr>
               <a:t>Long-term model stability</a:t>
             </a:r>
-            <a:endParaRPr b="0" lang="en-US" sz="3600" spc="-1" strike="noStrike">
-              <a:solidFill>
-                <a:srgbClr val="000000"/>
-              </a:solidFill>
+            <a:endParaRPr b="0" lang="en-US" sz="3600" strike="noStrike" u="none">
+              <a:solidFill>
+                <a:srgbClr val="000000"/>
+              </a:solidFill>
+              <a:uFillTx/>
               <a:latin typeface="Arial"/>
             </a:endParaRPr>
           </a:p>
@@ -7075,10 +7306,11 @@
                 <a:spcPct val="110000"/>
               </a:lnSpc>
             </a:pPr>
-            <a:endParaRPr b="0" lang="en-US" sz="3600" spc="-1" strike="noStrike">
-              <a:solidFill>
-                <a:srgbClr val="000000"/>
-              </a:solidFill>
+            <a:endParaRPr b="0" lang="en-US" sz="3600" strike="noStrike" u="none">
+              <a:solidFill>
+                <a:srgbClr val="000000"/>
+              </a:solidFill>
+              <a:uFillTx/>
               <a:latin typeface="Arial"/>
             </a:endParaRPr>
           </a:p>
@@ -7089,39 +7321,43 @@
               </a:lnSpc>
             </a:pPr>
             <a:r>
-              <a:rPr b="0" lang="en-US" sz="3600" spc="-1" strike="noStrike">
+              <a:rPr b="0" lang="en-US" sz="3600" strike="noStrike" u="none">
                 <a:solidFill>
                   <a:schemeClr val="dk1"/>
                 </a:solidFill>
+                <a:uFillTx/>
                 <a:latin typeface="Open Sans"/>
                 <a:ea typeface="Open Sans"/>
               </a:rPr>
               <a:t>We are interested in making quantum algorithms for modeling complex systems viable for </a:t>
             </a:r>
             <a:r>
-              <a:rPr b="1" lang="en-US" sz="3600" spc="-1" strike="noStrike">
+              <a:rPr b="1" lang="en-US" sz="3600" strike="noStrike" u="none">
                 <a:solidFill>
                   <a:schemeClr val="dk1"/>
                 </a:solidFill>
+                <a:uFillTx/>
                 <a:latin typeface="Open Sans"/>
                 <a:ea typeface="Open Sans"/>
               </a:rPr>
               <a:t>execution on real quantum hardware</a:t>
             </a:r>
             <a:r>
-              <a:rPr b="0" lang="en-US" sz="3600" spc="-1" strike="noStrike">
+              <a:rPr b="0" lang="en-US" sz="3600" strike="noStrike" u="none">
                 <a:solidFill>
                   <a:schemeClr val="dk1"/>
                 </a:solidFill>
+                <a:uFillTx/>
                 <a:latin typeface="Open Sans"/>
                 <a:ea typeface="Open Sans"/>
               </a:rPr>
               <a:t>.</a:t>
             </a:r>
-            <a:endParaRPr b="0" lang="en-US" sz="3600" spc="-1" strike="noStrike">
-              <a:solidFill>
-                <a:srgbClr val="000000"/>
-              </a:solidFill>
+            <a:endParaRPr b="0" lang="en-US" sz="3600" strike="noStrike" u="none">
+              <a:solidFill>
+                <a:srgbClr val="000000"/>
+              </a:solidFill>
+              <a:uFillTx/>
               <a:latin typeface="Arial"/>
             </a:endParaRPr>
           </a:p>
@@ -7131,10 +7367,11 @@
                 <a:spcPct val="110000"/>
               </a:lnSpc>
             </a:pPr>
-            <a:endParaRPr b="0" lang="en-US" sz="3600" spc="-1" strike="noStrike">
-              <a:solidFill>
-                <a:srgbClr val="000000"/>
-              </a:solidFill>
+            <a:endParaRPr b="0" lang="en-US" sz="3600" strike="noStrike" u="none">
+              <a:solidFill>
+                <a:srgbClr val="000000"/>
+              </a:solidFill>
+              <a:uFillTx/>
               <a:latin typeface="Arial"/>
             </a:endParaRPr>
           </a:p>
@@ -7144,10 +7381,11 @@
                 <a:spcPct val="110000"/>
               </a:lnSpc>
             </a:pPr>
-            <a:endParaRPr b="0" lang="en-US" sz="3600" spc="-1" strike="noStrike">
-              <a:solidFill>
-                <a:srgbClr val="000000"/>
-              </a:solidFill>
+            <a:endParaRPr b="0" lang="en-US" sz="3600" strike="noStrike" u="none">
+              <a:solidFill>
+                <a:srgbClr val="000000"/>
+              </a:solidFill>
+              <a:uFillTx/>
               <a:latin typeface="Arial"/>
             </a:endParaRPr>
           </a:p>
@@ -7157,10 +7395,11 @@
                 <a:spcPct val="110000"/>
               </a:lnSpc>
             </a:pPr>
-            <a:endParaRPr b="0" lang="en-US" sz="3600" spc="-1" strike="noStrike">
-              <a:solidFill>
-                <a:srgbClr val="000000"/>
-              </a:solidFill>
+            <a:endParaRPr b="0" lang="en-US" sz="3600" strike="noStrike" u="none">
+              <a:solidFill>
+                <a:srgbClr val="000000"/>
+              </a:solidFill>
+              <a:uFillTx/>
               <a:latin typeface="Arial"/>
             </a:endParaRPr>
           </a:p>
@@ -7170,10 +7409,11 @@
                 <a:spcPct val="110000"/>
               </a:lnSpc>
             </a:pPr>
-            <a:endParaRPr b="0" lang="en-US" sz="3600" spc="-1" strike="noStrike">
-              <a:solidFill>
-                <a:srgbClr val="000000"/>
-              </a:solidFill>
+            <a:endParaRPr b="0" lang="en-US" sz="3600" strike="noStrike" u="none">
+              <a:solidFill>
+                <a:srgbClr val="000000"/>
+              </a:solidFill>
+              <a:uFillTx/>
               <a:latin typeface="Arial"/>
             </a:endParaRPr>
           </a:p>
@@ -7183,10 +7423,11 @@
                 <a:spcPct val="110000"/>
               </a:lnSpc>
             </a:pPr>
-            <a:endParaRPr b="0" lang="en-US" sz="3600" spc="-1" strike="noStrike">
-              <a:solidFill>
-                <a:srgbClr val="000000"/>
-              </a:solidFill>
+            <a:endParaRPr b="0" lang="en-US" sz="3600" strike="noStrike" u="none">
+              <a:solidFill>
+                <a:srgbClr val="000000"/>
+              </a:solidFill>
+              <a:uFillTx/>
               <a:latin typeface="Arial"/>
             </a:endParaRPr>
           </a:p>
@@ -7196,10 +7437,11 @@
                 <a:spcPct val="110000"/>
               </a:lnSpc>
             </a:pPr>
-            <a:endParaRPr b="0" lang="en-US" sz="3600" spc="-1" strike="noStrike">
-              <a:solidFill>
-                <a:srgbClr val="000000"/>
-              </a:solidFill>
+            <a:endParaRPr b="0" lang="en-US" sz="3600" strike="noStrike" u="none">
+              <a:solidFill>
+                <a:srgbClr val="000000"/>
+              </a:solidFill>
+              <a:uFillTx/>
               <a:latin typeface="Arial"/>
             </a:endParaRPr>
           </a:p>
@@ -7209,10 +7451,11 @@
                 <a:spcPct val="110000"/>
               </a:lnSpc>
             </a:pPr>
-            <a:endParaRPr b="0" lang="en-US" sz="3600" spc="-1" strike="noStrike">
-              <a:solidFill>
-                <a:srgbClr val="000000"/>
-              </a:solidFill>
+            <a:endParaRPr b="0" lang="en-US" sz="3600" strike="noStrike" u="none">
+              <a:solidFill>
+                <a:srgbClr val="000000"/>
+              </a:solidFill>
+              <a:uFillTx/>
               <a:latin typeface="Arial"/>
             </a:endParaRPr>
           </a:p>
@@ -7222,10 +7465,11 @@
                 <a:spcPct val="110000"/>
               </a:lnSpc>
             </a:pPr>
-            <a:endParaRPr b="0" lang="en-US" sz="3600" spc="-1" strike="noStrike">
-              <a:solidFill>
-                <a:srgbClr val="000000"/>
-              </a:solidFill>
+            <a:endParaRPr b="0" lang="en-US" sz="3600" strike="noStrike" u="none">
+              <a:solidFill>
+                <a:srgbClr val="000000"/>
+              </a:solidFill>
+              <a:uFillTx/>
               <a:latin typeface="Arial"/>
             </a:endParaRPr>
           </a:p>
@@ -7235,10 +7479,11 @@
                 <a:spcPct val="110000"/>
               </a:lnSpc>
             </a:pPr>
-            <a:endParaRPr b="0" lang="en-US" sz="3600" spc="-1" strike="noStrike">
-              <a:solidFill>
-                <a:srgbClr val="000000"/>
-              </a:solidFill>
+            <a:endParaRPr b="0" lang="en-US" sz="3600" strike="noStrike" u="none">
+              <a:solidFill>
+                <a:srgbClr val="000000"/>
+              </a:solidFill>
+              <a:uFillTx/>
               <a:latin typeface="Arial"/>
             </a:endParaRPr>
           </a:p>
@@ -7248,10 +7493,11 @@
                 <a:spcPct val="110000"/>
               </a:lnSpc>
             </a:pPr>
-            <a:endParaRPr b="0" lang="en-US" sz="3600" spc="-1" strike="noStrike">
-              <a:solidFill>
-                <a:srgbClr val="000000"/>
-              </a:solidFill>
+            <a:endParaRPr b="0" lang="en-US" sz="3600" strike="noStrike" u="none">
+              <a:solidFill>
+                <a:srgbClr val="000000"/>
+              </a:solidFill>
+              <a:uFillTx/>
               <a:latin typeface="Arial"/>
             </a:endParaRPr>
           </a:p>
@@ -7261,10 +7507,11 @@
                 <a:spcPct val="110000"/>
               </a:lnSpc>
             </a:pPr>
-            <a:endParaRPr b="0" lang="en-US" sz="3600" spc="-1" strike="noStrike">
-              <a:solidFill>
-                <a:srgbClr val="000000"/>
-              </a:solidFill>
+            <a:endParaRPr b="0" lang="en-US" sz="3600" strike="noStrike" u="none">
+              <a:solidFill>
+                <a:srgbClr val="000000"/>
+              </a:solidFill>
+              <a:uFillTx/>
               <a:latin typeface="Arial"/>
             </a:endParaRPr>
           </a:p>
@@ -7274,10 +7521,11 @@
                 <a:spcPct val="110000"/>
               </a:lnSpc>
             </a:pPr>
-            <a:endParaRPr b="0" lang="en-US" sz="3600" spc="-1" strike="noStrike">
-              <a:solidFill>
-                <a:srgbClr val="000000"/>
-              </a:solidFill>
+            <a:endParaRPr b="0" lang="en-US" sz="3600" strike="noStrike" u="none">
+              <a:solidFill>
+                <a:srgbClr val="000000"/>
+              </a:solidFill>
+              <a:uFillTx/>
               <a:latin typeface="Arial"/>
             </a:endParaRPr>
           </a:p>
@@ -7287,10 +7535,11 @@
                 <a:spcPct val="110000"/>
               </a:lnSpc>
             </a:pPr>
-            <a:endParaRPr b="0" lang="en-US" sz="3600" spc="-1" strike="noStrike">
-              <a:solidFill>
-                <a:srgbClr val="000000"/>
-              </a:solidFill>
+            <a:endParaRPr b="0" lang="en-US" sz="3600" strike="noStrike" u="none">
+              <a:solidFill>
+                <a:srgbClr val="000000"/>
+              </a:solidFill>
+              <a:uFillTx/>
               <a:latin typeface="Arial"/>
             </a:endParaRPr>
           </a:p>
@@ -7301,39 +7550,43 @@
               </a:lnSpc>
             </a:pPr>
             <a:r>
-              <a:rPr b="0" lang="en-US" sz="3600" spc="-1" strike="noStrike">
+              <a:rPr b="0" lang="en-US" sz="3600" strike="noStrike" u="none">
                 <a:solidFill>
                   <a:schemeClr val="dk1"/>
                 </a:solidFill>
+                <a:uFillTx/>
                 <a:latin typeface="Open Sans"/>
                 <a:ea typeface="Open Sans"/>
               </a:rPr>
               <a:t>Quantum architecture, encoding and qubit mapping can all fall under the umbrella of </a:t>
             </a:r>
             <a:r>
-              <a:rPr b="0" i="1" lang="en-US" sz="3600" spc="-1" strike="noStrike">
+              <a:rPr b="0" i="1" lang="en-US" sz="3600" strike="noStrike" u="none">
                 <a:solidFill>
                   <a:schemeClr val="dk1"/>
                 </a:solidFill>
+                <a:uFillTx/>
                 <a:latin typeface="Open Sans"/>
                 <a:ea typeface="Open Sans"/>
               </a:rPr>
               <a:t>quantum circuit compilation</a:t>
             </a:r>
             <a:r>
-              <a:rPr b="0" lang="en-US" sz="3600" spc="-1" strike="noStrike">
+              <a:rPr b="0" lang="en-US" sz="3600" strike="noStrike" u="none">
                 <a:solidFill>
                   <a:schemeClr val="dk1"/>
                 </a:solidFill>
+                <a:uFillTx/>
                 <a:latin typeface="Open Sans"/>
                 <a:ea typeface="Open Sans"/>
               </a:rPr>
               <a:t>.</a:t>
             </a:r>
-            <a:endParaRPr b="0" lang="en-US" sz="3600" spc="-1" strike="noStrike">
-              <a:solidFill>
-                <a:srgbClr val="000000"/>
-              </a:solidFill>
+            <a:endParaRPr b="0" lang="en-US" sz="3600" strike="noStrike" u="none">
+              <a:solidFill>
+                <a:srgbClr val="000000"/>
+              </a:solidFill>
+              <a:uFillTx/>
               <a:latin typeface="Arial"/>
             </a:endParaRPr>
           </a:p>
@@ -7348,7 +7601,7 @@
         <p:spPr>
           <a:xfrm>
             <a:off x="22368960" y="6666480"/>
-            <a:ext cx="10127520" cy="23223240"/>
+            <a:ext cx="10127160" cy="23826600"/>
           </a:xfrm>
           <a:prstGeom prst="rect">
             <a:avLst/>
@@ -7381,19 +7634,21 @@
               </a:spcAft>
             </a:pPr>
             <a:r>
-              <a:rPr b="0" lang="en-US" sz="3600" spc="-1" strike="noStrike">
+              <a:rPr b="0" lang="en-US" sz="3600" strike="noStrike" u="none">
                 <a:solidFill>
                   <a:schemeClr val="dk1"/>
                 </a:solidFill>
+                <a:uFillTx/>
                 <a:latin typeface="Open Sans"/>
                 <a:ea typeface="Open Sans"/>
               </a:rPr>
               <a:t>NVIDIAs quantum SDK, CUDA-Q enables:</a:t>
             </a:r>
-            <a:endParaRPr b="0" lang="en-US" sz="3600" spc="-1" strike="noStrike">
-              <a:solidFill>
-                <a:srgbClr val="000000"/>
-              </a:solidFill>
+            <a:endParaRPr b="0" lang="en-US" sz="3600" strike="noStrike" u="none">
+              <a:solidFill>
+                <a:srgbClr val="000000"/>
+              </a:solidFill>
+              <a:uFillTx/>
               <a:latin typeface="Arial"/>
             </a:endParaRPr>
           </a:p>
@@ -7416,19 +7671,21 @@
               <a:buChar char=""/>
             </a:pPr>
             <a:r>
-              <a:rPr b="0" lang="en-US" sz="3600" spc="-1" strike="noStrike">
+              <a:rPr b="0" lang="en-US" sz="3600" strike="noStrike" u="none">
                 <a:solidFill>
                   <a:schemeClr val="dk1"/>
                 </a:solidFill>
+                <a:uFillTx/>
                 <a:latin typeface="Open Sans"/>
                 <a:ea typeface="Open Sans"/>
               </a:rPr>
               <a:t>Parallelization</a:t>
             </a:r>
-            <a:endParaRPr b="0" lang="en-US" sz="3600" spc="-1" strike="noStrike">
-              <a:solidFill>
-                <a:srgbClr val="000000"/>
-              </a:solidFill>
+            <a:endParaRPr b="0" lang="en-US" sz="3600" strike="noStrike" u="none">
+              <a:solidFill>
+                <a:srgbClr val="000000"/>
+              </a:solidFill>
+              <a:uFillTx/>
               <a:latin typeface="Arial"/>
             </a:endParaRPr>
           </a:p>
@@ -7451,19 +7708,21 @@
               <a:buChar char=""/>
             </a:pPr>
             <a:r>
-              <a:rPr b="0" lang="en-US" sz="3600" spc="-1" strike="noStrike">
+              <a:rPr b="0" lang="en-US" sz="3600" strike="noStrike" u="none">
                 <a:solidFill>
                   <a:schemeClr val="dk1"/>
                 </a:solidFill>
+                <a:uFillTx/>
                 <a:latin typeface="Open Sans"/>
                 <a:ea typeface="Open Sans"/>
               </a:rPr>
               <a:t>Hamiltonian Simulation</a:t>
             </a:r>
-            <a:endParaRPr b="0" lang="en-US" sz="3600" spc="-1" strike="noStrike">
-              <a:solidFill>
-                <a:srgbClr val="000000"/>
-              </a:solidFill>
+            <a:endParaRPr b="0" lang="en-US" sz="3600" strike="noStrike" u="none">
+              <a:solidFill>
+                <a:srgbClr val="000000"/>
+              </a:solidFill>
+              <a:uFillTx/>
               <a:latin typeface="Arial"/>
             </a:endParaRPr>
           </a:p>
@@ -7486,19 +7745,21 @@
               <a:buChar char=""/>
             </a:pPr>
             <a:r>
-              <a:rPr b="0" lang="en-US" sz="3600" spc="-1" strike="noStrike">
+              <a:rPr b="0" lang="en-US" sz="3600" strike="noStrike" u="none">
                 <a:solidFill>
                   <a:schemeClr val="dk1"/>
                 </a:solidFill>
+                <a:uFillTx/>
                 <a:latin typeface="Open Sans"/>
                 <a:ea typeface="Open Sans"/>
               </a:rPr>
               <a:t>Multi-GPU acceleration</a:t>
             </a:r>
-            <a:endParaRPr b="0" lang="en-US" sz="3600" spc="-1" strike="noStrike">
-              <a:solidFill>
-                <a:srgbClr val="000000"/>
-              </a:solidFill>
+            <a:endParaRPr b="0" lang="en-US" sz="3600" strike="noStrike" u="none">
+              <a:solidFill>
+                <a:srgbClr val="000000"/>
+              </a:solidFill>
+              <a:uFillTx/>
               <a:latin typeface="Arial"/>
             </a:endParaRPr>
           </a:p>
@@ -7514,10 +7775,11 @@
                 <a:spcPts val="283"/>
               </a:spcAft>
             </a:pPr>
-            <a:endParaRPr b="0" lang="en-US" sz="3600" spc="-1" strike="noStrike">
-              <a:solidFill>
-                <a:srgbClr val="000000"/>
-              </a:solidFill>
+            <a:endParaRPr b="0" lang="en-US" sz="3600" strike="noStrike" u="none">
+              <a:solidFill>
+                <a:srgbClr val="000000"/>
+              </a:solidFill>
+              <a:uFillTx/>
               <a:latin typeface="Arial"/>
             </a:endParaRPr>
           </a:p>
@@ -7533,10 +7795,11 @@
                 <a:spcPts val="283"/>
               </a:spcAft>
             </a:pPr>
-            <a:endParaRPr b="0" lang="en-US" sz="3600" spc="-1" strike="noStrike">
-              <a:solidFill>
-                <a:srgbClr val="000000"/>
-              </a:solidFill>
+            <a:endParaRPr b="0" lang="en-US" sz="3600" strike="noStrike" u="none">
+              <a:solidFill>
+                <a:srgbClr val="000000"/>
+              </a:solidFill>
+              <a:uFillTx/>
               <a:latin typeface="Arial"/>
             </a:endParaRPr>
           </a:p>
@@ -7552,10 +7815,11 @@
                 <a:spcPts val="283"/>
               </a:spcAft>
             </a:pPr>
-            <a:endParaRPr b="0" lang="en-US" sz="3600" spc="-1" strike="noStrike">
-              <a:solidFill>
-                <a:srgbClr val="000000"/>
-              </a:solidFill>
+            <a:endParaRPr b="0" lang="en-US" sz="3600" strike="noStrike" u="none">
+              <a:solidFill>
+                <a:srgbClr val="000000"/>
+              </a:solidFill>
+              <a:uFillTx/>
               <a:latin typeface="Arial"/>
             </a:endParaRPr>
           </a:p>
@@ -7571,10 +7835,11 @@
                 <a:spcPts val="283"/>
               </a:spcAft>
             </a:pPr>
-            <a:endParaRPr b="0" lang="en-US" sz="3600" spc="-1" strike="noStrike">
-              <a:solidFill>
-                <a:srgbClr val="000000"/>
-              </a:solidFill>
+            <a:endParaRPr b="0" lang="en-US" sz="3600" strike="noStrike" u="none">
+              <a:solidFill>
+                <a:srgbClr val="000000"/>
+              </a:solidFill>
+              <a:uFillTx/>
               <a:latin typeface="Arial"/>
             </a:endParaRPr>
           </a:p>
@@ -7590,10 +7855,11 @@
                 <a:spcPts val="283"/>
               </a:spcAft>
             </a:pPr>
-            <a:endParaRPr b="0" lang="en-US" sz="3600" spc="-1" strike="noStrike">
-              <a:solidFill>
-                <a:srgbClr val="000000"/>
-              </a:solidFill>
+            <a:endParaRPr b="0" lang="en-US" sz="3600" strike="noStrike" u="none">
+              <a:solidFill>
+                <a:srgbClr val="000000"/>
+              </a:solidFill>
+              <a:uFillTx/>
               <a:latin typeface="Arial"/>
             </a:endParaRPr>
           </a:p>
@@ -7609,10 +7875,11 @@
                 <a:spcPts val="283"/>
               </a:spcAft>
             </a:pPr>
-            <a:endParaRPr b="0" lang="en-US" sz="3600" spc="-1" strike="noStrike">
-              <a:solidFill>
-                <a:srgbClr val="000000"/>
-              </a:solidFill>
+            <a:endParaRPr b="0" lang="en-US" sz="3600" strike="noStrike" u="none">
+              <a:solidFill>
+                <a:srgbClr val="000000"/>
+              </a:solidFill>
+              <a:uFillTx/>
               <a:latin typeface="Arial"/>
             </a:endParaRPr>
           </a:p>
@@ -7628,10 +7895,11 @@
                 <a:spcPts val="283"/>
               </a:spcAft>
             </a:pPr>
-            <a:endParaRPr b="0" lang="en-US" sz="3600" spc="-1" strike="noStrike">
-              <a:solidFill>
-                <a:srgbClr val="000000"/>
-              </a:solidFill>
+            <a:endParaRPr b="0" lang="en-US" sz="3600" strike="noStrike" u="none">
+              <a:solidFill>
+                <a:srgbClr val="000000"/>
+              </a:solidFill>
+              <a:uFillTx/>
               <a:latin typeface="Arial"/>
             </a:endParaRPr>
           </a:p>
@@ -7648,19 +7916,21 @@
               </a:spcAft>
             </a:pPr>
             <a:r>
-              <a:rPr b="0" lang="en-US" sz="3600" spc="-1" strike="noStrike">
+              <a:rPr b="0" lang="en-US" sz="3600" strike="noStrike" u="none">
                 <a:solidFill>
                   <a:schemeClr val="dk1"/>
                 </a:solidFill>
+                <a:uFillTx/>
                 <a:latin typeface="Open Sans"/>
                 <a:ea typeface="Open Sans"/>
               </a:rPr>
               <a:t>CUDA-Q wraps NVIDIAs backend development kits, targeting high performance applications:</a:t>
             </a:r>
-            <a:endParaRPr b="0" lang="en-US" sz="3600" spc="-1" strike="noStrike">
-              <a:solidFill>
-                <a:srgbClr val="000000"/>
-              </a:solidFill>
+            <a:endParaRPr b="0" lang="en-US" sz="3600" strike="noStrike" u="none">
+              <a:solidFill>
+                <a:srgbClr val="000000"/>
+              </a:solidFill>
+              <a:uFillTx/>
               <a:latin typeface="Arial"/>
             </a:endParaRPr>
           </a:p>
@@ -7683,19 +7953,21 @@
               <a:buChar char=""/>
             </a:pPr>
             <a:r>
-              <a:rPr b="0" lang="en-US" sz="3600" spc="-1" strike="noStrike">
+              <a:rPr b="0" lang="en-US" sz="3600" strike="noStrike" u="none">
                 <a:solidFill>
                   <a:schemeClr val="dk1"/>
                 </a:solidFill>
+                <a:uFillTx/>
                 <a:latin typeface="Open Sans"/>
                 <a:ea typeface="Open Sans"/>
               </a:rPr>
               <a:t>cuQuantum: Library that accelerates quantum simulations on a circuit &amp; device-level.</a:t>
             </a:r>
-            <a:endParaRPr b="0" lang="en-US" sz="3600" spc="-1" strike="noStrike">
-              <a:solidFill>
-                <a:srgbClr val="000000"/>
-              </a:solidFill>
+            <a:endParaRPr b="0" lang="en-US" sz="3600" strike="noStrike" u="none">
+              <a:solidFill>
+                <a:srgbClr val="000000"/>
+              </a:solidFill>
+              <a:uFillTx/>
               <a:latin typeface="Arial"/>
             </a:endParaRPr>
           </a:p>
@@ -7718,19 +7990,21 @@
               <a:buChar char=""/>
             </a:pPr>
             <a:r>
-              <a:rPr b="0" lang="en-US" sz="3600" spc="-1" strike="noStrike">
+              <a:rPr b="0" lang="en-US" sz="3600" strike="noStrike" u="none">
                 <a:solidFill>
                   <a:schemeClr val="dk1"/>
                 </a:solidFill>
+                <a:uFillTx/>
                 <a:latin typeface="Open Sans"/>
                 <a:ea typeface="Open Sans"/>
               </a:rPr>
               <a:t>CUDA:  GPU development SDK </a:t>
             </a:r>
-            <a:endParaRPr b="0" lang="en-US" sz="3600" spc="-1" strike="noStrike">
-              <a:solidFill>
-                <a:srgbClr val="000000"/>
-              </a:solidFill>
+            <a:endParaRPr b="0" lang="en-US" sz="3600" strike="noStrike" u="none">
+              <a:solidFill>
+                <a:srgbClr val="000000"/>
+              </a:solidFill>
+              <a:uFillTx/>
               <a:latin typeface="Arial"/>
             </a:endParaRPr>
           </a:p>
@@ -7746,10 +8020,11 @@
                 <a:spcPts val="283"/>
               </a:spcAft>
             </a:pPr>
-            <a:endParaRPr b="0" lang="en-US" sz="3600" spc="-1" strike="noStrike">
-              <a:solidFill>
-                <a:srgbClr val="000000"/>
-              </a:solidFill>
+            <a:endParaRPr b="0" lang="en-US" sz="3600" strike="noStrike" u="none">
+              <a:solidFill>
+                <a:srgbClr val="000000"/>
+              </a:solidFill>
+              <a:uFillTx/>
               <a:latin typeface="Arial"/>
             </a:endParaRPr>
           </a:p>
@@ -7765,10 +8040,11 @@
                 <a:spcPts val="283"/>
               </a:spcAft>
             </a:pPr>
-            <a:endParaRPr b="0" lang="en-US" sz="3600" spc="-1" strike="noStrike">
-              <a:solidFill>
-                <a:srgbClr val="000000"/>
-              </a:solidFill>
+            <a:endParaRPr b="0" lang="en-US" sz="3600" strike="noStrike" u="none">
+              <a:solidFill>
+                <a:srgbClr val="000000"/>
+              </a:solidFill>
+              <a:uFillTx/>
               <a:latin typeface="Arial"/>
             </a:endParaRPr>
           </a:p>
@@ -7785,19 +8061,21 @@
               </a:spcAft>
             </a:pPr>
             <a:r>
-              <a:rPr b="0" lang="en-US" sz="3600" spc="-1" strike="noStrike">
+              <a:rPr b="0" lang="en-US" sz="3600" strike="noStrike" u="none">
                 <a:solidFill>
                   <a:schemeClr val="dk1"/>
                 </a:solidFill>
+                <a:uFillTx/>
                 <a:latin typeface="Open Sans"/>
                 <a:ea typeface="Open Sans"/>
               </a:rPr>
               <a:t>Ideal for hybrid quantum-classical processing and HPC applications.</a:t>
             </a:r>
-            <a:endParaRPr b="0" lang="en-US" sz="3600" spc="-1" strike="noStrike">
-              <a:solidFill>
-                <a:srgbClr val="000000"/>
-              </a:solidFill>
+            <a:endParaRPr b="0" lang="en-US" sz="3600" strike="noStrike" u="none">
+              <a:solidFill>
+                <a:srgbClr val="000000"/>
+              </a:solidFill>
+              <a:uFillTx/>
               <a:latin typeface="Arial"/>
             </a:endParaRPr>
           </a:p>
@@ -7813,10 +8091,11 @@
                 <a:spcPts val="283"/>
               </a:spcAft>
             </a:pPr>
-            <a:endParaRPr b="0" lang="en-US" sz="3600" spc="-1" strike="noStrike">
-              <a:solidFill>
-                <a:srgbClr val="000000"/>
-              </a:solidFill>
+            <a:endParaRPr b="0" lang="en-US" sz="3600" strike="noStrike" u="none">
+              <a:solidFill>
+                <a:srgbClr val="000000"/>
+              </a:solidFill>
+              <a:uFillTx/>
               <a:latin typeface="Arial"/>
             </a:endParaRPr>
           </a:p>
@@ -7832,10 +8111,11 @@
                 <a:spcPts val="283"/>
               </a:spcAft>
             </a:pPr>
-            <a:endParaRPr b="0" lang="en-US" sz="3600" spc="-1" strike="noStrike">
-              <a:solidFill>
-                <a:srgbClr val="000000"/>
-              </a:solidFill>
+            <a:endParaRPr b="0" lang="en-US" sz="3600" strike="noStrike" u="none">
+              <a:solidFill>
+                <a:srgbClr val="000000"/>
+              </a:solidFill>
+              <a:uFillTx/>
               <a:latin typeface="Arial"/>
             </a:endParaRPr>
           </a:p>
@@ -7851,10 +8131,11 @@
                 <a:spcPts val="283"/>
               </a:spcAft>
             </a:pPr>
-            <a:endParaRPr b="0" lang="en-US" sz="3600" spc="-1" strike="noStrike">
-              <a:solidFill>
-                <a:srgbClr val="000000"/>
-              </a:solidFill>
+            <a:endParaRPr b="0" lang="en-US" sz="3600" strike="noStrike" u="none">
+              <a:solidFill>
+                <a:srgbClr val="000000"/>
+              </a:solidFill>
+              <a:uFillTx/>
               <a:latin typeface="Arial"/>
             </a:endParaRPr>
           </a:p>
@@ -7870,10 +8151,11 @@
                 <a:spcPts val="283"/>
               </a:spcAft>
             </a:pPr>
-            <a:endParaRPr b="0" lang="en-US" sz="3600" spc="-1" strike="noStrike">
-              <a:solidFill>
-                <a:srgbClr val="000000"/>
-              </a:solidFill>
+            <a:endParaRPr b="0" lang="en-US" sz="3600" strike="noStrike" u="none">
+              <a:solidFill>
+                <a:srgbClr val="000000"/>
+              </a:solidFill>
+              <a:uFillTx/>
               <a:latin typeface="Arial"/>
             </a:endParaRPr>
           </a:p>
@@ -7889,10 +8171,11 @@
                 <a:spcPts val="283"/>
               </a:spcAft>
             </a:pPr>
-            <a:endParaRPr b="0" lang="en-US" sz="3600" spc="-1" strike="noStrike">
-              <a:solidFill>
-                <a:srgbClr val="000000"/>
-              </a:solidFill>
+            <a:endParaRPr b="0" lang="en-US" sz="3600" strike="noStrike" u="none">
+              <a:solidFill>
+                <a:srgbClr val="000000"/>
+              </a:solidFill>
+              <a:uFillTx/>
               <a:latin typeface="Arial"/>
             </a:endParaRPr>
           </a:p>
@@ -7908,10 +8191,11 @@
                 <a:spcPts val="283"/>
               </a:spcAft>
             </a:pPr>
-            <a:endParaRPr b="0" lang="en-US" sz="3600" spc="-1" strike="noStrike">
-              <a:solidFill>
-                <a:srgbClr val="000000"/>
-              </a:solidFill>
+            <a:endParaRPr b="0" lang="en-US" sz="3600" strike="noStrike" u="none">
+              <a:solidFill>
+                <a:srgbClr val="000000"/>
+              </a:solidFill>
+              <a:uFillTx/>
               <a:latin typeface="Arial"/>
             </a:endParaRPr>
           </a:p>
@@ -7927,10 +8211,11 @@
                 <a:spcPts val="283"/>
               </a:spcAft>
             </a:pPr>
-            <a:endParaRPr b="0" lang="en-US" sz="3600" spc="-1" strike="noStrike">
-              <a:solidFill>
-                <a:srgbClr val="000000"/>
-              </a:solidFill>
+            <a:endParaRPr b="0" lang="en-US" sz="3600" strike="noStrike" u="none">
+              <a:solidFill>
+                <a:srgbClr val="000000"/>
+              </a:solidFill>
+              <a:uFillTx/>
               <a:latin typeface="Arial"/>
             </a:endParaRPr>
           </a:p>
@@ -7946,10 +8231,11 @@
                 <a:spcPts val="283"/>
               </a:spcAft>
             </a:pPr>
-            <a:endParaRPr b="0" lang="en-US" sz="3600" spc="-1" strike="noStrike">
-              <a:solidFill>
-                <a:srgbClr val="000000"/>
-              </a:solidFill>
+            <a:endParaRPr b="0" lang="en-US" sz="3600" strike="noStrike" u="none">
+              <a:solidFill>
+                <a:srgbClr val="000000"/>
+              </a:solidFill>
+              <a:uFillTx/>
               <a:latin typeface="Arial"/>
             </a:endParaRPr>
           </a:p>
@@ -7965,10 +8251,11 @@
                 <a:spcPts val="283"/>
               </a:spcAft>
             </a:pPr>
-            <a:endParaRPr b="0" lang="en-US" sz="3600" spc="-1" strike="noStrike">
-              <a:solidFill>
-                <a:srgbClr val="000000"/>
-              </a:solidFill>
+            <a:endParaRPr b="0" lang="en-US" sz="3600" strike="noStrike" u="none">
+              <a:solidFill>
+                <a:srgbClr val="000000"/>
+              </a:solidFill>
+              <a:uFillTx/>
               <a:latin typeface="Arial"/>
             </a:endParaRPr>
           </a:p>
@@ -7984,10 +8271,11 @@
                 <a:spcPts val="283"/>
               </a:spcAft>
             </a:pPr>
-            <a:endParaRPr b="0" lang="en-US" sz="3600" spc="-1" strike="noStrike">
-              <a:solidFill>
-                <a:srgbClr val="000000"/>
-              </a:solidFill>
+            <a:endParaRPr b="0" lang="en-US" sz="3600" strike="noStrike" u="none">
+              <a:solidFill>
+                <a:srgbClr val="000000"/>
+              </a:solidFill>
+              <a:uFillTx/>
               <a:latin typeface="Arial"/>
             </a:endParaRPr>
           </a:p>
@@ -8003,10 +8291,11 @@
                 <a:spcPts val="283"/>
               </a:spcAft>
             </a:pPr>
-            <a:endParaRPr b="0" lang="en-US" sz="3600" spc="-1" strike="noStrike">
-              <a:solidFill>
-                <a:srgbClr val="000000"/>
-              </a:solidFill>
+            <a:endParaRPr b="0" lang="en-US" sz="3600" strike="noStrike" u="none">
+              <a:solidFill>
+                <a:srgbClr val="000000"/>
+              </a:solidFill>
+              <a:uFillTx/>
               <a:latin typeface="Arial"/>
             </a:endParaRPr>
           </a:p>
@@ -8023,19 +8312,21 @@
               </a:spcAft>
             </a:pPr>
             <a:r>
-              <a:rPr b="0" lang="en-US" sz="3600" spc="-1" strike="noStrike">
+              <a:rPr b="0" lang="en-US" sz="3600" strike="noStrike" u="none">
                 <a:solidFill>
                   <a:schemeClr val="dk1"/>
                 </a:solidFill>
+                <a:uFillTx/>
                 <a:latin typeface="Open Sans"/>
                 <a:ea typeface="Open Sans"/>
               </a:rPr>
               <a:t>Placing CUDA-Q at the center of this framework indicates the full utilization of hardware acceleration at every step.</a:t>
             </a:r>
-            <a:endParaRPr b="0" lang="en-US" sz="3600" spc="-1" strike="noStrike">
-              <a:solidFill>
-                <a:srgbClr val="000000"/>
-              </a:solidFill>
+            <a:endParaRPr b="0" lang="en-US" sz="3600" strike="noStrike" u="none">
+              <a:solidFill>
+                <a:srgbClr val="000000"/>
+              </a:solidFill>
+              <a:uFillTx/>
               <a:latin typeface="Arial"/>
             </a:endParaRPr>
           </a:p>
@@ -8050,7 +8341,7 @@
         <p:spPr>
           <a:xfrm>
             <a:off x="33256440" y="6746760"/>
-            <a:ext cx="9596520" cy="9570600"/>
+            <a:ext cx="9596160" cy="9570600"/>
           </a:xfrm>
           <a:prstGeom prst="rect">
             <a:avLst/>
@@ -8083,19 +8374,21 @@
               </a:tabLst>
             </a:pPr>
             <a:r>
-              <a:rPr b="0" lang="en-US" sz="3600" spc="-1" strike="noStrike">
+              <a:rPr b="0" lang="en-US" sz="3600" strike="noStrike" u="none">
                 <a:solidFill>
                   <a:schemeClr val="dk1"/>
                 </a:solidFill>
+                <a:uFillTx/>
                 <a:latin typeface="Open Sans"/>
                 <a:ea typeface="Open Sans"/>
               </a:rPr>
               <a:t>Quantum circuit generation with diffusion models resembles image generation.</a:t>
             </a:r>
-            <a:endParaRPr b="0" lang="en-US" sz="3600" spc="-1" strike="noStrike">
-              <a:solidFill>
-                <a:srgbClr val="000000"/>
-              </a:solidFill>
+            <a:endParaRPr b="0" lang="en-US" sz="3600" strike="noStrike" u="none">
+              <a:solidFill>
+                <a:srgbClr val="000000"/>
+              </a:solidFill>
+              <a:uFillTx/>
               <a:latin typeface="Arial"/>
             </a:endParaRPr>
           </a:p>
@@ -8111,10 +8404,11 @@
                 <a:tab algn="l" pos="0"/>
               </a:tabLst>
             </a:pPr>
-            <a:endParaRPr b="0" lang="en-US" sz="3600" spc="-1" strike="noStrike">
-              <a:solidFill>
-                <a:srgbClr val="000000"/>
-              </a:solidFill>
+            <a:endParaRPr b="0" lang="en-US" sz="3600" strike="noStrike" u="none">
+              <a:solidFill>
+                <a:srgbClr val="000000"/>
+              </a:solidFill>
+              <a:uFillTx/>
               <a:latin typeface="Arial"/>
             </a:endParaRPr>
           </a:p>
@@ -8130,10 +8424,11 @@
                 <a:tab algn="l" pos="0"/>
               </a:tabLst>
             </a:pPr>
-            <a:endParaRPr b="0" lang="en-US" sz="3600" spc="-1" strike="noStrike">
-              <a:solidFill>
-                <a:srgbClr val="000000"/>
-              </a:solidFill>
+            <a:endParaRPr b="0" lang="en-US" sz="3600" strike="noStrike" u="none">
+              <a:solidFill>
+                <a:srgbClr val="000000"/>
+              </a:solidFill>
+              <a:uFillTx/>
               <a:latin typeface="Arial"/>
             </a:endParaRPr>
           </a:p>
@@ -8149,10 +8444,11 @@
                 <a:tab algn="l" pos="0"/>
               </a:tabLst>
             </a:pPr>
-            <a:endParaRPr b="0" lang="en-US" sz="3600" spc="-1" strike="noStrike">
-              <a:solidFill>
-                <a:srgbClr val="000000"/>
-              </a:solidFill>
+            <a:endParaRPr b="0" lang="en-US" sz="3600" strike="noStrike" u="none">
+              <a:solidFill>
+                <a:srgbClr val="000000"/>
+              </a:solidFill>
+              <a:uFillTx/>
               <a:latin typeface="Arial"/>
             </a:endParaRPr>
           </a:p>
@@ -8168,10 +8464,11 @@
                 <a:tab algn="l" pos="0"/>
               </a:tabLst>
             </a:pPr>
-            <a:endParaRPr b="0" lang="en-US" sz="3600" spc="-1" strike="noStrike">
-              <a:solidFill>
-                <a:srgbClr val="000000"/>
-              </a:solidFill>
+            <a:endParaRPr b="0" lang="en-US" sz="3600" strike="noStrike" u="none">
+              <a:solidFill>
+                <a:srgbClr val="000000"/>
+              </a:solidFill>
+              <a:uFillTx/>
               <a:latin typeface="Arial"/>
             </a:endParaRPr>
           </a:p>
@@ -8187,10 +8484,11 @@
                 <a:tab algn="l" pos="0"/>
               </a:tabLst>
             </a:pPr>
-            <a:endParaRPr b="0" lang="en-US" sz="3600" spc="-1" strike="noStrike">
-              <a:solidFill>
-                <a:srgbClr val="000000"/>
-              </a:solidFill>
+            <a:endParaRPr b="0" lang="en-US" sz="3600" strike="noStrike" u="none">
+              <a:solidFill>
+                <a:srgbClr val="000000"/>
+              </a:solidFill>
+              <a:uFillTx/>
               <a:latin typeface="Arial"/>
             </a:endParaRPr>
           </a:p>
@@ -8206,10 +8504,11 @@
                 <a:tab algn="l" pos="0"/>
               </a:tabLst>
             </a:pPr>
-            <a:endParaRPr b="0" lang="en-US" sz="3600" spc="-1" strike="noStrike">
-              <a:solidFill>
-                <a:srgbClr val="000000"/>
-              </a:solidFill>
+            <a:endParaRPr b="0" lang="en-US" sz="3600" strike="noStrike" u="none">
+              <a:solidFill>
+                <a:srgbClr val="000000"/>
+              </a:solidFill>
+              <a:uFillTx/>
               <a:latin typeface="Arial"/>
             </a:endParaRPr>
           </a:p>
@@ -8225,10 +8524,11 @@
                 <a:tab algn="l" pos="0"/>
               </a:tabLst>
             </a:pPr>
-            <a:endParaRPr b="0" lang="en-US" sz="3600" spc="-1" strike="noStrike">
-              <a:solidFill>
-                <a:srgbClr val="000000"/>
-              </a:solidFill>
+            <a:endParaRPr b="0" lang="en-US" sz="3600" strike="noStrike" u="none">
+              <a:solidFill>
+                <a:srgbClr val="000000"/>
+              </a:solidFill>
+              <a:uFillTx/>
               <a:latin typeface="Arial"/>
             </a:endParaRPr>
           </a:p>
@@ -8244,10 +8544,11 @@
                 <a:tab algn="l" pos="0"/>
               </a:tabLst>
             </a:pPr>
-            <a:endParaRPr b="0" lang="en-US" sz="3600" spc="-1" strike="noStrike">
-              <a:solidFill>
-                <a:srgbClr val="000000"/>
-              </a:solidFill>
+            <a:endParaRPr b="0" lang="en-US" sz="3600" strike="noStrike" u="none">
+              <a:solidFill>
+                <a:srgbClr val="000000"/>
+              </a:solidFill>
+              <a:uFillTx/>
               <a:latin typeface="Arial"/>
             </a:endParaRPr>
           </a:p>
@@ -8263,10 +8564,11 @@
                 <a:tab algn="l" pos="0"/>
               </a:tabLst>
             </a:pPr>
-            <a:endParaRPr b="0" lang="en-US" sz="3600" spc="-1" strike="noStrike">
-              <a:solidFill>
-                <a:srgbClr val="000000"/>
-              </a:solidFill>
+            <a:endParaRPr b="0" lang="en-US" sz="3600" strike="noStrike" u="none">
+              <a:solidFill>
+                <a:srgbClr val="000000"/>
+              </a:solidFill>
+              <a:uFillTx/>
               <a:latin typeface="Arial"/>
             </a:endParaRPr>
           </a:p>
@@ -8283,19 +8585,21 @@
               </a:tabLst>
             </a:pPr>
             <a:r>
-              <a:rPr b="0" lang="en-US" sz="3600" spc="-1" strike="noStrike">
+              <a:rPr b="0" lang="en-US" sz="3600" strike="noStrike" u="none">
                 <a:solidFill>
                   <a:schemeClr val="dk1"/>
                 </a:solidFill>
+                <a:uFillTx/>
                 <a:latin typeface="Open Sans"/>
                 <a:ea typeface="Open Sans"/>
               </a:rPr>
               <a:t>We imagine quantum circuits as a flexible representation - enabling us to consider them as images, or a language.</a:t>
             </a:r>
-            <a:endParaRPr b="0" lang="en-US" sz="3600" spc="-1" strike="noStrike">
-              <a:solidFill>
-                <a:srgbClr val="000000"/>
-              </a:solidFill>
+            <a:endParaRPr b="0" lang="en-US" sz="3600" strike="noStrike" u="none">
+              <a:solidFill>
+                <a:srgbClr val="000000"/>
+              </a:solidFill>
+              <a:uFillTx/>
               <a:latin typeface="Arial"/>
             </a:endParaRPr>
           </a:p>
@@ -8310,7 +8614,7 @@
         <p:spPr>
           <a:xfrm>
             <a:off x="0" y="31318200"/>
-            <a:ext cx="43886520" cy="1595520"/>
+            <a:ext cx="43886160" cy="1595160"/>
           </a:xfrm>
           <a:prstGeom prst="rect">
             <a:avLst/>
@@ -8338,10 +8642,11 @@
                 <a:spcPct val="100000"/>
               </a:lnSpc>
             </a:pPr>
-            <a:endParaRPr b="1" lang="en-US" sz="5400" spc="-1" strike="noStrike">
+            <a:endParaRPr b="1" lang="en-US" sz="5400" strike="noStrike" u="none">
               <a:solidFill>
                 <a:schemeClr val="dk2"/>
               </a:solidFill>
+              <a:uFillTx/>
               <a:latin typeface="Gill Sans"/>
               <a:ea typeface="Arial"/>
             </a:endParaRPr>
@@ -8357,7 +8662,7 @@
         <p:spPr>
           <a:xfrm>
             <a:off x="579960" y="5558400"/>
-            <a:ext cx="10130760" cy="839160"/>
+            <a:ext cx="10130400" cy="838800"/>
           </a:xfrm>
           <a:prstGeom prst="rect">
             <a:avLst/>
@@ -8388,19 +8693,21 @@
               </a:lnSpc>
             </a:pPr>
             <a:r>
-              <a:rPr b="0" lang="en-US" sz="4800" spc="-1" strike="noStrike">
+              <a:rPr b="0" lang="en-US" sz="4800" strike="noStrike" u="none">
                 <a:solidFill>
                   <a:srgbClr val="ffffff"/>
                 </a:solidFill>
+                <a:uFillTx/>
                 <a:latin typeface="Bree Serif"/>
                 <a:ea typeface="Arial"/>
               </a:rPr>
               <a:t>Abstract</a:t>
             </a:r>
-            <a:endParaRPr b="0" lang="en-US" sz="4800" spc="-1" strike="noStrike">
+            <a:endParaRPr b="0" lang="en-US" sz="4800" strike="noStrike" u="none">
               <a:solidFill>
                 <a:srgbClr val="ffffff"/>
               </a:solidFill>
+              <a:uFillTx/>
               <a:latin typeface="Arial"/>
             </a:endParaRPr>
           </a:p>
@@ -8415,7 +8722,7 @@
         <p:spPr>
           <a:xfrm>
             <a:off x="11230920" y="5558400"/>
-            <a:ext cx="10482840" cy="839160"/>
+            <a:ext cx="10482480" cy="838800"/>
           </a:xfrm>
           <a:prstGeom prst="rect">
             <a:avLst/>
@@ -8446,19 +8753,21 @@
               </a:lnSpc>
             </a:pPr>
             <a:r>
-              <a:rPr b="0" lang="en-US" sz="4600" spc="-1" strike="noStrike">
+              <a:rPr b="0" lang="en-US" sz="4600" strike="noStrike" u="none">
                 <a:solidFill>
                   <a:srgbClr val="ffffff"/>
                 </a:solidFill>
+                <a:uFillTx/>
                 <a:latin typeface="Bree Serif"/>
                 <a:ea typeface="Arial"/>
               </a:rPr>
               <a:t>Quantum Architecture</a:t>
             </a:r>
-            <a:endParaRPr b="0" lang="en-US" sz="4600" spc="-1" strike="noStrike">
+            <a:endParaRPr b="0" lang="en-US" sz="4600" strike="noStrike" u="none">
               <a:solidFill>
                 <a:srgbClr val="ffffff"/>
               </a:solidFill>
+              <a:uFillTx/>
               <a:latin typeface="Arial"/>
             </a:endParaRPr>
           </a:p>
@@ -8473,7 +8782,7 @@
         <p:spPr>
           <a:xfrm>
             <a:off x="33147000" y="5571000"/>
-            <a:ext cx="10125000" cy="839160"/>
+            <a:ext cx="10124640" cy="838800"/>
           </a:xfrm>
           <a:prstGeom prst="rect">
             <a:avLst/>
@@ -8504,19 +8813,21 @@
               </a:lnSpc>
             </a:pPr>
             <a:r>
-              <a:rPr b="0" lang="en-US" sz="4800" spc="-1" strike="noStrike">
+              <a:rPr b="0" lang="en-US" sz="4800" strike="noStrike" u="none">
                 <a:solidFill>
                   <a:srgbClr val="ffffff"/>
                 </a:solidFill>
+                <a:uFillTx/>
                 <a:latin typeface="Bree Serif"/>
                 <a:ea typeface="Arial"/>
               </a:rPr>
               <a:t>Large-Language Models</a:t>
             </a:r>
-            <a:endParaRPr b="0" lang="en-US" sz="4800" spc="-1" strike="noStrike">
+            <a:endParaRPr b="0" lang="en-US" sz="4800" strike="noStrike" u="none">
               <a:solidFill>
                 <a:srgbClr val="ffffff"/>
               </a:solidFill>
+              <a:uFillTx/>
               <a:latin typeface="Arial"/>
             </a:endParaRPr>
           </a:p>
@@ -8531,7 +8842,7 @@
         <p:spPr>
           <a:xfrm>
             <a:off x="22177440" y="5558400"/>
-            <a:ext cx="10514880" cy="839160"/>
+            <a:ext cx="10514520" cy="838800"/>
           </a:xfrm>
           <a:prstGeom prst="rect">
             <a:avLst/>
@@ -8562,19 +8873,21 @@
               </a:lnSpc>
             </a:pPr>
             <a:r>
-              <a:rPr b="0" lang="en-US" sz="4800" spc="-1" strike="noStrike">
+              <a:rPr b="0" lang="en-US" sz="4800" strike="noStrike" u="none">
                 <a:solidFill>
                   <a:srgbClr val="ffffff"/>
                 </a:solidFill>
+                <a:uFillTx/>
                 <a:latin typeface="Bree Serif"/>
                 <a:ea typeface="Arial"/>
               </a:rPr>
               <a:t>CUDA-Q</a:t>
             </a:r>
-            <a:endParaRPr b="0" lang="en-US" sz="4800" spc="-1" strike="noStrike">
+            <a:endParaRPr b="0" lang="en-US" sz="4800" strike="noStrike" u="none">
               <a:solidFill>
                 <a:srgbClr val="ffffff"/>
               </a:solidFill>
+              <a:uFillTx/>
               <a:latin typeface="Arial"/>
             </a:endParaRPr>
           </a:p>
@@ -8589,7 +8902,7 @@
         <p:spPr>
           <a:xfrm>
             <a:off x="33151320" y="16618320"/>
-            <a:ext cx="10121760" cy="834120"/>
+            <a:ext cx="10121400" cy="833760"/>
           </a:xfrm>
           <a:prstGeom prst="rect">
             <a:avLst/>
@@ -8620,19 +8933,21 @@
               </a:lnSpc>
             </a:pPr>
             <a:r>
-              <a:rPr b="0" lang="en-US" sz="4800" spc="-1" strike="noStrike">
+              <a:rPr b="0" lang="en-US" sz="4800" strike="noStrike" u="none">
                 <a:solidFill>
                   <a:srgbClr val="ffffff"/>
                 </a:solidFill>
+                <a:uFillTx/>
                 <a:latin typeface="Bree Serif"/>
                 <a:ea typeface="Arial"/>
               </a:rPr>
               <a:t>Applications</a:t>
             </a:r>
-            <a:endParaRPr b="0" lang="en-US" sz="4800" spc="-1" strike="noStrike">
+            <a:endParaRPr b="0" lang="en-US" sz="4800" strike="noStrike" u="none">
               <a:solidFill>
                 <a:srgbClr val="ffffff"/>
               </a:solidFill>
+              <a:uFillTx/>
               <a:latin typeface="Arial"/>
             </a:endParaRPr>
           </a:p>
@@ -8647,7 +8962,7 @@
         <p:spPr>
           <a:xfrm>
             <a:off x="577800" y="17242200"/>
-            <a:ext cx="10163160" cy="13618440"/>
+            <a:ext cx="10162800" cy="13618080"/>
           </a:xfrm>
           <a:prstGeom prst="rect">
             <a:avLst/>
@@ -8678,10 +8993,11 @@
                 <a:spcPct val="100000"/>
               </a:lnSpc>
             </a:pPr>
-            <a:endParaRPr b="0" lang="en-US" sz="1800" spc="-1" strike="noStrike">
-              <a:solidFill>
-                <a:srgbClr val="000000"/>
-              </a:solidFill>
+            <a:endParaRPr b="0" lang="en-US" sz="1800" strike="noStrike" u="none">
+              <a:solidFill>
+                <a:srgbClr val="000000"/>
+              </a:solidFill>
+              <a:uFillTx/>
               <a:latin typeface="Arial"/>
             </a:endParaRPr>
           </a:p>
@@ -8691,10 +9007,11 @@
                 <a:spcPct val="100000"/>
               </a:lnSpc>
             </a:pPr>
-            <a:endParaRPr b="0" lang="en-US" sz="1800" spc="-1" strike="noStrike">
-              <a:solidFill>
-                <a:srgbClr val="000000"/>
-              </a:solidFill>
+            <a:endParaRPr b="0" lang="en-US" sz="1800" strike="noStrike" u="none">
+              <a:solidFill>
+                <a:srgbClr val="000000"/>
+              </a:solidFill>
+              <a:uFillTx/>
               <a:latin typeface="Arial"/>
             </a:endParaRPr>
           </a:p>
@@ -8714,19 +9031,21 @@
               <a:buChar char=""/>
             </a:pPr>
             <a:r>
-              <a:rPr b="0" lang="en-US" sz="3600" spc="-1" strike="noStrike">
+              <a:rPr b="0" lang="en-US" sz="3600" strike="noStrike" u="none">
                 <a:solidFill>
                   <a:schemeClr val="dk1"/>
                 </a:solidFill>
+                <a:uFillTx/>
                 <a:latin typeface="Open Sans"/>
                 <a:ea typeface="Open Sans"/>
               </a:rPr>
               <a:t>Quantum Architecture methods such as gate cutting can further improve the fidelity of a quantum circuit and reduce depth.</a:t>
             </a:r>
-            <a:endParaRPr b="0" lang="en-US" sz="3600" spc="-1" strike="noStrike">
-              <a:solidFill>
-                <a:srgbClr val="000000"/>
-              </a:solidFill>
+            <a:endParaRPr b="0" lang="en-US" sz="3600" strike="noStrike" u="none">
+              <a:solidFill>
+                <a:srgbClr val="000000"/>
+              </a:solidFill>
+              <a:uFillTx/>
               <a:latin typeface="Arial"/>
             </a:endParaRPr>
           </a:p>
@@ -8746,19 +9065,21 @@
               <a:buChar char=""/>
             </a:pPr>
             <a:r>
-              <a:rPr b="0" lang="en-US" sz="3600" spc="-1" strike="noStrike">
+              <a:rPr b="0" lang="en-US" sz="3600" strike="noStrike" u="none">
                 <a:solidFill>
                   <a:schemeClr val="dk1"/>
                 </a:solidFill>
+                <a:uFillTx/>
                 <a:latin typeface="Open Sans"/>
                 <a:ea typeface="Open Sans"/>
               </a:rPr>
               <a:t>Quantum circuit generation mitigates the need for high-level algorithm expertise.</a:t>
             </a:r>
-            <a:endParaRPr b="0" lang="en-US" sz="3600" spc="-1" strike="noStrike">
-              <a:solidFill>
-                <a:srgbClr val="000000"/>
-              </a:solidFill>
+            <a:endParaRPr b="0" lang="en-US" sz="3600" strike="noStrike" u="none">
+              <a:solidFill>
+                <a:srgbClr val="000000"/>
+              </a:solidFill>
+              <a:uFillTx/>
               <a:latin typeface="Arial"/>
             </a:endParaRPr>
           </a:p>
@@ -8778,19 +9099,21 @@
               <a:buChar char=""/>
             </a:pPr>
             <a:r>
-              <a:rPr b="0" lang="en-US" sz="3600" spc="-1" strike="noStrike">
+              <a:rPr b="0" lang="en-US" sz="3600" strike="noStrike" u="none">
                 <a:solidFill>
                   <a:schemeClr val="dk1"/>
                 </a:solidFill>
+                <a:uFillTx/>
                 <a:latin typeface="Open Sans"/>
                 <a:ea typeface="Open Sans"/>
               </a:rPr>
               <a:t>A hybrid quantum-classical ML workflow with CUDA-Q at the center  </a:t>
             </a:r>
-            <a:endParaRPr b="0" lang="en-US" sz="3600" spc="-1" strike="noStrike">
-              <a:solidFill>
-                <a:srgbClr val="000000"/>
-              </a:solidFill>
+            <a:endParaRPr b="0" lang="en-US" sz="3600" strike="noStrike" u="none">
+              <a:solidFill>
+                <a:srgbClr val="000000"/>
+              </a:solidFill>
+              <a:uFillTx/>
               <a:latin typeface="Arial"/>
             </a:endParaRPr>
           </a:p>
@@ -8805,7 +9128,7 @@
         <p:spPr>
           <a:xfrm>
             <a:off x="579960" y="17087400"/>
-            <a:ext cx="10167840" cy="839160"/>
+            <a:ext cx="10167480" cy="838800"/>
           </a:xfrm>
           <a:prstGeom prst="rect">
             <a:avLst/>
@@ -8837,19 +9160,21 @@
               </a:lnSpc>
             </a:pPr>
             <a:r>
-              <a:rPr b="0" lang="en-US" sz="4800" spc="-1" strike="noStrike">
+              <a:rPr b="0" lang="en-US" sz="4800" strike="noStrike" u="none">
                 <a:solidFill>
                   <a:srgbClr val="ffffff"/>
                 </a:solidFill>
+                <a:uFillTx/>
                 <a:latin typeface="Bree Serif"/>
                 <a:ea typeface="Arial"/>
               </a:rPr>
               <a:t>Motivation</a:t>
             </a:r>
-            <a:endParaRPr b="0" lang="en-US" sz="4800" spc="-1" strike="noStrike">
+            <a:endParaRPr b="0" lang="en-US" sz="4800" strike="noStrike" u="none">
               <a:solidFill>
                 <a:srgbClr val="ffffff"/>
               </a:solidFill>
+              <a:uFillTx/>
               <a:latin typeface="Arial"/>
             </a:endParaRPr>
           </a:p>
@@ -8864,7 +9189,7 @@
         <p:spPr>
           <a:xfrm>
             <a:off x="579960" y="25367400"/>
-            <a:ext cx="10158480" cy="839160"/>
+            <a:ext cx="10158120" cy="838800"/>
           </a:xfrm>
           <a:prstGeom prst="rect">
             <a:avLst/>
@@ -8895,19 +9220,21 @@
               </a:lnSpc>
             </a:pPr>
             <a:r>
-              <a:rPr b="0" lang="en-US" sz="4800" spc="-1" strike="noStrike">
+              <a:rPr b="0" lang="en-US" sz="4800" strike="noStrike" u="none">
                 <a:solidFill>
                   <a:srgbClr val="ffffff"/>
                 </a:solidFill>
+                <a:uFillTx/>
                 <a:latin typeface="Bree Serif"/>
                 <a:ea typeface="Arial"/>
               </a:rPr>
               <a:t>Challenges</a:t>
             </a:r>
-            <a:endParaRPr b="0" lang="en-US" sz="4800" spc="-1" strike="noStrike">
+            <a:endParaRPr b="0" lang="en-US" sz="4800" strike="noStrike" u="none">
               <a:solidFill>
                 <a:srgbClr val="ffffff"/>
               </a:solidFill>
+              <a:uFillTx/>
               <a:latin typeface="Arial"/>
             </a:endParaRPr>
           </a:p>
@@ -8922,7 +9249,7 @@
         <p:spPr>
           <a:xfrm>
             <a:off x="27781200" y="2971800"/>
-            <a:ext cx="4798800" cy="1827000"/>
+            <a:ext cx="4798440" cy="1826640"/>
           </a:xfrm>
           <a:prstGeom prst="rect">
             <a:avLst/>
@@ -8955,19 +9282,21 @@
               </a:tabLst>
             </a:pPr>
             <a:r>
-              <a:rPr b="0" lang="en-US" sz="5600" spc="-1" strike="noStrike">
+              <a:rPr b="0" lang="en-US" sz="5600" strike="noStrike" u="none">
                 <a:solidFill>
                   <a:srgbClr val="ffffff"/>
                 </a:solidFill>
+                <a:uFillTx/>
                 <a:latin typeface="Open Sans"/>
                 <a:ea typeface="Open Sans"/>
               </a:rPr>
               <a:t>Pooja Rao</a:t>
             </a:r>
-            <a:endParaRPr b="0" lang="en-US" sz="5600" spc="-1" strike="noStrike">
-              <a:solidFill>
-                <a:srgbClr val="000000"/>
-              </a:solidFill>
+            <a:endParaRPr b="0" lang="en-US" sz="5600" strike="noStrike" u="none">
+              <a:solidFill>
+                <a:srgbClr val="000000"/>
+              </a:solidFill>
+              <a:uFillTx/>
               <a:latin typeface="Arial"/>
             </a:endParaRPr>
           </a:p>
@@ -8982,7 +9311,7 @@
         <p:spPr>
           <a:xfrm>
             <a:off x="19905480" y="2971800"/>
-            <a:ext cx="4798800" cy="1827000"/>
+            <a:ext cx="4798440" cy="1826640"/>
           </a:xfrm>
           <a:prstGeom prst="rect">
             <a:avLst/>
@@ -9015,19 +9344,21 @@
               </a:tabLst>
             </a:pPr>
             <a:r>
-              <a:rPr b="0" lang="en-US" sz="5600" spc="-1" strike="noStrike">
+              <a:rPr b="0" lang="en-US" sz="5600" strike="noStrike" u="none">
                 <a:solidFill>
                   <a:srgbClr val="ffffff"/>
                 </a:solidFill>
+                <a:uFillTx/>
                 <a:latin typeface="Open Sans"/>
                 <a:ea typeface="Open Sans"/>
               </a:rPr>
               <a:t>Iris Bahar</a:t>
             </a:r>
-            <a:endParaRPr b="0" lang="en-US" sz="5600" spc="-1" strike="noStrike">
-              <a:solidFill>
-                <a:srgbClr val="000000"/>
-              </a:solidFill>
+            <a:endParaRPr b="0" lang="en-US" sz="5600" strike="noStrike" u="none">
+              <a:solidFill>
+                <a:srgbClr val="000000"/>
+              </a:solidFill>
+              <a:uFillTx/>
               <a:latin typeface="Arial"/>
             </a:endParaRPr>
           </a:p>
@@ -9042,7 +9373,7 @@
         <p:spPr>
           <a:xfrm>
             <a:off x="9781920" y="2971800"/>
-            <a:ext cx="4798800" cy="1827000"/>
+            <a:ext cx="4798440" cy="1826640"/>
           </a:xfrm>
           <a:prstGeom prst="rect">
             <a:avLst/>
@@ -9075,19 +9406,21 @@
               </a:tabLst>
             </a:pPr>
             <a:r>
-              <a:rPr b="0" lang="en-US" sz="5600" spc="-1" strike="noStrike">
+              <a:rPr b="0" lang="en-US" sz="5600" strike="noStrike" u="none">
                 <a:solidFill>
                   <a:srgbClr val="ffffff"/>
                 </a:solidFill>
+                <a:uFillTx/>
                 <a:latin typeface="Open Sans"/>
                 <a:ea typeface="Open Sans"/>
               </a:rPr>
               <a:t>Will Buziak</a:t>
             </a:r>
-            <a:endParaRPr b="0" lang="en-US" sz="5600" spc="-1" strike="noStrike">
-              <a:solidFill>
-                <a:srgbClr val="000000"/>
-              </a:solidFill>
+            <a:endParaRPr b="0" lang="en-US" sz="5600" strike="noStrike" u="none">
+              <a:solidFill>
+                <a:srgbClr val="000000"/>
+              </a:solidFill>
+              <a:uFillTx/>
               <a:latin typeface="Arial"/>
             </a:endParaRPr>
           </a:p>
@@ -9106,7 +9439,7 @@
         <p:spPr>
           <a:xfrm>
             <a:off x="38176200" y="31318200"/>
-            <a:ext cx="4951080" cy="1533600"/>
+            <a:ext cx="4950720" cy="1533240"/>
           </a:xfrm>
           <a:prstGeom prst="rect">
             <a:avLst/>
@@ -9125,7 +9458,7 @@
         <p:spPr>
           <a:xfrm>
             <a:off x="33256440" y="17618760"/>
-            <a:ext cx="9596520" cy="10182600"/>
+            <a:ext cx="9596160" cy="10731240"/>
           </a:xfrm>
           <a:prstGeom prst="rect">
             <a:avLst/>
@@ -9163,39 +9496,43 @@
               </a:tabLst>
             </a:pPr>
             <a:r>
-              <a:rPr b="0" lang="en-US" sz="3600" spc="-1" strike="noStrike">
+              <a:rPr b="0" lang="en-US" sz="3600" strike="noStrike" u="none">
                 <a:solidFill>
                   <a:schemeClr val="dk1"/>
                 </a:solidFill>
+                <a:uFillTx/>
                 <a:latin typeface="Open Sans"/>
                 <a:ea typeface="Open Sans"/>
               </a:rPr>
               <a:t>Each major component of this paradigm is intended to be </a:t>
             </a:r>
             <a:r>
-              <a:rPr b="1" lang="en-US" sz="3600" spc="-1" strike="noStrike">
+              <a:rPr b="1" lang="en-US" sz="3600" strike="noStrike" u="none">
                 <a:solidFill>
                   <a:schemeClr val="dk1"/>
                 </a:solidFill>
+                <a:uFillTx/>
                 <a:latin typeface="Open Sans"/>
                 <a:ea typeface="Open Sans"/>
               </a:rPr>
               <a:t>interchangeable</a:t>
             </a:r>
             <a:r>
-              <a:rPr b="0" lang="en-US" sz="3600" spc="-1" strike="noStrike">
+              <a:rPr b="0" lang="en-US" sz="3600" strike="noStrike" u="none">
                 <a:solidFill>
                   <a:schemeClr val="dk1"/>
                 </a:solidFill>
+                <a:uFillTx/>
                 <a:latin typeface="Open Sans"/>
                 <a:ea typeface="Open Sans"/>
               </a:rPr>
               <a:t>, opening the door for a larger swath of applications.</a:t>
             </a:r>
-            <a:endParaRPr b="0" lang="en-US" sz="3600" spc="-1" strike="noStrike">
-              <a:solidFill>
-                <a:srgbClr val="000000"/>
-              </a:solidFill>
+            <a:endParaRPr b="0" lang="en-US" sz="3600" strike="noStrike" u="none">
+              <a:solidFill>
+                <a:srgbClr val="000000"/>
+              </a:solidFill>
+              <a:uFillTx/>
               <a:latin typeface="Arial"/>
             </a:endParaRPr>
           </a:p>
@@ -9214,39 +9551,43 @@
               </a:tabLst>
             </a:pPr>
             <a:r>
-              <a:rPr b="0" lang="en-US" sz="3600" spc="-1" strike="noStrike">
+              <a:rPr b="0" lang="en-US" sz="3600" strike="noStrike" u="none">
                 <a:solidFill>
                   <a:schemeClr val="dk1"/>
                 </a:solidFill>
+                <a:uFillTx/>
                 <a:latin typeface="Open Sans"/>
                 <a:ea typeface="Open Sans"/>
               </a:rPr>
               <a:t>Quantum computing provides speedups over classical solutions when algorithms can map to an algorithm that takes advantage of </a:t>
             </a:r>
             <a:r>
-              <a:rPr b="1" lang="en-US" sz="3600" spc="-1" strike="noStrike">
+              <a:rPr b="1" lang="en-US" sz="3600" strike="noStrike" u="none">
                 <a:solidFill>
                   <a:schemeClr val="dk1"/>
                 </a:solidFill>
+                <a:uFillTx/>
                 <a:latin typeface="Open Sans"/>
                 <a:ea typeface="Open Sans"/>
               </a:rPr>
               <a:t>entanglement similarities</a:t>
             </a:r>
             <a:r>
-              <a:rPr b="0" lang="en-US" sz="3600" spc="-1" strike="noStrike">
+              <a:rPr b="0" lang="en-US" sz="3600" strike="noStrike" u="none">
                 <a:solidFill>
                   <a:schemeClr val="dk1"/>
                 </a:solidFill>
+                <a:uFillTx/>
                 <a:latin typeface="Open Sans"/>
                 <a:ea typeface="Open Sans"/>
               </a:rPr>
               <a:t>.</a:t>
             </a:r>
-            <a:endParaRPr b="0" lang="en-US" sz="3600" spc="-1" strike="noStrike">
-              <a:solidFill>
-                <a:srgbClr val="000000"/>
-              </a:solidFill>
+            <a:endParaRPr b="0" lang="en-US" sz="3600" strike="noStrike" u="none">
+              <a:solidFill>
+                <a:srgbClr val="000000"/>
+              </a:solidFill>
+              <a:uFillTx/>
               <a:latin typeface="Arial"/>
             </a:endParaRPr>
           </a:p>
@@ -9265,39 +9606,43 @@
               </a:tabLst>
             </a:pPr>
             <a:r>
-              <a:rPr b="0" lang="en-US" sz="3600" spc="-1" strike="noStrike">
+              <a:rPr b="0" lang="en-US" sz="3600" strike="noStrike" u="none">
                 <a:solidFill>
                   <a:schemeClr val="dk1"/>
                 </a:solidFill>
+                <a:uFillTx/>
                 <a:latin typeface="Open Sans"/>
                 <a:ea typeface="Open Sans"/>
               </a:rPr>
               <a:t>Quantum Architecture &amp; Compilation frameworks can </a:t>
             </a:r>
             <a:r>
-              <a:rPr b="1" lang="en-US" sz="3600" spc="-1" strike="noStrike">
+              <a:rPr b="1" lang="en-US" sz="3600" strike="noStrike" u="none">
                 <a:solidFill>
                   <a:schemeClr val="dk1"/>
                 </a:solidFill>
+                <a:uFillTx/>
                 <a:latin typeface="Open Sans"/>
                 <a:ea typeface="Open Sans"/>
               </a:rPr>
               <a:t>target heterogeneous</a:t>
             </a:r>
             <a:r>
-              <a:rPr b="0" lang="en-US" sz="3600" spc="-1" strike="noStrike">
+              <a:rPr b="0" lang="en-US" sz="3600" strike="noStrike" u="none">
                 <a:solidFill>
                   <a:schemeClr val="dk1"/>
                 </a:solidFill>
+                <a:uFillTx/>
                 <a:latin typeface="Open Sans"/>
                 <a:ea typeface="Open Sans"/>
               </a:rPr>
               <a:t> distributed systems.</a:t>
             </a:r>
-            <a:endParaRPr b="0" lang="en-US" sz="3600" spc="-1" strike="noStrike">
-              <a:solidFill>
-                <a:srgbClr val="000000"/>
-              </a:solidFill>
+            <a:endParaRPr b="0" lang="en-US" sz="3600" strike="noStrike" u="none">
+              <a:solidFill>
+                <a:srgbClr val="000000"/>
+              </a:solidFill>
+              <a:uFillTx/>
               <a:latin typeface="Arial"/>
             </a:endParaRPr>
           </a:p>
@@ -9310,10 +9655,11 @@
                 <a:tab algn="l" pos="0"/>
               </a:tabLst>
             </a:pPr>
-            <a:endParaRPr b="0" lang="en-US" sz="3600" spc="-1" strike="noStrike">
-              <a:solidFill>
-                <a:srgbClr val="000000"/>
-              </a:solidFill>
+            <a:endParaRPr b="0" lang="en-US" sz="3600" strike="noStrike" u="none">
+              <a:solidFill>
+                <a:srgbClr val="000000"/>
+              </a:solidFill>
+              <a:uFillTx/>
               <a:latin typeface="Arial"/>
             </a:endParaRPr>
           </a:p>
@@ -9326,10 +9672,11 @@
                 <a:tab algn="l" pos="0"/>
               </a:tabLst>
             </a:pPr>
-            <a:endParaRPr b="0" lang="en-US" sz="3600" spc="-1" strike="noStrike">
-              <a:solidFill>
-                <a:srgbClr val="000000"/>
-              </a:solidFill>
+            <a:endParaRPr b="0" lang="en-US" sz="3600" strike="noStrike" u="none">
+              <a:solidFill>
+                <a:srgbClr val="000000"/>
+              </a:solidFill>
+              <a:uFillTx/>
               <a:latin typeface="Arial"/>
             </a:endParaRPr>
           </a:p>
@@ -9343,29 +9690,32 @@
               </a:tabLst>
             </a:pPr>
             <a:r>
-              <a:rPr b="0" lang="en-US" sz="3600" spc="-1" strike="noStrike">
+              <a:rPr b="0" lang="en-US" sz="3600" strike="noStrike" u="none">
                 <a:solidFill>
                   <a:schemeClr val="dk1"/>
                 </a:solidFill>
+                <a:uFillTx/>
                 <a:latin typeface="Open Sans"/>
                 <a:ea typeface="Open Sans"/>
               </a:rPr>
               <a:t>Quantum advantage is dependent on the ability to encode domain properties and conditions into the </a:t>
             </a:r>
             <a:r>
-              <a:rPr b="0" i="1" lang="en-US" sz="3600" spc="-1" strike="noStrike">
+              <a:rPr b="0" i="1" lang="en-US" sz="3600" strike="noStrike" u="none">
                 <a:solidFill>
                   <a:schemeClr val="dk1"/>
                 </a:solidFill>
+                <a:uFillTx/>
                 <a:latin typeface="Open Sans"/>
                 <a:ea typeface="Open Sans"/>
               </a:rPr>
               <a:t>quantum state</a:t>
             </a:r>
-            <a:endParaRPr b="0" lang="en-US" sz="3600" spc="-1" strike="noStrike">
-              <a:solidFill>
-                <a:srgbClr val="000000"/>
-              </a:solidFill>
+            <a:endParaRPr b="0" lang="en-US" sz="3600" strike="noStrike" u="none">
+              <a:solidFill>
+                <a:srgbClr val="000000"/>
+              </a:solidFill>
+              <a:uFillTx/>
               <a:latin typeface="Arial"/>
             </a:endParaRPr>
           </a:p>
@@ -9378,10 +9728,11 @@
                 <a:tab algn="l" pos="0"/>
               </a:tabLst>
             </a:pPr>
-            <a:endParaRPr b="0" lang="en-US" sz="3600" spc="-1" strike="noStrike">
-              <a:solidFill>
-                <a:srgbClr val="000000"/>
-              </a:solidFill>
+            <a:endParaRPr b="0" lang="en-US" sz="3600" strike="noStrike" u="none">
+              <a:solidFill>
+                <a:srgbClr val="000000"/>
+              </a:solidFill>
+              <a:uFillTx/>
               <a:latin typeface="Arial"/>
             </a:endParaRPr>
           </a:p>
@@ -9394,10 +9745,11 @@
                 <a:tab algn="l" pos="0"/>
               </a:tabLst>
             </a:pPr>
-            <a:endParaRPr b="0" lang="en-US" sz="3600" spc="-1" strike="noStrike">
-              <a:solidFill>
-                <a:srgbClr val="000000"/>
-              </a:solidFill>
+            <a:endParaRPr b="0" lang="en-US" sz="3600" strike="noStrike" u="none">
+              <a:solidFill>
+                <a:srgbClr val="000000"/>
+              </a:solidFill>
+              <a:uFillTx/>
               <a:latin typeface="Arial"/>
             </a:endParaRPr>
           </a:p>
@@ -9416,7 +9768,7 @@
         <p:spPr>
           <a:xfrm>
             <a:off x="990000" y="12171600"/>
-            <a:ext cx="9459360" cy="2056680"/>
+            <a:ext cx="9459000" cy="2056320"/>
           </a:xfrm>
           <a:prstGeom prst="rect">
             <a:avLst/>
@@ -9435,7 +9787,7 @@
         <p:spPr>
           <a:xfrm>
             <a:off x="577800" y="26289000"/>
-            <a:ext cx="10163160" cy="5256720"/>
+            <a:ext cx="10162800" cy="5256360"/>
           </a:xfrm>
           <a:prstGeom prst="rect">
             <a:avLst/>
@@ -9471,59 +9823,65 @@
               <a:buChar char=""/>
             </a:pPr>
             <a:r>
-              <a:rPr b="0" lang="en-US" sz="3600" spc="-1" strike="noStrike">
+              <a:rPr b="0" lang="en-US" sz="3600" strike="noStrike" u="none">
                 <a:solidFill>
                   <a:schemeClr val="dk1"/>
                 </a:solidFill>
+                <a:uFillTx/>
                 <a:latin typeface="Open Sans"/>
                 <a:ea typeface="Open Sans"/>
               </a:rPr>
               <a:t>Quantum Hardware is </a:t>
             </a:r>
             <a:r>
-              <a:rPr b="1" lang="en-US" sz="3600" spc="-1" strike="noStrike">
+              <a:rPr b="1" lang="en-US" sz="3600" strike="noStrike" u="none">
                 <a:solidFill>
                   <a:schemeClr val="dk1"/>
                 </a:solidFill>
+                <a:uFillTx/>
                 <a:latin typeface="Open Sans"/>
                 <a:ea typeface="Open Sans"/>
               </a:rPr>
               <a:t>noisy</a:t>
             </a:r>
             <a:r>
-              <a:rPr b="0" lang="en-US" sz="3600" spc="-1" strike="noStrike">
+              <a:rPr b="0" lang="en-US" sz="3600" strike="noStrike" u="none">
                 <a:solidFill>
                   <a:schemeClr val="dk1"/>
                 </a:solidFill>
+                <a:uFillTx/>
                 <a:latin typeface="Open Sans"/>
                 <a:ea typeface="Open Sans"/>
               </a:rPr>
               <a:t> &amp; </a:t>
             </a:r>
             <a:r>
-              <a:rPr b="1" lang="en-US" sz="3600" spc="-1" strike="noStrike">
+              <a:rPr b="1" lang="en-US" sz="3600" strike="noStrike" u="none">
                 <a:solidFill>
                   <a:schemeClr val="dk1"/>
                 </a:solidFill>
+                <a:uFillTx/>
                 <a:latin typeface="Open Sans"/>
                 <a:ea typeface="Open Sans"/>
               </a:rPr>
               <a:t>unreliable</a:t>
             </a:r>
             <a:r>
-              <a:rPr b="0" lang="en-US" sz="3600" spc="-1" strike="noStrike">
+              <a:rPr b="0" lang="en-US" sz="3600" strike="noStrike" u="none">
                 <a:solidFill>
                   <a:schemeClr val="dk1"/>
                 </a:solidFill>
+                <a:uFillTx/>
                 <a:latin typeface="Open Sans"/>
                 <a:ea typeface="Open Sans"/>
               </a:rPr>
               <a:t>.</a:t>
             </a:r>
-            <a:endParaRPr b="0" lang="en-US" sz="3600" spc="-1" strike="noStrike">
-              <a:solidFill>
-                <a:srgbClr val="000000"/>
-              </a:solidFill>
+            <a:endParaRPr b="0" lang="en-US" sz="3600" strike="noStrike" u="none">
+              <a:solidFill>
+                <a:srgbClr val="000000"/>
+              </a:solidFill>
+              <a:uFillTx/>
               <a:latin typeface="Arial"/>
             </a:endParaRPr>
           </a:p>
@@ -9543,39 +9901,43 @@
               <a:buChar char=""/>
             </a:pPr>
             <a:r>
-              <a:rPr b="0" lang="en-US" sz="3600" spc="-1" strike="noStrike">
+              <a:rPr b="0" lang="en-US" sz="3600" strike="noStrike" u="none">
                 <a:solidFill>
                   <a:schemeClr val="dk1"/>
                 </a:solidFill>
+                <a:uFillTx/>
                 <a:latin typeface="Open Sans"/>
                 <a:ea typeface="Open Sans"/>
               </a:rPr>
               <a:t>Qubit technologies are </a:t>
             </a:r>
             <a:r>
-              <a:rPr b="0" i="1" lang="en-US" sz="3600" spc="-1" strike="noStrike">
+              <a:rPr b="0" i="1" lang="en-US" sz="3600" strike="noStrike" u="none">
                 <a:solidFill>
                   <a:schemeClr val="dk1"/>
                 </a:solidFill>
+                <a:uFillTx/>
                 <a:latin typeface="Open Sans"/>
                 <a:ea typeface="Open Sans"/>
               </a:rPr>
               <a:t>non-homogeneous</a:t>
             </a:r>
             <a:r>
-              <a:rPr b="0" lang="en-US" sz="3600" spc="-1" strike="noStrike">
+              <a:rPr b="0" lang="en-US" sz="3600" strike="noStrike" u="none">
                 <a:solidFill>
                   <a:schemeClr val="dk1"/>
                 </a:solidFill>
+                <a:uFillTx/>
                 <a:latin typeface="Open Sans"/>
                 <a:ea typeface="Open Sans"/>
               </a:rPr>
               <a:t>.</a:t>
             </a:r>
-            <a:endParaRPr b="0" lang="en-US" sz="3600" spc="-1" strike="noStrike">
-              <a:solidFill>
-                <a:srgbClr val="000000"/>
-              </a:solidFill>
+            <a:endParaRPr b="0" lang="en-US" sz="3600" strike="noStrike" u="none">
+              <a:solidFill>
+                <a:srgbClr val="000000"/>
+              </a:solidFill>
+              <a:uFillTx/>
               <a:latin typeface="Arial"/>
             </a:endParaRPr>
           </a:p>
@@ -9595,39 +9957,43 @@
               <a:buChar char=""/>
             </a:pPr>
             <a:r>
-              <a:rPr b="0" lang="en-US" sz="3600" spc="-1" strike="noStrike">
+              <a:rPr b="0" lang="en-US" sz="3600" strike="noStrike" u="none">
                 <a:solidFill>
                   <a:schemeClr val="dk1"/>
                 </a:solidFill>
+                <a:uFillTx/>
                 <a:latin typeface="Open Sans"/>
                 <a:ea typeface="Open Sans"/>
               </a:rPr>
               <a:t>Classical models experience </a:t>
             </a:r>
             <a:r>
-              <a:rPr b="0" i="1" lang="en-US" sz="3600" spc="-1" strike="noStrike">
+              <a:rPr b="0" i="1" lang="en-US" sz="3600" strike="noStrike" u="none">
                 <a:solidFill>
                   <a:schemeClr val="dk1"/>
                 </a:solidFill>
+                <a:uFillTx/>
                 <a:latin typeface="Open Sans"/>
                 <a:ea typeface="Open Sans"/>
               </a:rPr>
               <a:t>exponential blowup</a:t>
             </a:r>
             <a:r>
-              <a:rPr b="0" lang="en-US" sz="3600" spc="-1" strike="noStrike">
+              <a:rPr b="0" lang="en-US" sz="3600" strike="noStrike" u="none">
                 <a:solidFill>
                   <a:schemeClr val="dk1"/>
                 </a:solidFill>
+                <a:uFillTx/>
                 <a:latin typeface="Open Sans"/>
                 <a:ea typeface="Open Sans"/>
               </a:rPr>
               <a:t> when scaling to real-world systems.</a:t>
             </a:r>
-            <a:endParaRPr b="0" lang="en-US" sz="3600" spc="-1" strike="noStrike">
-              <a:solidFill>
-                <a:srgbClr val="000000"/>
-              </a:solidFill>
+            <a:endParaRPr b="0" lang="en-US" sz="3600" strike="noStrike" u="none">
+              <a:solidFill>
+                <a:srgbClr val="000000"/>
+              </a:solidFill>
+              <a:uFillTx/>
               <a:latin typeface="Arial"/>
             </a:endParaRPr>
           </a:p>
@@ -9647,39 +10013,43 @@
               <a:buChar char=""/>
             </a:pPr>
             <a:r>
-              <a:rPr b="0" lang="en-US" sz="3600" spc="-1" strike="noStrike">
+              <a:rPr b="0" lang="en-US" sz="3600" strike="noStrike" u="none">
                 <a:solidFill>
                   <a:schemeClr val="dk1"/>
                 </a:solidFill>
+                <a:uFillTx/>
                 <a:latin typeface="Open Sans"/>
                 <a:ea typeface="Open Sans"/>
               </a:rPr>
               <a:t>Algorithm design is </a:t>
             </a:r>
             <a:r>
-              <a:rPr b="0" i="1" lang="en-US" sz="3600" spc="-1" strike="noStrike">
+              <a:rPr b="0" i="1" lang="en-US" sz="3600" strike="noStrike" u="none">
                 <a:solidFill>
                   <a:schemeClr val="dk1"/>
                 </a:solidFill>
+                <a:uFillTx/>
                 <a:latin typeface="Open Sans"/>
                 <a:ea typeface="Open Sans"/>
               </a:rPr>
               <a:t>non-trivial</a:t>
             </a:r>
             <a:r>
-              <a:rPr b="0" lang="en-US" sz="3600" spc="-1" strike="noStrike">
+              <a:rPr b="0" lang="en-US" sz="3600" strike="noStrike" u="none">
                 <a:solidFill>
                   <a:schemeClr val="dk1"/>
                 </a:solidFill>
+                <a:uFillTx/>
                 <a:latin typeface="Open Sans"/>
                 <a:ea typeface="Open Sans"/>
               </a:rPr>
               <a:t> &amp; often requires additional techniques to improve circuit fidelity on NISQ hardware.</a:t>
             </a:r>
-            <a:endParaRPr b="0" lang="en-US" sz="3600" spc="-1" strike="noStrike">
-              <a:solidFill>
-                <a:srgbClr val="000000"/>
-              </a:solidFill>
+            <a:endParaRPr b="0" lang="en-US" sz="3600" strike="noStrike" u="none">
+              <a:solidFill>
+                <a:srgbClr val="000000"/>
+              </a:solidFill>
+              <a:uFillTx/>
               <a:latin typeface="Arial"/>
             </a:endParaRPr>
           </a:p>
@@ -9692,10 +10062,11 @@
                 <a:spcPts val="1417"/>
               </a:spcBef>
             </a:pPr>
-            <a:endParaRPr b="0" lang="en-US" sz="3600" spc="-1" strike="noStrike">
-              <a:solidFill>
-                <a:srgbClr val="000000"/>
-              </a:solidFill>
+            <a:endParaRPr b="0" lang="en-US" sz="3600" strike="noStrike" u="none">
+              <a:solidFill>
+                <a:srgbClr val="000000"/>
+              </a:solidFill>
+              <a:uFillTx/>
               <a:latin typeface="Arial"/>
             </a:endParaRPr>
           </a:p>
@@ -9714,7 +10085,7 @@
         <p:spPr>
           <a:xfrm>
             <a:off x="33444360" y="8242200"/>
-            <a:ext cx="4202280" cy="2514240"/>
+            <a:ext cx="4201920" cy="2513880"/>
           </a:xfrm>
           <a:prstGeom prst="rect">
             <a:avLst/>
@@ -9737,7 +10108,7 @@
         <p:spPr>
           <a:xfrm>
             <a:off x="38932200" y="8251920"/>
-            <a:ext cx="4125600" cy="2468520"/>
+            <a:ext cx="4125240" cy="2468160"/>
           </a:xfrm>
           <a:prstGeom prst="rect">
             <a:avLst/>
@@ -9760,7 +10131,7 @@
         <p:spPr>
           <a:xfrm>
             <a:off x="36082800" y="12006720"/>
-            <a:ext cx="4125600" cy="2468520"/>
+            <a:ext cx="4125240" cy="2468160"/>
           </a:xfrm>
           <a:prstGeom prst="rect">
             <a:avLst/>
@@ -9781,8 +10152,8 @@
         </p:nvCxnSpPr>
         <p:spPr>
           <a:xfrm flipV="1">
-            <a:off x="37646640" y="9486000"/>
-            <a:ext cx="1285920" cy="13680"/>
+            <a:off x="37646280" y="9486000"/>
+            <a:ext cx="1286280" cy="13320"/>
           </a:xfrm>
           <a:prstGeom prst="straightConnector1">
             <a:avLst/>
@@ -9807,8 +10178,8 @@
         </p:nvCxnSpPr>
         <p:spPr>
           <a:xfrm rot="5400000">
-            <a:off x="39341160" y="11587320"/>
-            <a:ext cx="2520720" cy="786960"/>
+            <a:off x="39340800" y="11587320"/>
+            <a:ext cx="2521080" cy="786960"/>
           </a:xfrm>
           <a:prstGeom prst="curvedConnector2">
             <a:avLst/>
@@ -9834,7 +10205,7 @@
         <p:spPr>
           <a:xfrm rot="10800000">
             <a:off x="35544960" y="10756080"/>
-            <a:ext cx="537840" cy="2484720"/>
+            <a:ext cx="537840" cy="2485080"/>
           </a:xfrm>
           <a:prstGeom prst="curvedConnector2">
             <a:avLst/>
@@ -9861,7 +10232,7 @@
         <p:spPr>
           <a:xfrm>
             <a:off x="23398920" y="9928800"/>
-            <a:ext cx="7990920" cy="3599640"/>
+            <a:ext cx="7990560" cy="3599280"/>
           </a:xfrm>
           <a:prstGeom prst="rect">
             <a:avLst/>
@@ -9884,7 +10255,7 @@
         <p:spPr>
           <a:xfrm>
             <a:off x="22302720" y="21675600"/>
-            <a:ext cx="10224000" cy="4971240"/>
+            <a:ext cx="10223640" cy="4970880"/>
           </a:xfrm>
           <a:prstGeom prst="rect">
             <a:avLst/>
@@ -9907,7 +10278,7 @@
         <p:spPr>
           <a:xfrm>
             <a:off x="275400" y="31180680"/>
-            <a:ext cx="11069640" cy="1903320"/>
+            <a:ext cx="11069280" cy="1902960"/>
           </a:xfrm>
           <a:prstGeom prst="rect">
             <a:avLst/>
@@ -9930,7 +10301,7 @@
         <p:spPr>
           <a:xfrm>
             <a:off x="11658600" y="21926160"/>
-            <a:ext cx="9666000" cy="8524440"/>
+            <a:ext cx="9665640" cy="8524080"/>
           </a:xfrm>
           <a:prstGeom prst="rect">
             <a:avLst/>
@@ -9953,7 +10324,7 @@
         <p:spPr>
           <a:xfrm>
             <a:off x="39450960" y="27360000"/>
-            <a:ext cx="3297240" cy="2761200"/>
+            <a:ext cx="3296880" cy="2760840"/>
           </a:xfrm>
           <a:prstGeom prst="rect">
             <a:avLst/>
@@ -9976,7 +10347,7 @@
         <p:spPr>
           <a:xfrm>
             <a:off x="1506600" y="22368600"/>
-            <a:ext cx="8480520" cy="2728800"/>
+            <a:ext cx="8480160" cy="2728440"/>
           </a:xfrm>
           <a:prstGeom prst="rect">
             <a:avLst/>
@@ -10000,7 +10371,7 @@
         <p:spPr>
           <a:xfrm>
             <a:off x="33532200" y="27503640"/>
-            <a:ext cx="4471920" cy="2502360"/>
+            <a:ext cx="4471560" cy="2502000"/>
           </a:xfrm>
           <a:prstGeom prst="rect">
             <a:avLst/>
@@ -10021,8 +10392,8 @@
         </p:nvCxnSpPr>
         <p:spPr>
           <a:xfrm flipV="1">
-            <a:off x="38004120" y="28740600"/>
-            <a:ext cx="1447200" cy="14400"/>
+            <a:off x="38003760" y="28740240"/>
+            <a:ext cx="1447560" cy="14760"/>
           </a:xfrm>
           <a:prstGeom prst="straightConnector1">
             <a:avLst/>
@@ -10068,11 +10439,13 @@
             <a:noAutofit/>
           </a:bodyPr>
           <a:p>
-            <a:endParaRPr b="0" lang="en-US" sz="1800" spc="-1" strike="noStrike">
-              <a:solidFill>
-                <a:srgbClr val="000000"/>
-              </a:solidFill>
-              <a:latin typeface="Arial"/>
+            <a:endParaRPr b="0" lang="en-US" sz="1800" strike="noStrike" u="none">
+              <a:solidFill>
+                <a:srgbClr val="000000"/>
+              </a:solidFill>
+              <a:uFillTx/>
+              <a:latin typeface="Arial"/>
+              <a:ea typeface="Arial"/>
             </a:endParaRPr>
           </a:p>
         </p:txBody>
@@ -10109,11 +10482,13 @@
             <a:noAutofit/>
           </a:bodyPr>
           <a:p>
-            <a:endParaRPr b="0" lang="en-US" sz="1800" spc="-1" strike="noStrike">
-              <a:solidFill>
-                <a:srgbClr val="000000"/>
-              </a:solidFill>
-              <a:latin typeface="Arial"/>
+            <a:endParaRPr b="0" lang="en-US" sz="1800" strike="noStrike" u="none">
+              <a:solidFill>
+                <a:srgbClr val="000000"/>
+              </a:solidFill>
+              <a:uFillTx/>
+              <a:latin typeface="Arial"/>
+              <a:ea typeface="Arial"/>
             </a:endParaRPr>
           </a:p>
         </p:txBody>
@@ -10121,13 +10496,13 @@
       <p:sp>
         <p:nvSpPr>
           <p:cNvPr id="136" name=""/>
-          <p:cNvSpPr txBox="1"/>
+          <p:cNvSpPr/>
           <p:nvPr/>
         </p:nvSpPr>
         <p:spPr>
           <a:xfrm>
             <a:off x="14293800" y="12596400"/>
-            <a:ext cx="4572000" cy="1053000"/>
+            <a:ext cx="4571640" cy="1052640"/>
           </a:xfrm>
           <a:prstGeom prst="rect">
             <a:avLst/>
@@ -10137,25 +10512,37 @@
             <a:noFill/>
           </a:ln>
         </p:spPr>
+        <p:style>
+          <a:lnRef idx="0"/>
+          <a:fillRef idx="0"/>
+          <a:effectRef idx="0"/>
+          <a:fontRef idx="minor"/>
+        </p:style>
         <p:txBody>
           <a:bodyPr lIns="90000" rIns="90000" tIns="45000" bIns="45000" anchor="t">
             <a:noAutofit/>
           </a:bodyPr>
           <a:p>
-            <a:pPr algn="ctr"/>
-            <a:r>
-              <a:rPr b="1" lang="en-US" sz="2800" spc="-1" strike="noStrike">
+            <a:pPr algn="ctr">
+              <a:lnSpc>
+                <a:spcPct val="100000"/>
+              </a:lnSpc>
+            </a:pPr>
+            <a:r>
+              <a:rPr b="1" lang="en-US" sz="2800" strike="noStrike" u="none">
                 <a:solidFill>
                   <a:srgbClr val="000000"/>
                 </a:solidFill>
+                <a:uFillTx/>
                 <a:latin typeface="Arial"/>
               </a:rPr>
               <a:t>Compilation Techniques</a:t>
             </a:r>
-            <a:endParaRPr b="1" lang="en-US" sz="2800" spc="-1" strike="noStrike" baseline="-8000">
-              <a:solidFill>
-                <a:srgbClr val="000000"/>
-              </a:solidFill>
+            <a:endParaRPr b="0" lang="en-US" sz="2800" strike="noStrike" u="none">
+              <a:solidFill>
+                <a:srgbClr val="000000"/>
+              </a:solidFill>
+              <a:uFillTx/>
               <a:latin typeface="Arial"/>
             </a:endParaRPr>
           </a:p>
